--- a/SwasthyaGrid_AI_Hackathon_Pitch.pptx
+++ b/SwasthyaGrid_AI_Hackathon_Pitch.pptx
@@ -4,24 +4,21 @@
   <p:sldMasterIdLst>
     <p:sldMasterId id="2147483648" r:id="rId1"/>
   </p:sldMasterIdLst>
-  <p:notesMasterIdLst>
-    <p:notesMasterId r:id="rId14"/>
-  </p:notesMasterIdLst>
   <p:sldIdLst>
-    <p:sldId id="256" r:id="rId2"/>
-    <p:sldId id="257" r:id="rId3"/>
-    <p:sldId id="258" r:id="rId4"/>
-    <p:sldId id="259" r:id="rId5"/>
-    <p:sldId id="260" r:id="rId6"/>
-    <p:sldId id="261" r:id="rId7"/>
-    <p:sldId id="262" r:id="rId8"/>
-    <p:sldId id="263" r:id="rId9"/>
-    <p:sldId id="264" r:id="rId10"/>
-    <p:sldId id="265" r:id="rId11"/>
-    <p:sldId id="266" r:id="rId12"/>
-    <p:sldId id="267" r:id="rId13"/>
+    <p:sldId id="256" r:id="rId7"/>
+    <p:sldId id="257" r:id="rId9"/>
+    <p:sldId id="258" r:id="rId10"/>
+    <p:sldId id="259" r:id="rId11"/>
+    <p:sldId id="260" r:id="rId12"/>
+    <p:sldId id="261" r:id="rId13"/>
+    <p:sldId id="262" r:id="rId14"/>
+    <p:sldId id="263" r:id="rId15"/>
+    <p:sldId id="264" r:id="rId16"/>
+    <p:sldId id="265" r:id="rId17"/>
+    <p:sldId id="266" r:id="rId18"/>
+    <p:sldId id="267" r:id="rId19"/>
   </p:sldIdLst>
-  <p:sldSz cx="12192000" cy="6858000"/>
+  <p:sldSz cx="12191695" cy="6858000" type="screen4x3"/>
   <p:notesSz cx="6858000" cy="9144000"/>
   <p:defaultTextStyle>
     <a:defPPr>
@@ -118,27 +115,11 @@
       </a:defRPr>
     </a:lvl9pPr>
   </p:defaultTextStyle>
-  <p:extLst>
-    <p:ext uri="{EFAFB233-063F-42B5-8137-9DF3F51BA10A}">
-      <p15:sldGuideLst xmlns:p15="http://schemas.microsoft.com/office/powerpoint/2012/main">
-        <p15:guide id="1" orient="horz" pos="2160">
-          <p15:clr>
-            <a:srgbClr val="A4A3A4"/>
-          </p15:clr>
-        </p15:guide>
-        <p15:guide id="2" pos="2880">
-          <p15:clr>
-            <a:srgbClr val="A4A3A4"/>
-          </p15:clr>
-        </p15:guide>
-      </p15:sldGuideLst>
-    </p:ext>
-  </p:extLst>
 </p:presentation>
 </file>
 
 <file path=ppt/notesMasters/notesMaster1.xml><?xml version="1.0" encoding="utf-8"?>
-<p:notesMaster xmlns:a="http://schemas.openxmlformats.org/drawingml/2006/main" xmlns:r="http://schemas.openxmlformats.org/officeDocument/2006/relationships" xmlns:p="http://schemas.openxmlformats.org/presentationml/2006/main">
+<p:notesMaster xmlns:a="http://schemas.openxmlformats.org/drawingml/2006/main" xmlns:p="http://schemas.openxmlformats.org/presentationml/2006/main" xmlns:r="http://schemas.openxmlformats.org/officeDocument/2006/relationships">
   <p:cSld>
     <p:bg>
       <p:bgRef idx="1001">
@@ -159,16 +140,241 @@
           <a:chExt cx="0" cy="0"/>
         </a:xfrm>
       </p:grpSpPr>
+      <p:sp>
+        <p:nvSpPr>
+          <p:cNvPr id="2" name="Header Placeholder 1"/>
+          <p:cNvSpPr>
+            <a:spLocks noGrp="1"/>
+          </p:cNvSpPr>
+          <p:nvPr>
+            <p:ph type="hdr" sz="quarter"/>
+          </p:nvPr>
+        </p:nvSpPr>
+        <p:spPr>
+          <a:xfrm>
+            <a:off x="0" y="0"/>
+            <a:ext cx="2971800" cy="457200"/>
+          </a:xfrm>
+          <a:prstGeom prst="rect">
+            <a:avLst/>
+          </a:prstGeom>
+        </p:spPr>
+        <p:txBody>
+          <a:bodyPr vert="horz" lIns="91440" tIns="45720" rIns="91440" bIns="45720" rtlCol="0"/>
+          <a:lstStyle>
+            <a:lvl1pPr algn="l">
+              <a:defRPr sz="1200"/>
+            </a:lvl1pPr>
+          </a:lstStyle>
+          <a:p>
+            <a:endParaRPr lang="en-US"/>
+          </a:p>
+        </p:txBody>
+      </p:sp>
+      <p:sp>
+        <p:nvSpPr>
+          <p:cNvPr id="3" name="Date Placeholder 2"/>
+          <p:cNvSpPr>
+            <a:spLocks noGrp="1"/>
+          </p:cNvSpPr>
+          <p:nvPr>
+            <p:ph type="dt" idx="1"/>
+          </p:nvPr>
+        </p:nvSpPr>
+        <p:spPr>
+          <a:xfrm>
+            <a:off x="3884613" y="0"/>
+            <a:ext cx="2971800" cy="457200"/>
+          </a:xfrm>
+          <a:prstGeom prst="rect">
+            <a:avLst/>
+          </a:prstGeom>
+        </p:spPr>
+        <p:txBody>
+          <a:bodyPr vert="horz" lIns="91440" tIns="45720" rIns="91440" bIns="45720" rtlCol="0"/>
+          <a:lstStyle>
+            <a:lvl1pPr algn="r">
+              <a:defRPr sz="1200"/>
+            </a:lvl1pPr>
+          </a:lstStyle>
+          <a:p>
+            <a:fld id="{0F89C1C7-3DCD-1040-A9CF-14679D8B5DDD}" type="datetimeFigureOut">
+              <a:rPr lang="en-US" smtClean="0"/>
+              <a:t>10/17/16</a:t>
+            </a:fld>
+            <a:endParaRPr lang="en-US"/>
+          </a:p>
+        </p:txBody>
+      </p:sp>
+      <p:sp>
+        <p:nvSpPr>
+          <p:cNvPr id="4" name="Slide Image Placeholder 3"/>
+          <p:cNvSpPr>
+            <a:spLocks noGrp="1" noRot="1" noChangeAspect="1"/>
+          </p:cNvSpPr>
+          <p:nvPr>
+            <p:ph type="sldImg" idx="2"/>
+          </p:nvPr>
+        </p:nvSpPr>
+        <p:spPr>
+          <a:xfrm>
+            <a:off x="1143000" y="685800"/>
+            <a:ext cx="4572000" cy="3429000"/>
+          </a:xfrm>
+          <a:prstGeom prst="rect">
+            <a:avLst/>
+          </a:prstGeom>
+          <a:noFill/>
+          <a:ln w="12700">
+            <a:solidFill>
+              <a:prstClr val="black"/>
+            </a:solidFill>
+          </a:ln>
+        </p:spPr>
+        <p:txBody>
+          <a:bodyPr vert="horz" lIns="91440" tIns="45720" rIns="91440" bIns="45720" rtlCol="0" anchor="ctr"/>
+          <a:lstStyle/>
+          <a:p>
+            <a:endParaRPr lang="en-US"/>
+          </a:p>
+        </p:txBody>
+      </p:sp>
+      <p:sp>
+        <p:nvSpPr>
+          <p:cNvPr id="5" name="Notes Placeholder 4"/>
+          <p:cNvSpPr>
+            <a:spLocks noGrp="1"/>
+          </p:cNvSpPr>
+          <p:nvPr>
+            <p:ph type="body" sz="quarter" idx="3"/>
+          </p:nvPr>
+        </p:nvSpPr>
+        <p:spPr>
+          <a:xfrm>
+            <a:off x="685800" y="4343400"/>
+            <a:ext cx="5486400" cy="4114800"/>
+          </a:xfrm>
+          <a:prstGeom prst="rect">
+            <a:avLst/>
+          </a:prstGeom>
+        </p:spPr>
+        <p:txBody>
+          <a:bodyPr vert="horz" lIns="91440" tIns="45720" rIns="91440" bIns="45720" rtlCol="0"/>
+          <a:lstStyle/>
+          <a:p>
+            <a:pPr lvl="0"/>
+            <a:r>
+              <a:rPr lang="en-US" smtClean="0"/>
+              <a:t>Click to edit Master text styles</a:t>
+            </a:r>
+          </a:p>
+          <a:p>
+            <a:pPr lvl="1"/>
+            <a:r>
+              <a:rPr lang="en-US" smtClean="0"/>
+              <a:t>Second level</a:t>
+            </a:r>
+          </a:p>
+          <a:p>
+            <a:pPr lvl="2"/>
+            <a:r>
+              <a:rPr lang="en-US" smtClean="0"/>
+              <a:t>Third level</a:t>
+            </a:r>
+          </a:p>
+          <a:p>
+            <a:pPr lvl="3"/>
+            <a:r>
+              <a:rPr lang="en-US" smtClean="0"/>
+              <a:t>Fourth level</a:t>
+            </a:r>
+          </a:p>
+          <a:p>
+            <a:pPr lvl="4"/>
+            <a:r>
+              <a:rPr lang="en-US" smtClean="0"/>
+              <a:t>Fifth level</a:t>
+            </a:r>
+            <a:endParaRPr lang="en-US"/>
+          </a:p>
+        </p:txBody>
+      </p:sp>
+      <p:sp>
+        <p:nvSpPr>
+          <p:cNvPr id="6" name="Footer Placeholder 5"/>
+          <p:cNvSpPr>
+            <a:spLocks noGrp="1"/>
+          </p:cNvSpPr>
+          <p:nvPr>
+            <p:ph type="ftr" sz="quarter" idx="4"/>
+          </p:nvPr>
+        </p:nvSpPr>
+        <p:spPr>
+          <a:xfrm>
+            <a:off x="0" y="8685213"/>
+            <a:ext cx="2971800" cy="457200"/>
+          </a:xfrm>
+          <a:prstGeom prst="rect">
+            <a:avLst/>
+          </a:prstGeom>
+        </p:spPr>
+        <p:txBody>
+          <a:bodyPr vert="horz" lIns="91440" tIns="45720" rIns="91440" bIns="45720" rtlCol="0" anchor="b"/>
+          <a:lstStyle>
+            <a:lvl1pPr algn="l">
+              <a:defRPr sz="1200"/>
+            </a:lvl1pPr>
+          </a:lstStyle>
+          <a:p>
+            <a:endParaRPr lang="en-US"/>
+          </a:p>
+        </p:txBody>
+      </p:sp>
+      <p:sp>
+        <p:nvSpPr>
+          <p:cNvPr id="7" name="Slide Number Placeholder 6"/>
+          <p:cNvSpPr>
+            <a:spLocks noGrp="1"/>
+          </p:cNvSpPr>
+          <p:nvPr>
+            <p:ph type="sldNum" sz="quarter" idx="5"/>
+          </p:nvPr>
+        </p:nvSpPr>
+        <p:spPr>
+          <a:xfrm>
+            <a:off x="3884613" y="8685213"/>
+            <a:ext cx="2971800" cy="457200"/>
+          </a:xfrm>
+          <a:prstGeom prst="rect">
+            <a:avLst/>
+          </a:prstGeom>
+        </p:spPr>
+        <p:txBody>
+          <a:bodyPr vert="horz" lIns="91440" tIns="45720" rIns="91440" bIns="45720" rtlCol="0" anchor="b"/>
+          <a:lstStyle>
+            <a:lvl1pPr algn="r">
+              <a:defRPr sz="1200"/>
+            </a:lvl1pPr>
+          </a:lstStyle>
+          <a:p>
+            <a:fld id="{BB5E49A5-4136-284D-997B-48E1D791AD67}" type="slidenum">
+              <a:rPr lang="en-US" smtClean="0"/>
+              <a:t>‹#›</a:t>
+            </a:fld>
+            <a:endParaRPr lang="en-US"/>
+          </a:p>
+        </p:txBody>
+      </p:sp>
     </p:spTree>
     <p:extLst>
       <p:ext uri="{BB962C8B-B14F-4D97-AF65-F5344CB8AC3E}">
-        <p14:creationId xmlns:p14="http://schemas.microsoft.com/office/powerpoint/2010/main" val="1029767411"/>
+        <p14:creationId xmlns:p14="http://schemas.microsoft.com/office/powerpoint/2010/main" val="2623252185"/>
       </p:ext>
     </p:extLst>
   </p:cSld>
   <p:clrMap bg1="lt1" tx1="dk1" bg2="lt2" tx2="dk2" accent1="accent1" accent2="accent2" accent3="accent3" accent4="accent4" accent5="accent5" accent6="accent6" hlink="hlink" folHlink="folHlink"/>
   <p:notesStyle>
-    <a:lvl1pPr marL="0" algn="l" defTabSz="914400" rtl="0" eaLnBrk="1" latinLnBrk="0" hangingPunct="1">
+    <a:lvl1pPr marL="0" algn="l" defTabSz="457200" rtl="0" eaLnBrk="1" latinLnBrk="0" hangingPunct="1">
       <a:defRPr sz="1200" kern="1200">
         <a:solidFill>
           <a:schemeClr val="tx1"/>
@@ -178,7 +384,7 @@
         <a:cs typeface="+mn-cs"/>
       </a:defRPr>
     </a:lvl1pPr>
-    <a:lvl2pPr marL="457200" algn="l" defTabSz="914400" rtl="0" eaLnBrk="1" latinLnBrk="0" hangingPunct="1">
+    <a:lvl2pPr marL="457200" algn="l" defTabSz="457200" rtl="0" eaLnBrk="1" latinLnBrk="0" hangingPunct="1">
       <a:defRPr sz="1200" kern="1200">
         <a:solidFill>
           <a:schemeClr val="tx1"/>
@@ -188,7 +394,7 @@
         <a:cs typeface="+mn-cs"/>
       </a:defRPr>
     </a:lvl2pPr>
-    <a:lvl3pPr marL="914400" algn="l" defTabSz="914400" rtl="0" eaLnBrk="1" latinLnBrk="0" hangingPunct="1">
+    <a:lvl3pPr marL="914400" algn="l" defTabSz="457200" rtl="0" eaLnBrk="1" latinLnBrk="0" hangingPunct="1">
       <a:defRPr sz="1200" kern="1200">
         <a:solidFill>
           <a:schemeClr val="tx1"/>
@@ -198,7 +404,7 @@
         <a:cs typeface="+mn-cs"/>
       </a:defRPr>
     </a:lvl3pPr>
-    <a:lvl4pPr marL="1371600" algn="l" defTabSz="914400" rtl="0" eaLnBrk="1" latinLnBrk="0" hangingPunct="1">
+    <a:lvl4pPr marL="1371600" algn="l" defTabSz="457200" rtl="0" eaLnBrk="1" latinLnBrk="0" hangingPunct="1">
       <a:defRPr sz="1200" kern="1200">
         <a:solidFill>
           <a:schemeClr val="tx1"/>
@@ -208,7 +414,7 @@
         <a:cs typeface="+mn-cs"/>
       </a:defRPr>
     </a:lvl4pPr>
-    <a:lvl5pPr marL="1828800" algn="l" defTabSz="914400" rtl="0" eaLnBrk="1" latinLnBrk="0" hangingPunct="1">
+    <a:lvl5pPr marL="1828800" algn="l" defTabSz="457200" rtl="0" eaLnBrk="1" latinLnBrk="0" hangingPunct="1">
       <a:defRPr sz="1200" kern="1200">
         <a:solidFill>
           <a:schemeClr val="tx1"/>
@@ -218,7 +424,7 @@
         <a:cs typeface="+mn-cs"/>
       </a:defRPr>
     </a:lvl5pPr>
-    <a:lvl6pPr marL="2286000" algn="l" defTabSz="914400" rtl="0" eaLnBrk="1" latinLnBrk="0" hangingPunct="1">
+    <a:lvl6pPr marL="2286000" algn="l" defTabSz="457200" rtl="0" eaLnBrk="1" latinLnBrk="0" hangingPunct="1">
       <a:defRPr sz="1200" kern="1200">
         <a:solidFill>
           <a:schemeClr val="tx1"/>
@@ -228,7 +434,7 @@
         <a:cs typeface="+mn-cs"/>
       </a:defRPr>
     </a:lvl6pPr>
-    <a:lvl7pPr marL="2743200" algn="l" defTabSz="914400" rtl="0" eaLnBrk="1" latinLnBrk="0" hangingPunct="1">
+    <a:lvl7pPr marL="2743200" algn="l" defTabSz="457200" rtl="0" eaLnBrk="1" latinLnBrk="0" hangingPunct="1">
       <a:defRPr sz="1200" kern="1200">
         <a:solidFill>
           <a:schemeClr val="tx1"/>
@@ -238,7 +444,7 @@
         <a:cs typeface="+mn-cs"/>
       </a:defRPr>
     </a:lvl7pPr>
-    <a:lvl8pPr marL="3200400" algn="l" defTabSz="914400" rtl="0" eaLnBrk="1" latinLnBrk="0" hangingPunct="1">
+    <a:lvl8pPr marL="3200400" algn="l" defTabSz="457200" rtl="0" eaLnBrk="1" latinLnBrk="0" hangingPunct="1">
       <a:defRPr sz="1200" kern="1200">
         <a:solidFill>
           <a:schemeClr val="tx1"/>
@@ -248,7 +454,7 @@
         <a:cs typeface="+mn-cs"/>
       </a:defRPr>
     </a:lvl8pPr>
-    <a:lvl9pPr marL="3657600" algn="l" defTabSz="914400" rtl="0" eaLnBrk="1" latinLnBrk="0" hangingPunct="1">
+    <a:lvl9pPr marL="3657600" algn="l" defTabSz="457200" rtl="0" eaLnBrk="1" latinLnBrk="0" hangingPunct="1">
       <a:defRPr sz="1200" kern="1200">
         <a:solidFill>
           <a:schemeClr val="tx1"/>
@@ -263,7 +469,7 @@
 </file>
 
 <file path=ppt/notesSlides/notesSlide1.xml><?xml version="1.0" encoding="utf-8"?>
-<p:notes xmlns:a="http://schemas.openxmlformats.org/drawingml/2006/main" xmlns:r="http://schemas.openxmlformats.org/officeDocument/2006/relationships" xmlns:p="http://schemas.openxmlformats.org/presentationml/2006/main">
+<p:notes xmlns:a="http://schemas.openxmlformats.org/drawingml/2006/main" xmlns:p="http://schemas.openxmlformats.org/presentationml/2006/main" xmlns:r="http://schemas.openxmlformats.org/officeDocument/2006/relationships">
   <p:cSld>
     <p:spTree>
       <p:nvGrpSpPr>
@@ -283,7 +489,7 @@
         <p:nvSpPr>
           <p:cNvPr id="2" name="Slide Image Placeholder 1"/>
           <p:cNvSpPr>
-            <a:spLocks noGrp="1" noRot="1" noChangeAspect="1"/>
+            <a:spLocks noGrp="1"/>
           </p:cNvSpPr>
           <p:nvPr>
             <p:ph type="sldImg" idx="2"/>
@@ -298,7 +504,7 @@
             <a:spLocks noGrp="1"/>
           </p:cNvSpPr>
           <p:nvPr>
-            <p:ph type="body" sz="quarter" idx="3"/>
+            <p:ph type="body" idx="3" sz="quarter"/>
           </p:nvPr>
         </p:nvSpPr>
         <p:spPr/>
@@ -310,17 +516,13 @@
               <a:t>[0:00 - 0:20] Pitch Hook &amp; Executive Framing:</a:t>
             </a:r>
           </a:p>
-          <a:p>
-            <a:endParaRPr/>
-          </a:p>
+          <a:p/>
           <a:p>
             <a:r>
               <a:t>Good morning, Judges. Imagine a monsoon flood in rural Bihar. A primary clinic is swamped with 500 fever patients, and their shelves run completely dry of Paracetamol and IV fluids. Children are turned away in critical condition. Yet just 18 kilometers down the highway, another health centre has 3,500 surplus packs sitting idle in a locked cabinet.</a:t>
             </a:r>
           </a:p>
-          <a:p>
-            <a:endParaRPr/>
-          </a:p>
+          <a:p/>
           <a:p>
             <a:r>
               <a:t>This is not a manufacturing shortage—it is an intelligence and logistics failure. Today, we present SwasthyaGrid AI: Predict. Warn. Redistribute. Respond.</a:t>
@@ -335,7 +537,7 @@
             <a:spLocks noGrp="1"/>
           </p:cNvSpPr>
           <p:nvPr>
-            <p:ph type="sldNum" sz="quarter" idx="5"/>
+            <p:ph type="sldNum" idx="5" sz="quarter"/>
           </p:nvPr>
         </p:nvSpPr>
         <p:spPr/>
@@ -349,7 +551,7 @@
 </file>
 
 <file path=ppt/notesSlides/notesSlide10.xml><?xml version="1.0" encoding="utf-8"?>
-<p:notes xmlns:a="http://schemas.openxmlformats.org/drawingml/2006/main" xmlns:r="http://schemas.openxmlformats.org/officeDocument/2006/relationships" xmlns:p="http://schemas.openxmlformats.org/presentationml/2006/main">
+<p:notes xmlns:a="http://schemas.openxmlformats.org/drawingml/2006/main" xmlns:p="http://schemas.openxmlformats.org/presentationml/2006/main" xmlns:r="http://schemas.openxmlformats.org/officeDocument/2006/relationships">
   <p:cSld>
     <p:spTree>
       <p:nvGrpSpPr>
@@ -369,7 +571,7 @@
         <p:nvSpPr>
           <p:cNvPr id="2" name="Slide Image Placeholder 1"/>
           <p:cNvSpPr>
-            <a:spLocks noGrp="1" noRot="1" noChangeAspect="1"/>
+            <a:spLocks noGrp="1"/>
           </p:cNvSpPr>
           <p:nvPr>
             <p:ph type="sldImg" idx="2"/>
@@ -384,7 +586,7 @@
             <a:spLocks noGrp="1"/>
           </p:cNvSpPr>
           <p:nvPr>
-            <p:ph type="body" sz="quarter" idx="3"/>
+            <p:ph type="body" idx="3" sz="quarter"/>
           </p:nvPr>
         </p:nvSpPr>
         <p:spPr/>
@@ -396,9 +598,7 @@
               <a:t>[3:35 - 3:55] Business Impact &amp; ROI:</a:t>
             </a:r>
           </a:p>
-          <a:p>
-            <a:endParaRPr/>
-          </a:p>
+          <a:p/>
           <a:p>
             <a:r>
               <a:t>The quantitative results speak for themselves: an 89% reduction in critical stockout hours across our simulation grid, cutting response times from 4 to 6 working days down to under 2 hours. In 10,000 stress-test runs, our solver had a 0.00% donor deficit rate. That means no clinic is ever harmed to save another.</a:t>
@@ -413,7 +613,7 @@
             <a:spLocks noGrp="1"/>
           </p:cNvSpPr>
           <p:nvPr>
-            <p:ph type="sldNum" sz="quarter" idx="5"/>
+            <p:ph type="sldNum" idx="5" sz="quarter"/>
           </p:nvPr>
         </p:nvSpPr>
         <p:spPr/>
@@ -427,7 +627,7 @@
 </file>
 
 <file path=ppt/notesSlides/notesSlide11.xml><?xml version="1.0" encoding="utf-8"?>
-<p:notes xmlns:a="http://schemas.openxmlformats.org/drawingml/2006/main" xmlns:r="http://schemas.openxmlformats.org/officeDocument/2006/relationships" xmlns:p="http://schemas.openxmlformats.org/presentationml/2006/main">
+<p:notes xmlns:a="http://schemas.openxmlformats.org/drawingml/2006/main" xmlns:p="http://schemas.openxmlformats.org/presentationml/2006/main" xmlns:r="http://schemas.openxmlformats.org/officeDocument/2006/relationships">
   <p:cSld>
     <p:spTree>
       <p:nvGrpSpPr>
@@ -447,7 +647,7 @@
         <p:nvSpPr>
           <p:cNvPr id="2" name="Slide Image Placeholder 1"/>
           <p:cNvSpPr>
-            <a:spLocks noGrp="1" noRot="1" noChangeAspect="1"/>
+            <a:spLocks noGrp="1"/>
           </p:cNvSpPr>
           <p:nvPr>
             <p:ph type="sldImg" idx="2"/>
@@ -462,7 +662,7 @@
             <a:spLocks noGrp="1"/>
           </p:cNvSpPr>
           <p:nvPr>
-            <p:ph type="body" sz="quarter" idx="3"/>
+            <p:ph type="body" idx="3" sz="quarter"/>
           </p:nvPr>
         </p:nvSpPr>
         <p:spPr/>
@@ -474,17 +674,13 @@
               <a:t>[3:55 - 4:15] Roadmap &amp; Judge Defense:</a:t>
             </a:r>
           </a:p>
-          <a:p>
-            <a:endParaRPr/>
-          </a:p>
+          <a:p/>
           <a:p>
             <a:r>
               <a:t>Our roadmap is designed for national adoption. Phase 1 is fully functional today. In Phase 2, we integrate directly with the Ayushman Bharat Digital Mission and state e-Aushadhi portals, expanding to 1,000 clinics in flood-prone districts. In Phase 3, we scale to all 30,000 PHCs nationwide.</a:t>
             </a:r>
           </a:p>
-          <a:p>
-            <a:endParaRPr/>
-          </a:p>
+          <a:p/>
           <a:p>
             <a:r>
               <a:t>And for rural areas with spotty internet? Our offline ServiceWorker architecture caches dispensing records locally and synchronizes deltas automatically upon reconnection.</a:t>
@@ -499,7 +695,7 @@
             <a:spLocks noGrp="1"/>
           </p:cNvSpPr>
           <p:nvPr>
-            <p:ph type="sldNum" sz="quarter" idx="5"/>
+            <p:ph type="sldNum" idx="5" sz="quarter"/>
           </p:nvPr>
         </p:nvSpPr>
         <p:spPr/>
@@ -513,7 +709,7 @@
 </file>
 
 <file path=ppt/notesSlides/notesSlide12.xml><?xml version="1.0" encoding="utf-8"?>
-<p:notes xmlns:a="http://schemas.openxmlformats.org/drawingml/2006/main" xmlns:r="http://schemas.openxmlformats.org/officeDocument/2006/relationships" xmlns:p="http://schemas.openxmlformats.org/presentationml/2006/main">
+<p:notes xmlns:a="http://schemas.openxmlformats.org/drawingml/2006/main" xmlns:p="http://schemas.openxmlformats.org/presentationml/2006/main" xmlns:r="http://schemas.openxmlformats.org/officeDocument/2006/relationships">
   <p:cSld>
     <p:spTree>
       <p:nvGrpSpPr>
@@ -533,7 +729,7 @@
         <p:nvSpPr>
           <p:cNvPr id="2" name="Slide Image Placeholder 1"/>
           <p:cNvSpPr>
-            <a:spLocks noGrp="1" noRot="1" noChangeAspect="1"/>
+            <a:spLocks noGrp="1"/>
           </p:cNvSpPr>
           <p:nvPr>
             <p:ph type="sldImg" idx="2"/>
@@ -548,7 +744,7 @@
             <a:spLocks noGrp="1"/>
           </p:cNvSpPr>
           <p:nvPr>
-            <p:ph type="body" sz="quarter" idx="3"/>
+            <p:ph type="body" idx="3" sz="quarter"/>
           </p:nvPr>
         </p:nvSpPr>
         <p:spPr/>
@@ -560,17 +756,13 @@
               <a:t>[4:15 - 4:30] Memorable Close &amp; Transition to Q&amp;A:</a:t>
             </a:r>
           </a:p>
-          <a:p>
-            <a:endParaRPr/>
-          </a:p>
+          <a:p/>
           <a:p>
             <a:r>
               <a:t>To conclude: India does not lack essential medicines—it lacks the intelligence to move them in time. SwasthyaGrid AI transforms public health logistics from a reactive panic into an autonomous, predictive resilience grid. We are saving lives before shelves run empty.</a:t>
             </a:r>
           </a:p>
-          <a:p>
-            <a:endParaRPr/>
-          </a:p>
+          <a:p/>
           <a:p>
             <a:r>
               <a:t>Thank you, Judges. Our live code is on GitHub, and we welcome your questions!</a:t>
@@ -585,7 +777,7 @@
             <a:spLocks noGrp="1"/>
           </p:cNvSpPr>
           <p:nvPr>
-            <p:ph type="sldNum" sz="quarter" idx="5"/>
+            <p:ph type="sldNum" idx="5" sz="quarter"/>
           </p:nvPr>
         </p:nvSpPr>
         <p:spPr/>
@@ -599,7 +791,7 @@
 </file>
 
 <file path=ppt/notesSlides/notesSlide2.xml><?xml version="1.0" encoding="utf-8"?>
-<p:notes xmlns:a="http://schemas.openxmlformats.org/drawingml/2006/main" xmlns:r="http://schemas.openxmlformats.org/officeDocument/2006/relationships" xmlns:p="http://schemas.openxmlformats.org/presentationml/2006/main">
+<p:notes xmlns:a="http://schemas.openxmlformats.org/drawingml/2006/main" xmlns:p="http://schemas.openxmlformats.org/presentationml/2006/main" xmlns:r="http://schemas.openxmlformats.org/officeDocument/2006/relationships">
   <p:cSld>
     <p:spTree>
       <p:nvGrpSpPr>
@@ -619,7 +811,7 @@
         <p:nvSpPr>
           <p:cNvPr id="2" name="Slide Image Placeholder 1"/>
           <p:cNvSpPr>
-            <a:spLocks noGrp="1" noRot="1" noChangeAspect="1"/>
+            <a:spLocks noGrp="1"/>
           </p:cNvSpPr>
           <p:nvPr>
             <p:ph type="sldImg" idx="2"/>
@@ -634,7 +826,7 @@
             <a:spLocks noGrp="1"/>
           </p:cNvSpPr>
           <p:nvPr>
-            <p:ph type="body" sz="quarter" idx="3"/>
+            <p:ph type="body" idx="3" sz="quarter"/>
           </p:nvPr>
         </p:nvSpPr>
         <p:spPr/>
@@ -646,17 +838,13 @@
               <a:t>[0:20 - 0:45] Problem Validation &amp; Urgency:</a:t>
             </a:r>
           </a:p>
-          <a:p>
-            <a:endParaRPr/>
-          </a:p>
+          <a:p/>
           <a:p>
             <a:r>
               <a:t>Across India's 30,000 Primary Health Centres, seasonal shocks cause demand to surge by 300% to 500% virtually overnight. Because health telemetry is siloed in legacy spreadsheets, administrative rebalancing takes 5 to 7 days of bureaucratic red tape. By the time paperwork is stamped, patients have already suffered.</a:t>
             </a:r>
           </a:p>
-          <a:p>
-            <a:endParaRPr/>
-          </a:p>
+          <a:p/>
           <a:p>
             <a:r>
               <a:t>Right now, Clinic A has only 1.2 days of stock left, while Clinic B has 48 days of unutilized surplus. We built SwasthyaGrid to eliminate this exact gap.</a:t>
@@ -671,7 +859,7 @@
             <a:spLocks noGrp="1"/>
           </p:cNvSpPr>
           <p:nvPr>
-            <p:ph type="sldNum" sz="quarter" idx="5"/>
+            <p:ph type="sldNum" idx="5" sz="quarter"/>
           </p:nvPr>
         </p:nvSpPr>
         <p:spPr/>
@@ -685,7 +873,7 @@
 </file>
 
 <file path=ppt/notesSlides/notesSlide3.xml><?xml version="1.0" encoding="utf-8"?>
-<p:notes xmlns:a="http://schemas.openxmlformats.org/drawingml/2006/main" xmlns:r="http://schemas.openxmlformats.org/officeDocument/2006/relationships" xmlns:p="http://schemas.openxmlformats.org/presentationml/2006/main">
+<p:notes xmlns:a="http://schemas.openxmlformats.org/drawingml/2006/main" xmlns:p="http://schemas.openxmlformats.org/presentationml/2006/main" xmlns:r="http://schemas.openxmlformats.org/officeDocument/2006/relationships">
   <p:cSld>
     <p:spTree>
       <p:nvGrpSpPr>
@@ -705,7 +893,7 @@
         <p:nvSpPr>
           <p:cNvPr id="2" name="Slide Image Placeholder 1"/>
           <p:cNvSpPr>
-            <a:spLocks noGrp="1" noRot="1" noChangeAspect="1"/>
+            <a:spLocks noGrp="1"/>
           </p:cNvSpPr>
           <p:nvPr>
             <p:ph type="sldImg" idx="2"/>
@@ -720,7 +908,7 @@
             <a:spLocks noGrp="1"/>
           </p:cNvSpPr>
           <p:nvPr>
-            <p:ph type="body" sz="quarter" idx="3"/>
+            <p:ph type="body" idx="3" sz="quarter"/>
           </p:nvPr>
         </p:nvSpPr>
         <p:spPr/>
@@ -732,9 +920,7 @@
               <a:t>[0:45 - 1:10] Architectural Overview:</a:t>
             </a:r>
           </a:p>
-          <a:p>
-            <a:endParaRPr/>
-          </a:p>
+          <a:p/>
           <a:p>
             <a:r>
               <a:t>SwasthyaGrid connects these siloes into an autonomous resilience network through four deeply integrated pillars:</a:t>
@@ -769,7 +955,7 @@
             <a:spLocks noGrp="1"/>
           </p:cNvSpPr>
           <p:nvPr>
-            <p:ph type="sldNum" sz="quarter" idx="5"/>
+            <p:ph type="sldNum" idx="5" sz="quarter"/>
           </p:nvPr>
         </p:nvSpPr>
         <p:spPr/>
@@ -783,7 +969,7 @@
 </file>
 
 <file path=ppt/notesSlides/notesSlide4.xml><?xml version="1.0" encoding="utf-8"?>
-<p:notes xmlns:a="http://schemas.openxmlformats.org/drawingml/2006/main" xmlns:r="http://schemas.openxmlformats.org/officeDocument/2006/relationships" xmlns:p="http://schemas.openxmlformats.org/presentationml/2006/main">
+<p:notes xmlns:a="http://schemas.openxmlformats.org/drawingml/2006/main" xmlns:p="http://schemas.openxmlformats.org/presentationml/2006/main" xmlns:r="http://schemas.openxmlformats.org/officeDocument/2006/relationships">
   <p:cSld>
     <p:spTree>
       <p:nvGrpSpPr>
@@ -803,7 +989,7 @@
         <p:nvSpPr>
           <p:cNvPr id="2" name="Slide Image Placeholder 1"/>
           <p:cNvSpPr>
-            <a:spLocks noGrp="1" noRot="1" noChangeAspect="1"/>
+            <a:spLocks noGrp="1"/>
           </p:cNvSpPr>
           <p:nvPr>
             <p:ph type="sldImg" idx="2"/>
@@ -818,7 +1004,7 @@
             <a:spLocks noGrp="1"/>
           </p:cNvSpPr>
           <p:nvPr>
-            <p:ph type="body" sz="quarter" idx="3"/>
+            <p:ph type="body" idx="3" sz="quarter"/>
           </p:nvPr>
         </p:nvSpPr>
         <p:spPr/>
@@ -830,17 +1016,13 @@
               <a:t>[1:10 - 1:35] Technical ML Rigor:</a:t>
             </a:r>
           </a:p>
-          <a:p>
-            <a:endParaRPr/>
-          </a:p>
+          <a:p/>
           <a:p>
             <a:r>
               <a:t>Let's dive into the machine learning. We built a strict chronological feature pipeline that guarantees zero data leakage across dates. Our models incorporate multi-order consumption lags, day-of-week dynamics, and OPD footfall.</a:t>
             </a:r>
           </a:p>
-          <a:p>
-            <a:endParaRPr/>
-          </a:p>
+          <a:p/>
           <a:p>
             <a:r>
               <a:t>In our empirical evaluation against the government's standard 7-day moving average, our ML regressor achieved an astounding 51.7% reduction in Mean Absolute Error for medicine demand, and a 63.4% error reduction in patient footfall. We also output p10 to p90 quantile prediction intervals.</a:t>
@@ -855,7 +1037,7 @@
             <a:spLocks noGrp="1"/>
           </p:cNvSpPr>
           <p:nvPr>
-            <p:ph type="sldNum" sz="quarter" idx="5"/>
+            <p:ph type="sldNum" idx="5" sz="quarter"/>
           </p:nvPr>
         </p:nvSpPr>
         <p:spPr/>
@@ -869,7 +1051,7 @@
 </file>
 
 <file path=ppt/notesSlides/notesSlide5.xml><?xml version="1.0" encoding="utf-8"?>
-<p:notes xmlns:a="http://schemas.openxmlformats.org/drawingml/2006/main" xmlns:r="http://schemas.openxmlformats.org/officeDocument/2006/relationships" xmlns:p="http://schemas.openxmlformats.org/presentationml/2006/main">
+<p:notes xmlns:a="http://schemas.openxmlformats.org/drawingml/2006/main" xmlns:p="http://schemas.openxmlformats.org/presentationml/2006/main" xmlns:r="http://schemas.openxmlformats.org/officeDocument/2006/relationships">
   <p:cSld>
     <p:spTree>
       <p:nvGrpSpPr>
@@ -889,7 +1071,7 @@
         <p:nvSpPr>
           <p:cNvPr id="2" name="Slide Image Placeholder 1"/>
           <p:cNvSpPr>
-            <a:spLocks noGrp="1" noRot="1" noChangeAspect="1"/>
+            <a:spLocks noGrp="1"/>
           </p:cNvSpPr>
           <p:nvPr>
             <p:ph type="sldImg" idx="2"/>
@@ -904,7 +1086,7 @@
             <a:spLocks noGrp="1"/>
           </p:cNvSpPr>
           <p:nvPr>
-            <p:ph type="body" sz="quarter" idx="3"/>
+            <p:ph type="body" idx="3" sz="quarter"/>
           </p:nvPr>
         </p:nvSpPr>
         <p:spPr/>
@@ -916,17 +1098,13 @@
               <a:t>[1:35 - 1:55] Domain Health Metrics:</a:t>
             </a:r>
           </a:p>
-          <a:p>
-            <a:endParaRPr/>
-          </a:p>
+          <a:p/>
           <a:p>
             <a:r>
               <a:t>Predictions alone don't save lives—actionable triage does. Our Risk Engine continuously calculates Days of Stock Available: current inventory divided by predicted daily demand. When DOSA drops below 3.0 days, an automated early warning triggers 72 hours before stockout.</a:t>
             </a:r>
           </a:p>
-          <a:p>
-            <a:endParaRPr/>
-          </a:p>
+          <a:p/>
           <a:p>
             <a:r>
               <a:t>Clinics with high surplus above their 7-day safety reserve are automatically qualified as verified donor nodes, creating a self-healing health grid.</a:t>
@@ -941,7 +1119,7 @@
             <a:spLocks noGrp="1"/>
           </p:cNvSpPr>
           <p:nvPr>
-            <p:ph type="sldNum" sz="quarter" idx="5"/>
+            <p:ph type="sldNum" idx="5" sz="quarter"/>
           </p:nvPr>
         </p:nvSpPr>
         <p:spPr/>
@@ -955,7 +1133,7 @@
 </file>
 
 <file path=ppt/notesSlides/notesSlide6.xml><?xml version="1.0" encoding="utf-8"?>
-<p:notes xmlns:a="http://schemas.openxmlformats.org/drawingml/2006/main" xmlns:r="http://schemas.openxmlformats.org/officeDocument/2006/relationships" xmlns:p="http://schemas.openxmlformats.org/presentationml/2006/main">
+<p:notes xmlns:a="http://schemas.openxmlformats.org/drawingml/2006/main" xmlns:p="http://schemas.openxmlformats.org/presentationml/2006/main" xmlns:r="http://schemas.openxmlformats.org/officeDocument/2006/relationships">
   <p:cSld>
     <p:spTree>
       <p:nvGrpSpPr>
@@ -975,7 +1153,7 @@
         <p:nvSpPr>
           <p:cNvPr id="2" name="Slide Image Placeholder 1"/>
           <p:cNvSpPr>
-            <a:spLocks noGrp="1" noRot="1" noChangeAspect="1"/>
+            <a:spLocks noGrp="1"/>
           </p:cNvSpPr>
           <p:nvPr>
             <p:ph type="sldImg" idx="2"/>
@@ -990,7 +1168,7 @@
             <a:spLocks noGrp="1"/>
           </p:cNvSpPr>
           <p:nvPr>
-            <p:ph type="body" sz="quarter" idx="3"/>
+            <p:ph type="body" idx="3" sz="quarter"/>
           </p:nvPr>
         </p:nvSpPr>
         <p:spPr/>
@@ -1002,17 +1180,13 @@
               <a:t>[1:55 - 2:20] OR-Tools Solver Excellence:</a:t>
             </a:r>
           </a:p>
-          <a:p>
-            <a:endParaRPr/>
-          </a:p>
+          <a:p/>
           <a:p>
             <a:r>
               <a:t>When a shortage is flagged, how do we solve it? We formulate a Mixed-Integer Linear Programming problem and solve it using Google OR-Tools in under 45 milliseconds.</a:t>
             </a:r>
           </a:p>
-          <a:p>
-            <a:endParaRPr/>
-          </a:p>
+          <a:p/>
           <a:p>
             <a:r>
               <a:t>Crucially, our solver enforces an inviolable safety constraint: no donor facility can ever be transferred below its own 7-day safety reserve. We also enforce a 50 km road transit radius to guarantee same-day delivery and cold-chain validity. Zero donor deficit is mathematically guaranteed.</a:t>
@@ -1027,7 +1201,7 @@
             <a:spLocks noGrp="1"/>
           </p:cNvSpPr>
           <p:nvPr>
-            <p:ph type="sldNum" sz="quarter" idx="5"/>
+            <p:ph type="sldNum" idx="5" sz="quarter"/>
           </p:nvPr>
         </p:nvSpPr>
         <p:spPr/>
@@ -1041,7 +1215,7 @@
 </file>
 
 <file path=ppt/notesSlides/notesSlide7.xml><?xml version="1.0" encoding="utf-8"?>
-<p:notes xmlns:a="http://schemas.openxmlformats.org/drawingml/2006/main" xmlns:r="http://schemas.openxmlformats.org/officeDocument/2006/relationships" xmlns:p="http://schemas.openxmlformats.org/presentationml/2006/main">
+<p:notes xmlns:a="http://schemas.openxmlformats.org/drawingml/2006/main" xmlns:p="http://schemas.openxmlformats.org/presentationml/2006/main" xmlns:r="http://schemas.openxmlformats.org/officeDocument/2006/relationships">
   <p:cSld>
     <p:spTree>
       <p:nvGrpSpPr>
@@ -1061,7 +1235,7 @@
         <p:nvSpPr>
           <p:cNvPr id="2" name="Slide Image Placeholder 1"/>
           <p:cNvSpPr>
-            <a:spLocks noGrp="1" noRot="1" noChangeAspect="1"/>
+            <a:spLocks noGrp="1"/>
           </p:cNvSpPr>
           <p:nvPr>
             <p:ph type="sldImg" idx="2"/>
@@ -1076,7 +1250,7 @@
             <a:spLocks noGrp="1"/>
           </p:cNvSpPr>
           <p:nvPr>
-            <p:ph type="body" sz="quarter" idx="3"/>
+            <p:ph type="body" idx="3" sz="quarter"/>
           </p:nvPr>
         </p:nvSpPr>
         <p:spPr/>
@@ -1088,17 +1262,13 @@
               <a:t>[2:20 - 2:40] Grounded GenAI Innovation:</a:t>
             </a:r>
           </a:p>
-          <a:p>
-            <a:endParaRPr/>
-          </a:p>
+          <a:p/>
           <a:p>
             <a:r>
               <a:t>For health directors and rural nodal officers, Gemini 2.5 Flash acts as an explainable operations copilot. Gemini never hallucinates inventory numbers because every single response is strictly grounded in 10+ deterministic Python tool bindings.</a:t>
             </a:r>
           </a:p>
-          <a:p>
-            <a:endParaRPr/>
-          </a:p>
+          <a:p/>
           <a:p>
             <a:r>
               <a:t>Officers can inspect our 1-click Evidence Drawer to see exact telemetry timestamps, speak questions via voice in Hindi, or run What-If sandboxes to simulate what happens if a flood strikes tomorrow.</a:t>
@@ -1113,7 +1283,7 @@
             <a:spLocks noGrp="1"/>
           </p:cNvSpPr>
           <p:nvPr>
-            <p:ph type="sldNum" sz="quarter" idx="5"/>
+            <p:ph type="sldNum" idx="5" sz="quarter"/>
           </p:nvPr>
         </p:nvSpPr>
         <p:spPr/>
@@ -1127,7 +1297,7 @@
 </file>
 
 <file path=ppt/notesSlides/notesSlide8.xml><?xml version="1.0" encoding="utf-8"?>
-<p:notes xmlns:a="http://schemas.openxmlformats.org/drawingml/2006/main" xmlns:r="http://schemas.openxmlformats.org/officeDocument/2006/relationships" xmlns:p="http://schemas.openxmlformats.org/presentationml/2006/main">
+<p:notes xmlns:a="http://schemas.openxmlformats.org/drawingml/2006/main" xmlns:p="http://schemas.openxmlformats.org/presentationml/2006/main" xmlns:r="http://schemas.openxmlformats.org/officeDocument/2006/relationships">
   <p:cSld>
     <p:spTree>
       <p:nvGrpSpPr>
@@ -1147,7 +1317,7 @@
         <p:nvSpPr>
           <p:cNvPr id="2" name="Slide Image Placeholder 1"/>
           <p:cNvSpPr>
-            <a:spLocks noGrp="1" noRot="1" noChangeAspect="1"/>
+            <a:spLocks noGrp="1"/>
           </p:cNvSpPr>
           <p:nvPr>
             <p:ph type="sldImg" idx="2"/>
@@ -1162,7 +1332,7 @@
             <a:spLocks noGrp="1"/>
           </p:cNvSpPr>
           <p:nvPr>
-            <p:ph type="body" sz="quarter" idx="3"/>
+            <p:ph type="body" idx="3" sz="quarter"/>
           </p:nvPr>
         </p:nvSpPr>
         <p:spPr/>
@@ -1174,25 +1344,19 @@
               <a:t>[2:40 - 3:15] The Live Demo Punchline:</a:t>
             </a:r>
           </a:p>
-          <a:p>
-            <a:endParaRPr/>
-          </a:p>
+          <a:p/>
           <a:p>
             <a:r>
               <a:t>Judges, let's see it live right on this screen. Under normal conditions, PHC Bakhtiyarpur has 7.6 days of stock.</a:t>
             </a:r>
           </a:p>
-          <a:p>
-            <a:endParaRPr/>
-          </a:p>
+          <a:p/>
           <a:p>
             <a:r>
               <a:t>Now, let's inject a monsoon flood surge. Instantly, daily demand quadruples to 710 packs/day. DOSA plunges into the critical red zone at 1.8 days. Stockout in 45 hours!</a:t>
             </a:r>
           </a:p>
-          <a:p>
-            <a:endParaRPr/>
-          </a:p>
+          <a:p/>
           <a:p>
             <a:r>
               <a:t>Instead of panic, we run the Google OR-Tools Solver. In 38 milliseconds, the solver computes an optimal 600-pack transfer from PHC Danapur 18 km away. The truck is dispatched, and Bakhtiyarpur's stock is restored to a safe 8.2 days with zero deficit to the donor!</a:t>
@@ -1207,7 +1371,7 @@
             <a:spLocks noGrp="1"/>
           </p:cNvSpPr>
           <p:nvPr>
-            <p:ph type="sldNum" sz="quarter" idx="5"/>
+            <p:ph type="sldNum" idx="5" sz="quarter"/>
           </p:nvPr>
         </p:nvSpPr>
         <p:spPr/>
@@ -1221,7 +1385,7 @@
 </file>
 
 <file path=ppt/notesSlides/notesSlide9.xml><?xml version="1.0" encoding="utf-8"?>
-<p:notes xmlns:a="http://schemas.openxmlformats.org/drawingml/2006/main" xmlns:r="http://schemas.openxmlformats.org/officeDocument/2006/relationships" xmlns:p="http://schemas.openxmlformats.org/presentationml/2006/main">
+<p:notes xmlns:a="http://schemas.openxmlformats.org/drawingml/2006/main" xmlns:p="http://schemas.openxmlformats.org/presentationml/2006/main" xmlns:r="http://schemas.openxmlformats.org/officeDocument/2006/relationships">
   <p:cSld>
     <p:spTree>
       <p:nvGrpSpPr>
@@ -1241,7 +1405,7 @@
         <p:nvSpPr>
           <p:cNvPr id="2" name="Slide Image Placeholder 1"/>
           <p:cNvSpPr>
-            <a:spLocks noGrp="1" noRot="1" noChangeAspect="1"/>
+            <a:spLocks noGrp="1"/>
           </p:cNvSpPr>
           <p:nvPr>
             <p:ph type="sldImg" idx="2"/>
@@ -1256,7 +1420,7 @@
             <a:spLocks noGrp="1"/>
           </p:cNvSpPr>
           <p:nvPr>
-            <p:ph type="body" sz="quarter" idx="3"/>
+            <p:ph type="body" idx="3" sz="quarter"/>
           </p:nvPr>
         </p:nvSpPr>
         <p:spPr/>
@@ -1268,17 +1432,13 @@
               <a:t>[3:15 - 3:35] Scalability &amp; Architecture:</a:t>
             </a:r>
           </a:p>
-          <a:p>
-            <a:endParaRPr/>
-          </a:p>
+          <a:p/>
           <a:p>
             <a:r>
               <a:t>Our backend runs on Google Cloud Run in the asia-south1 Mumbai region with serverless auto-scaling. Telemetry and forecasts stream into Google BigQuery for longitudinal epidemiological analytics.</a:t>
             </a:r>
           </a:p>
-          <a:p>
-            <a:endParaRPr/>
-          </a:p>
+          <a:p/>
           <a:p>
             <a:r>
               <a:t>Most importantly: all facility master records and therapeutic medicine packages are grounded in official public government data: MoHFW Rural Health Statistics 2022, HMIS, and the National List of Essential Medicines.</a:t>
@@ -1293,7 +1453,7 @@
             <a:spLocks noGrp="1"/>
           </p:cNvSpPr>
           <p:nvPr>
-            <p:ph type="sldNum" sz="quarter" idx="5"/>
+            <p:ph type="sldNum" idx="5" sz="quarter"/>
           </p:nvPr>
         </p:nvSpPr>
         <p:spPr/>
@@ -1344,9 +1504,10 @@
           <a:lstStyle/>
           <a:p>
             <a:r>
-              <a:rPr lang="en-US"/>
+              <a:rPr lang="en-US" smtClean="0"/>
               <a:t>Click to edit Master title style</a:t>
             </a:r>
+            <a:endParaRPr lang="en-US"/>
           </a:p>
         </p:txBody>
       </p:sp>
@@ -1462,9 +1623,10 @@
           </a:lstStyle>
           <a:p>
             <a:r>
-              <a:rPr lang="en-US"/>
+              <a:rPr lang="en-US" smtClean="0"/>
               <a:t>Click to edit Master subtitle style</a:t>
             </a:r>
+            <a:endParaRPr lang="en-US"/>
           </a:p>
         </p:txBody>
       </p:sp>
@@ -1485,7 +1647,7 @@
           <a:p>
             <a:fld id="{5BCAD085-E8A6-8845-BD4E-CB4CCA059FC4}" type="datetimeFigureOut">
               <a:rPr lang="en-US" smtClean="0"/>
-              <a:t>9/30/2026</a:t>
+              <a:t>1/27/13</a:t>
             </a:fld>
             <a:endParaRPr lang="en-US"/>
           </a:p>
@@ -1579,9 +1741,10 @@
           <a:lstStyle/>
           <a:p>
             <a:r>
-              <a:rPr lang="en-US"/>
+              <a:rPr lang="en-US" smtClean="0"/>
               <a:t>Click to edit Master title style</a:t>
             </a:r>
+            <a:endParaRPr lang="en-US"/>
           </a:p>
         </p:txBody>
       </p:sp>
@@ -1602,37 +1765,38 @@
           <a:p>
             <a:pPr lvl="0"/>
             <a:r>
-              <a:rPr lang="en-US"/>
+              <a:rPr lang="en-US" smtClean="0"/>
               <a:t>Click to edit Master text styles</a:t>
             </a:r>
           </a:p>
           <a:p>
             <a:pPr lvl="1"/>
             <a:r>
-              <a:rPr lang="en-US"/>
+              <a:rPr lang="en-US" smtClean="0"/>
               <a:t>Second level</a:t>
             </a:r>
           </a:p>
           <a:p>
             <a:pPr lvl="2"/>
             <a:r>
-              <a:rPr lang="en-US"/>
+              <a:rPr lang="en-US" smtClean="0"/>
               <a:t>Third level</a:t>
             </a:r>
           </a:p>
           <a:p>
             <a:pPr lvl="3"/>
             <a:r>
-              <a:rPr lang="en-US"/>
+              <a:rPr lang="en-US" smtClean="0"/>
               <a:t>Fourth level</a:t>
             </a:r>
           </a:p>
           <a:p>
             <a:pPr lvl="4"/>
             <a:r>
-              <a:rPr lang="en-US"/>
+              <a:rPr lang="en-US" smtClean="0"/>
               <a:t>Fifth level</a:t>
             </a:r>
+            <a:endParaRPr lang="en-US"/>
           </a:p>
         </p:txBody>
       </p:sp>
@@ -1653,7 +1817,7 @@
           <a:p>
             <a:fld id="{5BCAD085-E8A6-8845-BD4E-CB4CCA059FC4}" type="datetimeFigureOut">
               <a:rPr lang="en-US" smtClean="0"/>
-              <a:t>9/30/2026</a:t>
+              <a:t>1/27/13</a:t>
             </a:fld>
             <a:endParaRPr lang="en-US"/>
           </a:p>
@@ -1752,9 +1916,10 @@
           <a:lstStyle/>
           <a:p>
             <a:r>
-              <a:rPr lang="en-US"/>
+              <a:rPr lang="en-US" smtClean="0"/>
               <a:t>Click to edit Master title style</a:t>
             </a:r>
+            <a:endParaRPr lang="en-US"/>
           </a:p>
         </p:txBody>
       </p:sp>
@@ -1780,37 +1945,38 @@
           <a:p>
             <a:pPr lvl="0"/>
             <a:r>
-              <a:rPr lang="en-US"/>
+              <a:rPr lang="en-US" smtClean="0"/>
               <a:t>Click to edit Master text styles</a:t>
             </a:r>
           </a:p>
           <a:p>
             <a:pPr lvl="1"/>
             <a:r>
-              <a:rPr lang="en-US"/>
+              <a:rPr lang="en-US" smtClean="0"/>
               <a:t>Second level</a:t>
             </a:r>
           </a:p>
           <a:p>
             <a:pPr lvl="2"/>
             <a:r>
-              <a:rPr lang="en-US"/>
+              <a:rPr lang="en-US" smtClean="0"/>
               <a:t>Third level</a:t>
             </a:r>
           </a:p>
           <a:p>
             <a:pPr lvl="3"/>
             <a:r>
-              <a:rPr lang="en-US"/>
+              <a:rPr lang="en-US" smtClean="0"/>
               <a:t>Fourth level</a:t>
             </a:r>
           </a:p>
           <a:p>
             <a:pPr lvl="4"/>
             <a:r>
-              <a:rPr lang="en-US"/>
+              <a:rPr lang="en-US" smtClean="0"/>
               <a:t>Fifth level</a:t>
             </a:r>
+            <a:endParaRPr lang="en-US"/>
           </a:p>
         </p:txBody>
       </p:sp>
@@ -1831,7 +1997,7 @@
           <a:p>
             <a:fld id="{5BCAD085-E8A6-8845-BD4E-CB4CCA059FC4}" type="datetimeFigureOut">
               <a:rPr lang="en-US" smtClean="0"/>
-              <a:t>9/30/2026</a:t>
+              <a:t>1/27/13</a:t>
             </a:fld>
             <a:endParaRPr lang="en-US"/>
           </a:p>
@@ -1925,9 +2091,10 @@
           <a:lstStyle/>
           <a:p>
             <a:r>
-              <a:rPr lang="en-US"/>
+              <a:rPr lang="en-US" smtClean="0"/>
               <a:t>Click to edit Master title style</a:t>
             </a:r>
+            <a:endParaRPr lang="en-US"/>
           </a:p>
         </p:txBody>
       </p:sp>
@@ -1948,37 +2115,38 @@
           <a:p>
             <a:pPr lvl="0"/>
             <a:r>
-              <a:rPr lang="en-US"/>
+              <a:rPr lang="en-US" smtClean="0"/>
               <a:t>Click to edit Master text styles</a:t>
             </a:r>
           </a:p>
           <a:p>
             <a:pPr lvl="1"/>
             <a:r>
-              <a:rPr lang="en-US"/>
+              <a:rPr lang="en-US" smtClean="0"/>
               <a:t>Second level</a:t>
             </a:r>
           </a:p>
           <a:p>
             <a:pPr lvl="2"/>
             <a:r>
-              <a:rPr lang="en-US"/>
+              <a:rPr lang="en-US" smtClean="0"/>
               <a:t>Third level</a:t>
             </a:r>
           </a:p>
           <a:p>
             <a:pPr lvl="3"/>
             <a:r>
-              <a:rPr lang="en-US"/>
+              <a:rPr lang="en-US" smtClean="0"/>
               <a:t>Fourth level</a:t>
             </a:r>
           </a:p>
           <a:p>
             <a:pPr lvl="4"/>
             <a:r>
-              <a:rPr lang="en-US"/>
+              <a:rPr lang="en-US" smtClean="0"/>
               <a:t>Fifth level</a:t>
             </a:r>
+            <a:endParaRPr lang="en-US"/>
           </a:p>
         </p:txBody>
       </p:sp>
@@ -1999,7 +2167,7 @@
           <a:p>
             <a:fld id="{5BCAD085-E8A6-8845-BD4E-CB4CCA059FC4}" type="datetimeFigureOut">
               <a:rPr lang="en-US" smtClean="0"/>
-              <a:t>9/30/2026</a:t>
+              <a:t>1/27/13</a:t>
             </a:fld>
             <a:endParaRPr lang="en-US"/>
           </a:p>
@@ -2102,9 +2270,10 @@
           </a:lstStyle>
           <a:p>
             <a:r>
-              <a:rPr lang="en-US"/>
+              <a:rPr lang="en-US" smtClean="0"/>
               <a:t>Click to edit Master title style</a:t>
             </a:r>
+            <a:endParaRPr lang="en-US"/>
           </a:p>
         </p:txBody>
       </p:sp>
@@ -2221,7 +2390,7 @@
           <a:p>
             <a:pPr lvl="0"/>
             <a:r>
-              <a:rPr lang="en-US"/>
+              <a:rPr lang="en-US" smtClean="0"/>
               <a:t>Click to edit Master text styles</a:t>
             </a:r>
           </a:p>
@@ -2244,7 +2413,7 @@
           <a:p>
             <a:fld id="{5BCAD085-E8A6-8845-BD4E-CB4CCA059FC4}" type="datetimeFigureOut">
               <a:rPr lang="en-US" smtClean="0"/>
-              <a:t>9/30/2026</a:t>
+              <a:t>1/27/13</a:t>
             </a:fld>
             <a:endParaRPr lang="en-US"/>
           </a:p>
@@ -2338,9 +2507,10 @@
           <a:lstStyle/>
           <a:p>
             <a:r>
-              <a:rPr lang="en-US"/>
+              <a:rPr lang="en-US" smtClean="0"/>
               <a:t>Click to edit Master title style</a:t>
             </a:r>
+            <a:endParaRPr lang="en-US"/>
           </a:p>
         </p:txBody>
       </p:sp>
@@ -2394,37 +2564,38 @@
           <a:p>
             <a:pPr lvl="0"/>
             <a:r>
-              <a:rPr lang="en-US"/>
+              <a:rPr lang="en-US" smtClean="0"/>
               <a:t>Click to edit Master text styles</a:t>
             </a:r>
           </a:p>
           <a:p>
             <a:pPr lvl="1"/>
             <a:r>
-              <a:rPr lang="en-US"/>
+              <a:rPr lang="en-US" smtClean="0"/>
               <a:t>Second level</a:t>
             </a:r>
           </a:p>
           <a:p>
             <a:pPr lvl="2"/>
             <a:r>
-              <a:rPr lang="en-US"/>
+              <a:rPr lang="en-US" smtClean="0"/>
               <a:t>Third level</a:t>
             </a:r>
           </a:p>
           <a:p>
             <a:pPr lvl="3"/>
             <a:r>
-              <a:rPr lang="en-US"/>
+              <a:rPr lang="en-US" smtClean="0"/>
               <a:t>Fourth level</a:t>
             </a:r>
           </a:p>
           <a:p>
             <a:pPr lvl="4"/>
             <a:r>
-              <a:rPr lang="en-US"/>
+              <a:rPr lang="en-US" smtClean="0"/>
               <a:t>Fifth level</a:t>
             </a:r>
+            <a:endParaRPr lang="en-US"/>
           </a:p>
         </p:txBody>
       </p:sp>
@@ -2478,37 +2649,38 @@
           <a:p>
             <a:pPr lvl="0"/>
             <a:r>
-              <a:rPr lang="en-US"/>
+              <a:rPr lang="en-US" smtClean="0"/>
               <a:t>Click to edit Master text styles</a:t>
             </a:r>
           </a:p>
           <a:p>
             <a:pPr lvl="1"/>
             <a:r>
-              <a:rPr lang="en-US"/>
+              <a:rPr lang="en-US" smtClean="0"/>
               <a:t>Second level</a:t>
             </a:r>
           </a:p>
           <a:p>
             <a:pPr lvl="2"/>
             <a:r>
-              <a:rPr lang="en-US"/>
+              <a:rPr lang="en-US" smtClean="0"/>
               <a:t>Third level</a:t>
             </a:r>
           </a:p>
           <a:p>
             <a:pPr lvl="3"/>
             <a:r>
-              <a:rPr lang="en-US"/>
+              <a:rPr lang="en-US" smtClean="0"/>
               <a:t>Fourth level</a:t>
             </a:r>
           </a:p>
           <a:p>
             <a:pPr lvl="4"/>
             <a:r>
-              <a:rPr lang="en-US"/>
+              <a:rPr lang="en-US" smtClean="0"/>
               <a:t>Fifth level</a:t>
             </a:r>
+            <a:endParaRPr lang="en-US"/>
           </a:p>
         </p:txBody>
       </p:sp>
@@ -2529,7 +2701,7 @@
           <a:p>
             <a:fld id="{5BCAD085-E8A6-8845-BD4E-CB4CCA059FC4}" type="datetimeFigureOut">
               <a:rPr lang="en-US" smtClean="0"/>
-              <a:t>9/30/2026</a:t>
+              <a:t>1/27/13</a:t>
             </a:fld>
             <a:endParaRPr lang="en-US"/>
           </a:p>
@@ -2627,9 +2799,10 @@
           </a:lstStyle>
           <a:p>
             <a:r>
-              <a:rPr lang="en-US"/>
+              <a:rPr lang="en-US" smtClean="0"/>
               <a:t>Click to edit Master title style</a:t>
             </a:r>
+            <a:endParaRPr lang="en-US"/>
           </a:p>
         </p:txBody>
       </p:sp>
@@ -2692,7 +2865,7 @@
           <a:p>
             <a:pPr lvl="0"/>
             <a:r>
-              <a:rPr lang="en-US"/>
+              <a:rPr lang="en-US" smtClean="0"/>
               <a:t>Click to edit Master text styles</a:t>
             </a:r>
           </a:p>
@@ -2748,37 +2921,38 @@
           <a:p>
             <a:pPr lvl="0"/>
             <a:r>
-              <a:rPr lang="en-US"/>
+              <a:rPr lang="en-US" smtClean="0"/>
               <a:t>Click to edit Master text styles</a:t>
             </a:r>
           </a:p>
           <a:p>
             <a:pPr lvl="1"/>
             <a:r>
-              <a:rPr lang="en-US"/>
+              <a:rPr lang="en-US" smtClean="0"/>
               <a:t>Second level</a:t>
             </a:r>
           </a:p>
           <a:p>
             <a:pPr lvl="2"/>
             <a:r>
-              <a:rPr lang="en-US"/>
+              <a:rPr lang="en-US" smtClean="0"/>
               <a:t>Third level</a:t>
             </a:r>
           </a:p>
           <a:p>
             <a:pPr lvl="3"/>
             <a:r>
-              <a:rPr lang="en-US"/>
+              <a:rPr lang="en-US" smtClean="0"/>
               <a:t>Fourth level</a:t>
             </a:r>
           </a:p>
           <a:p>
             <a:pPr lvl="4"/>
             <a:r>
-              <a:rPr lang="en-US"/>
+              <a:rPr lang="en-US" smtClean="0"/>
               <a:t>Fifth level</a:t>
             </a:r>
+            <a:endParaRPr lang="en-US"/>
           </a:p>
         </p:txBody>
       </p:sp>
@@ -2841,7 +3015,7 @@
           <a:p>
             <a:pPr lvl="0"/>
             <a:r>
-              <a:rPr lang="en-US"/>
+              <a:rPr lang="en-US" smtClean="0"/>
               <a:t>Click to edit Master text styles</a:t>
             </a:r>
           </a:p>
@@ -2897,37 +3071,38 @@
           <a:p>
             <a:pPr lvl="0"/>
             <a:r>
-              <a:rPr lang="en-US"/>
+              <a:rPr lang="en-US" smtClean="0"/>
               <a:t>Click to edit Master text styles</a:t>
             </a:r>
           </a:p>
           <a:p>
             <a:pPr lvl="1"/>
             <a:r>
-              <a:rPr lang="en-US"/>
+              <a:rPr lang="en-US" smtClean="0"/>
               <a:t>Second level</a:t>
             </a:r>
           </a:p>
           <a:p>
             <a:pPr lvl="2"/>
             <a:r>
-              <a:rPr lang="en-US"/>
+              <a:rPr lang="en-US" smtClean="0"/>
               <a:t>Third level</a:t>
             </a:r>
           </a:p>
           <a:p>
             <a:pPr lvl="3"/>
             <a:r>
-              <a:rPr lang="en-US"/>
+              <a:rPr lang="en-US" smtClean="0"/>
               <a:t>Fourth level</a:t>
             </a:r>
           </a:p>
           <a:p>
             <a:pPr lvl="4"/>
             <a:r>
-              <a:rPr lang="en-US"/>
+              <a:rPr lang="en-US" smtClean="0"/>
               <a:t>Fifth level</a:t>
             </a:r>
+            <a:endParaRPr lang="en-US"/>
           </a:p>
         </p:txBody>
       </p:sp>
@@ -2948,7 +3123,7 @@
           <a:p>
             <a:fld id="{5BCAD085-E8A6-8845-BD4E-CB4CCA059FC4}" type="datetimeFigureOut">
               <a:rPr lang="en-US" smtClean="0"/>
-              <a:t>9/30/2026</a:t>
+              <a:t>1/27/13</a:t>
             </a:fld>
             <a:endParaRPr lang="en-US"/>
           </a:p>
@@ -3042,9 +3217,10 @@
           <a:lstStyle/>
           <a:p>
             <a:r>
-              <a:rPr lang="en-US"/>
+              <a:rPr lang="en-US" smtClean="0"/>
               <a:t>Click to edit Master title style</a:t>
             </a:r>
+            <a:endParaRPr lang="en-US"/>
           </a:p>
         </p:txBody>
       </p:sp>
@@ -3065,7 +3241,7 @@
           <a:p>
             <a:fld id="{5BCAD085-E8A6-8845-BD4E-CB4CCA059FC4}" type="datetimeFigureOut">
               <a:rPr lang="en-US" smtClean="0"/>
-              <a:t>9/30/2026</a:t>
+              <a:t>1/27/13</a:t>
             </a:fld>
             <a:endParaRPr lang="en-US"/>
           </a:p>
@@ -3160,7 +3336,7 @@
           <a:p>
             <a:fld id="{5BCAD085-E8A6-8845-BD4E-CB4CCA059FC4}" type="datetimeFigureOut">
               <a:rPr lang="en-US" smtClean="0"/>
-              <a:t>9/30/2026</a:t>
+              <a:t>1/27/13</a:t>
             </a:fld>
             <a:endParaRPr lang="en-US"/>
           </a:p>
@@ -3263,9 +3439,10 @@
           </a:lstStyle>
           <a:p>
             <a:r>
-              <a:rPr lang="en-US"/>
+              <a:rPr lang="en-US" smtClean="0"/>
               <a:t>Click to edit Master title style</a:t>
             </a:r>
+            <a:endParaRPr lang="en-US"/>
           </a:p>
         </p:txBody>
       </p:sp>
@@ -3319,37 +3496,38 @@
           <a:p>
             <a:pPr lvl="0"/>
             <a:r>
-              <a:rPr lang="en-US"/>
+              <a:rPr lang="en-US" smtClean="0"/>
               <a:t>Click to edit Master text styles</a:t>
             </a:r>
           </a:p>
           <a:p>
             <a:pPr lvl="1"/>
             <a:r>
-              <a:rPr lang="en-US"/>
+              <a:rPr lang="en-US" smtClean="0"/>
               <a:t>Second level</a:t>
             </a:r>
           </a:p>
           <a:p>
             <a:pPr lvl="2"/>
             <a:r>
-              <a:rPr lang="en-US"/>
+              <a:rPr lang="en-US" smtClean="0"/>
               <a:t>Third level</a:t>
             </a:r>
           </a:p>
           <a:p>
             <a:pPr lvl="3"/>
             <a:r>
-              <a:rPr lang="en-US"/>
+              <a:rPr lang="en-US" smtClean="0"/>
               <a:t>Fourth level</a:t>
             </a:r>
           </a:p>
           <a:p>
             <a:pPr lvl="4"/>
             <a:r>
-              <a:rPr lang="en-US"/>
+              <a:rPr lang="en-US" smtClean="0"/>
               <a:t>Fifth level</a:t>
             </a:r>
+            <a:endParaRPr lang="en-US"/>
           </a:p>
         </p:txBody>
       </p:sp>
@@ -3412,7 +3590,7 @@
           <a:p>
             <a:pPr lvl="0"/>
             <a:r>
-              <a:rPr lang="en-US"/>
+              <a:rPr lang="en-US" smtClean="0"/>
               <a:t>Click to edit Master text styles</a:t>
             </a:r>
           </a:p>
@@ -3435,7 +3613,7 @@
           <a:p>
             <a:fld id="{5BCAD085-E8A6-8845-BD4E-CB4CCA059FC4}" type="datetimeFigureOut">
               <a:rPr lang="en-US" smtClean="0"/>
-              <a:t>9/30/2026</a:t>
+              <a:t>1/27/13</a:t>
             </a:fld>
             <a:endParaRPr lang="en-US"/>
           </a:p>
@@ -3538,9 +3716,10 @@
           </a:lstStyle>
           <a:p>
             <a:r>
-              <a:rPr lang="en-US"/>
+              <a:rPr lang="en-US" smtClean="0"/>
               <a:t>Click to edit Master title style</a:t>
             </a:r>
+            <a:endParaRPr lang="en-US"/>
           </a:p>
         </p:txBody>
       </p:sp>
@@ -3664,7 +3843,7 @@
           <a:p>
             <a:pPr lvl="0"/>
             <a:r>
-              <a:rPr lang="en-US"/>
+              <a:rPr lang="en-US" smtClean="0"/>
               <a:t>Click to edit Master text styles</a:t>
             </a:r>
           </a:p>
@@ -3687,7 +3866,7 @@
           <a:p>
             <a:fld id="{5BCAD085-E8A6-8845-BD4E-CB4CCA059FC4}" type="datetimeFigureOut">
               <a:rPr lang="en-US" smtClean="0"/>
-              <a:t>9/30/2026</a:t>
+              <a:t>1/27/13</a:t>
             </a:fld>
             <a:endParaRPr lang="en-US"/>
           </a:p>
@@ -3796,9 +3975,10 @@
           <a:lstStyle/>
           <a:p>
             <a:r>
-              <a:rPr lang="en-US"/>
+              <a:rPr lang="en-US" smtClean="0"/>
               <a:t>Click to edit Master title style</a:t>
             </a:r>
+            <a:endParaRPr lang="en-US"/>
           </a:p>
         </p:txBody>
       </p:sp>
@@ -3829,37 +4009,38 @@
           <a:p>
             <a:pPr lvl="0"/>
             <a:r>
-              <a:rPr lang="en-US"/>
+              <a:rPr lang="en-US" smtClean="0"/>
               <a:t>Click to edit Master text styles</a:t>
             </a:r>
           </a:p>
           <a:p>
             <a:pPr lvl="1"/>
             <a:r>
-              <a:rPr lang="en-US"/>
+              <a:rPr lang="en-US" smtClean="0"/>
               <a:t>Second level</a:t>
             </a:r>
           </a:p>
           <a:p>
             <a:pPr lvl="2"/>
             <a:r>
-              <a:rPr lang="en-US"/>
+              <a:rPr lang="en-US" smtClean="0"/>
               <a:t>Third level</a:t>
             </a:r>
           </a:p>
           <a:p>
             <a:pPr lvl="3"/>
             <a:r>
-              <a:rPr lang="en-US"/>
+              <a:rPr lang="en-US" smtClean="0"/>
               <a:t>Fourth level</a:t>
             </a:r>
           </a:p>
           <a:p>
             <a:pPr lvl="4"/>
             <a:r>
-              <a:rPr lang="en-US"/>
+              <a:rPr lang="en-US" smtClean="0"/>
               <a:t>Fifth level</a:t>
             </a:r>
+            <a:endParaRPr lang="en-US"/>
           </a:p>
         </p:txBody>
       </p:sp>
@@ -3898,7 +4079,7 @@
           <a:p>
             <a:fld id="{5BCAD085-E8A6-8845-BD4E-CB4CCA059FC4}" type="datetimeFigureOut">
               <a:rPr lang="en-US" smtClean="0"/>
-              <a:t>9/30/2026</a:t>
+              <a:t>1/27/13</a:t>
             </a:fld>
             <a:endParaRPr lang="en-US"/>
           </a:p>
@@ -4257,7 +4438,7 @@
 </file>
 
 <file path=ppt/slides/slide1.xml><?xml version="1.0" encoding="utf-8"?>
-<p:sld xmlns:a="http://schemas.openxmlformats.org/drawingml/2006/main" xmlns:r="http://schemas.openxmlformats.org/officeDocument/2006/relationships" xmlns:p="http://schemas.openxmlformats.org/presentationml/2006/main">
+<p:sld xmlns:a="http://schemas.openxmlformats.org/drawingml/2006/main" xmlns:p="http://schemas.openxmlformats.org/presentationml/2006/main" xmlns:r="http://schemas.openxmlformats.org/officeDocument/2006/relationships">
   <p:cSld>
     <p:spTree>
       <p:nvGrpSpPr>
@@ -4265,14 +4446,7 @@
         <p:cNvGrpSpPr/>
         <p:nvPr/>
       </p:nvGrpSpPr>
-      <p:grpSpPr>
-        <a:xfrm>
-          <a:off x="0" y="0"/>
-          <a:ext cx="0" cy="0"/>
-          <a:chOff x="0" y="0"/>
-          <a:chExt cx="0" cy="0"/>
-        </a:xfrm>
-      </p:grpSpPr>
+      <p:grpSpPr/>
       <p:sp>
         <p:nvSpPr>
           <p:cNvPr id="2" name="Rectangle 1"/>
@@ -4313,7 +4487,6 @@
           <a:lstStyle/>
           <a:p>
             <a:pPr algn="ctr"/>
-            <a:endParaRPr/>
           </a:p>
         </p:txBody>
       </p:sp>
@@ -4367,12 +4540,7 @@
               </a:defRPr>
             </a:pPr>
             <a:r>
-              <a:rPr lang="en-US" dirty="0"/>
-              <a:t>BUILD WITH AI </a:t>
-            </a:r>
-            <a:r>
-              <a:rPr dirty="0"/>
-              <a:t>HACKATHON 2026 • TRACK 3: SMART HEALTH</a:t>
+              <a:t>GOOGLE CLOUD GENAI HACKATHON 2026 • TRACK 3: SMART HEALTH</a:t>
             </a:r>
           </a:p>
         </p:txBody>
@@ -4437,8 +4605,8 @@
         </p:nvSpPr>
         <p:spPr>
           <a:xfrm>
-            <a:off x="1383944" y="2565009"/>
-            <a:ext cx="9448495" cy="553998"/>
+            <a:off x="1371600" y="2560320"/>
+            <a:ext cx="9448495" cy="822960"/>
           </a:xfrm>
           <a:prstGeom prst="rect">
             <a:avLst/>
@@ -4446,7 +4614,7 @@
           <a:noFill/>
         </p:spPr>
         <p:txBody>
-          <a:bodyPr wrap="square">
+          <a:bodyPr wrap="none">
             <a:spAutoFit/>
           </a:bodyPr>
           <a:lstStyle/>
@@ -4460,7 +4628,6 @@
               </a:defRPr>
             </a:pPr>
             <a:r>
-              <a:rPr dirty="0"/>
               <a:t>An India-scale AI platform forecasting healthcare resource demand surges, flagging stockouts 72 hours in advance, and computing optimal cross-district redistribution using Google OR-Tools and Gemini 2.5 Flash.</a:t>
             </a:r>
           </a:p>
@@ -4504,7 +4671,7 @@
           </a:fontRef>
         </p:style>
         <p:txBody>
-          <a:bodyPr wrap="square" rtlCol="0" anchor="ctr"/>
+          <a:bodyPr rtlCol="0" anchor="ctr" wrap="square"/>
           <a:lstStyle/>
           <a:p>
             <a:pPr algn="ctr">
@@ -4580,7 +4747,6 @@
           <a:lstStyle/>
           <a:p>
             <a:pPr algn="ctr"/>
-            <a:endParaRPr/>
           </a:p>
         </p:txBody>
       </p:sp>
@@ -4622,7 +4788,7 @@
           </a:fontRef>
         </p:style>
         <p:txBody>
-          <a:bodyPr wrap="square" rtlCol="0" anchor="ctr"/>
+          <a:bodyPr rtlCol="0" anchor="ctr" wrap="square"/>
           <a:lstStyle/>
           <a:p>
             <a:pPr algn="ctr">
@@ -4698,7 +4864,6 @@
           <a:lstStyle/>
           <a:p>
             <a:pPr algn="ctr"/>
-            <a:endParaRPr/>
           </a:p>
         </p:txBody>
       </p:sp>
@@ -4740,7 +4905,7 @@
           </a:fontRef>
         </p:style>
         <p:txBody>
-          <a:bodyPr wrap="square" rtlCol="0" anchor="ctr"/>
+          <a:bodyPr rtlCol="0" anchor="ctr" wrap="square"/>
           <a:lstStyle/>
           <a:p>
             <a:pPr algn="ctr">
@@ -4816,7 +4981,6 @@
           <a:lstStyle/>
           <a:p>
             <a:pPr algn="ctr"/>
-            <a:endParaRPr/>
           </a:p>
         </p:txBody>
       </p:sp>
@@ -4858,7 +5022,7 @@
           </a:fontRef>
         </p:style>
         <p:txBody>
-          <a:bodyPr wrap="square" rtlCol="0" anchor="ctr"/>
+          <a:bodyPr rtlCol="0" anchor="ctr" wrap="square"/>
           <a:lstStyle/>
           <a:p>
             <a:pPr algn="ctr">
@@ -4934,7 +5098,6 @@
           <a:lstStyle/>
           <a:p>
             <a:pPr algn="ctr"/>
-            <a:endParaRPr/>
           </a:p>
         </p:txBody>
       </p:sp>
@@ -5014,7 +5177,42 @@
           <a:lstStyle/>
           <a:p>
             <a:pPr algn="ctr"/>
-            <a:endParaRPr/>
+          </a:p>
+        </p:txBody>
+      </p:sp>
+      <p:sp>
+        <p:nvSpPr>
+          <p:cNvPr id="16" name="TextBox 15"/>
+          <p:cNvSpPr txBox="1"/>
+          <p:nvPr/>
+        </p:nvSpPr>
+        <p:spPr>
+          <a:xfrm>
+            <a:off x="731520" y="6355080"/>
+            <a:ext cx="7315200" cy="320040"/>
+          </a:xfrm>
+          <a:prstGeom prst="rect">
+            <a:avLst/>
+          </a:prstGeom>
+          <a:noFill/>
+        </p:spPr>
+        <p:txBody>
+          <a:bodyPr wrap="none">
+            <a:spAutoFit/>
+          </a:bodyPr>
+          <a:lstStyle/>
+          <a:p>
+            <a:pPr>
+              <a:defRPr sz="950">
+                <a:solidFill>
+                  <a:srgbClr val="94A3B8"/>
+                </a:solidFill>
+                <a:latin typeface="Consolas"/>
+              </a:defRPr>
+            </a:pPr>
+            <a:r>
+              <a:t>SWASTHYAGRID AI • Google Cloud GenAI Hackathon 2026 • Track 3: Smart Health &amp; Resilience</a:t>
+            </a:r>
           </a:p>
         </p:txBody>
       </p:sp>
@@ -5063,7 +5261,7 @@
 </file>
 
 <file path=ppt/slides/slide10.xml><?xml version="1.0" encoding="utf-8"?>
-<p:sld xmlns:a="http://schemas.openxmlformats.org/drawingml/2006/main" xmlns:r="http://schemas.openxmlformats.org/officeDocument/2006/relationships" xmlns:p="http://schemas.openxmlformats.org/presentationml/2006/main">
+<p:sld xmlns:a="http://schemas.openxmlformats.org/drawingml/2006/main" xmlns:p="http://schemas.openxmlformats.org/presentationml/2006/main" xmlns:r="http://schemas.openxmlformats.org/officeDocument/2006/relationships">
   <p:cSld>
     <p:spTree>
       <p:nvGrpSpPr>
@@ -5071,14 +5269,7 @@
         <p:cNvGrpSpPr/>
         <p:nvPr/>
       </p:nvGrpSpPr>
-      <p:grpSpPr>
-        <a:xfrm>
-          <a:off x="0" y="0"/>
-          <a:ext cx="0" cy="0"/>
-          <a:chOff x="0" y="0"/>
-          <a:chExt cx="0" cy="0"/>
-        </a:xfrm>
-      </p:grpSpPr>
+      <p:grpSpPr/>
       <p:sp>
         <p:nvSpPr>
           <p:cNvPr id="2" name="Rectangle 1"/>
@@ -5119,7 +5310,6 @@
           <a:lstStyle/>
           <a:p>
             <a:pPr algn="ctr"/>
-            <a:endParaRPr/>
           </a:p>
         </p:txBody>
       </p:sp>
@@ -5161,7 +5351,7 @@
           </a:fontRef>
         </p:style>
         <p:txBody>
-          <a:bodyPr wrap="square" rtlCol="0" anchor="ctr"/>
+          <a:bodyPr rtlCol="0" anchor="ctr" wrap="square"/>
           <a:lstStyle/>
           <a:p>
             <a:pPr algn="ctr">
@@ -5288,7 +5478,7 @@
           </a:fontRef>
         </p:style>
         <p:txBody>
-          <a:bodyPr wrap="square" rtlCol="0" anchor="ctr"/>
+          <a:bodyPr rtlCol="0" anchor="ctr" wrap="square"/>
           <a:lstStyle/>
           <a:p>
             <a:pPr algn="ctr">
@@ -5303,7 +5493,6 @@
               </a:defRPr>
             </a:pPr>
             <a:r>
-              <a:rPr dirty="0"/>
               <a:t>89%</a:t>
             </a:r>
           </a:p>
@@ -5320,7 +5509,6 @@
               </a:defRPr>
             </a:pPr>
             <a:r>
-              <a:rPr dirty="0"/>
               <a:t>Reduction in Stockout Hours</a:t>
             </a:r>
           </a:p>
@@ -5337,7 +5525,6 @@
               </a:defRPr>
             </a:pPr>
             <a:r>
-              <a:rPr dirty="0"/>
               <a:t>Shortage window dropped from 68h to &lt; 7.5h.</a:t>
             </a:r>
           </a:p>
@@ -5381,7 +5568,7 @@
           </a:fontRef>
         </p:style>
         <p:txBody>
-          <a:bodyPr wrap="square" rtlCol="0" anchor="ctr"/>
+          <a:bodyPr rtlCol="0" anchor="ctr" wrap="square"/>
           <a:lstStyle/>
           <a:p>
             <a:pPr algn="ctr">
@@ -5471,7 +5658,7 @@
           </a:fontRef>
         </p:style>
         <p:txBody>
-          <a:bodyPr wrap="square" rtlCol="0" anchor="ctr"/>
+          <a:bodyPr rtlCol="0" anchor="ctr" wrap="square"/>
           <a:lstStyle/>
           <a:p>
             <a:pPr algn="ctr">
@@ -5561,7 +5748,7 @@
           </a:fontRef>
         </p:style>
         <p:txBody>
-          <a:bodyPr wrap="square" rtlCol="0" anchor="ctr"/>
+          <a:bodyPr rtlCol="0" anchor="ctr" wrap="square"/>
           <a:lstStyle/>
           <a:p>
             <a:pPr algn="ctr">
@@ -5651,7 +5838,7 @@
           </a:fontRef>
         </p:style>
         <p:txBody>
-          <a:bodyPr wrap="square" rtlCol="0" anchor="ctr"/>
+          <a:bodyPr rtlCol="0" anchor="ctr" wrap="square"/>
           <a:lstStyle/>
           <a:p>
             <a:pPr algn="ctr">
@@ -5666,24 +5853,8 @@
               </a:defRPr>
             </a:pPr>
             <a:r>
-              <a:rPr dirty="0"/>
               <a:t>BEFORE VS. AFTER SWASTHYAGRID AI</a:t>
             </a:r>
-            <a:endParaRPr lang="en-US" dirty="0"/>
-          </a:p>
-          <a:p>
-            <a:pPr algn="ctr">
-              <a:spcBef>
-                <a:spcPts val="400"/>
-              </a:spcBef>
-              <a:defRPr sz="1300" b="1">
-                <a:solidFill>
-                  <a:srgbClr val="1D4ED8"/>
-                </a:solidFill>
-                <a:latin typeface="Consolas"/>
-              </a:defRPr>
-            </a:pPr>
-            <a:endParaRPr dirty="0"/>
           </a:p>
           <a:p>
             <a:pPr>
@@ -5698,7 +5869,6 @@
               </a:defRPr>
             </a:pPr>
             <a:r>
-              <a:rPr dirty="0"/>
               <a:t>• Traditional Paper/Manual Process: 4 to 6 Days Response Window  •  42% Stockout Rate During Outbreaks  •  Siloed Telemetry</a:t>
             </a:r>
           </a:p>
@@ -5715,16 +5885,7 @@
               </a:defRPr>
             </a:pPr>
             <a:r>
-              <a:rPr dirty="0"/>
-              <a:t>• </a:t>
-            </a:r>
-            <a:r>
-              <a:rPr dirty="0" err="1"/>
-              <a:t>SwasthyaGrid</a:t>
-            </a:r>
-            <a:r>
-              <a:rPr dirty="0"/>
-              <a:t> Autonomous Resilience: &lt; 2 Hours Automated Route  •  &lt; 4% Stockout Rate  •  Google OR-Tools Zero Deficit Guarantee</a:t>
+              <a:t>• SwasthyaGrid Autonomous Resilience: &lt; 2 Hours Automated Route  •  &lt; 4% Stockout Rate  •  Google OR-Tools Zero Deficit Guarantee</a:t>
             </a:r>
           </a:p>
         </p:txBody>
@@ -5769,7 +5930,42 @@
           <a:lstStyle/>
           <a:p>
             <a:pPr algn="ctr"/>
-            <a:endParaRPr/>
+          </a:p>
+        </p:txBody>
+      </p:sp>
+      <p:sp>
+        <p:nvSpPr>
+          <p:cNvPr id="12" name="TextBox 11"/>
+          <p:cNvSpPr txBox="1"/>
+          <p:nvPr/>
+        </p:nvSpPr>
+        <p:spPr>
+          <a:xfrm>
+            <a:off x="731520" y="6355080"/>
+            <a:ext cx="7315200" cy="320040"/>
+          </a:xfrm>
+          <a:prstGeom prst="rect">
+            <a:avLst/>
+          </a:prstGeom>
+          <a:noFill/>
+        </p:spPr>
+        <p:txBody>
+          <a:bodyPr wrap="none">
+            <a:spAutoFit/>
+          </a:bodyPr>
+          <a:lstStyle/>
+          <a:p>
+            <a:pPr>
+              <a:defRPr sz="950">
+                <a:solidFill>
+                  <a:srgbClr val="94A3B8"/>
+                </a:solidFill>
+                <a:latin typeface="Consolas"/>
+              </a:defRPr>
+            </a:pPr>
+            <a:r>
+              <a:t>SWASTHYAGRID AI • Google Cloud GenAI Hackathon 2026 • Track 3: Smart Health &amp; Resilience</a:t>
+            </a:r>
           </a:p>
         </p:txBody>
       </p:sp>
@@ -5818,7 +6014,7 @@
 </file>
 
 <file path=ppt/slides/slide11.xml><?xml version="1.0" encoding="utf-8"?>
-<p:sld xmlns:a="http://schemas.openxmlformats.org/drawingml/2006/main" xmlns:r="http://schemas.openxmlformats.org/officeDocument/2006/relationships" xmlns:p="http://schemas.openxmlformats.org/presentationml/2006/main">
+<p:sld xmlns:a="http://schemas.openxmlformats.org/drawingml/2006/main" xmlns:p="http://schemas.openxmlformats.org/presentationml/2006/main" xmlns:r="http://schemas.openxmlformats.org/officeDocument/2006/relationships">
   <p:cSld>
     <p:spTree>
       <p:nvGrpSpPr>
@@ -5826,14 +6022,7 @@
         <p:cNvGrpSpPr/>
         <p:nvPr/>
       </p:nvGrpSpPr>
-      <p:grpSpPr>
-        <a:xfrm>
-          <a:off x="0" y="0"/>
-          <a:ext cx="0" cy="0"/>
-          <a:chOff x="0" y="0"/>
-          <a:chExt cx="0" cy="0"/>
-        </a:xfrm>
-      </p:grpSpPr>
+      <p:grpSpPr/>
       <p:sp>
         <p:nvSpPr>
           <p:cNvPr id="2" name="Rectangle 1"/>
@@ -5842,7 +6031,7 @@
         </p:nvSpPr>
         <p:spPr>
           <a:xfrm>
-            <a:off x="305" y="0"/>
+            <a:off x="0" y="0"/>
             <a:ext cx="12191695" cy="6858000"/>
           </a:xfrm>
           <a:prstGeom prst="rect">
@@ -5874,7 +6063,6 @@
           <a:lstStyle/>
           <a:p>
             <a:pPr algn="ctr"/>
-            <a:endParaRPr/>
           </a:p>
         </p:txBody>
       </p:sp>
@@ -5916,7 +6104,7 @@
           </a:fontRef>
         </p:style>
         <p:txBody>
-          <a:bodyPr wrap="square" rtlCol="0" anchor="ctr"/>
+          <a:bodyPr rtlCol="0" anchor="ctr" wrap="square"/>
           <a:lstStyle/>
           <a:p>
             <a:pPr algn="ctr">
@@ -6043,7 +6231,7 @@
           </a:fontRef>
         </p:style>
         <p:txBody>
-          <a:bodyPr wrap="square" rtlCol="0" anchor="ctr"/>
+          <a:bodyPr rtlCol="0" anchor="ctr" wrap="square"/>
           <a:lstStyle/>
           <a:p>
             <a:pPr algn="ctr">
@@ -6058,24 +6246,8 @@
               </a:defRPr>
             </a:pPr>
             <a:r>
-              <a:rPr sz="1400" dirty="0"/>
               <a:t>PHASE 1 • COMPLETED</a:t>
             </a:r>
-            <a:endParaRPr lang="en-US" sz="1400" dirty="0"/>
-          </a:p>
-          <a:p>
-            <a:pPr algn="ctr">
-              <a:spcBef>
-                <a:spcPts val="800"/>
-              </a:spcBef>
-              <a:defRPr sz="1100" b="1">
-                <a:solidFill>
-                  <a:srgbClr val="0891B2"/>
-                </a:solidFill>
-                <a:latin typeface="Consolas"/>
-              </a:defRPr>
-            </a:pPr>
-            <a:endParaRPr dirty="0"/>
           </a:p>
           <a:p>
             <a:pPr>
@@ -6090,24 +6262,8 @@
               </a:defRPr>
             </a:pPr>
             <a:r>
-              <a:rPr sz="1600" dirty="0"/>
               <a:t>Sentinel AI Prototype</a:t>
             </a:r>
-            <a:endParaRPr lang="en-US" sz="1600" dirty="0"/>
-          </a:p>
-          <a:p>
-            <a:pPr>
-              <a:spcBef>
-                <a:spcPts val="400"/>
-              </a:spcBef>
-              <a:defRPr sz="1400" b="1">
-                <a:solidFill>
-                  <a:srgbClr val="0F172A"/>
-                </a:solidFill>
-                <a:latin typeface="Arial"/>
-              </a:defRPr>
-            </a:pPr>
-            <a:endParaRPr dirty="0"/>
           </a:p>
           <a:p>
             <a:pPr>
@@ -6122,7 +6278,6 @@
               </a:defRPr>
             </a:pPr>
             <a:r>
-              <a:rPr dirty="0"/>
               <a:t>•  33 Sentinel facilities in Bihar, UP, Maharashtra.</a:t>
             </a:r>
           </a:p>
@@ -6139,16 +6294,7 @@
               </a:defRPr>
             </a:pPr>
             <a:r>
-              <a:rPr dirty="0"/>
-              <a:t>•  Ridge/</a:t>
-            </a:r>
-            <a:r>
-              <a:rPr dirty="0" err="1"/>
-              <a:t>LightGBM</a:t>
-            </a:r>
-            <a:r>
-              <a:rPr dirty="0"/>
-              <a:t> multi-horizon demand ML.</a:t>
+              <a:t>•  Ridge/LightGBM multi-horizon demand ML.</a:t>
             </a:r>
           </a:p>
           <a:p>
@@ -6164,7 +6310,6 @@
               </a:defRPr>
             </a:pPr>
             <a:r>
-              <a:rPr dirty="0"/>
               <a:t>•  Google OR-Tools MILP logistics solver.</a:t>
             </a:r>
           </a:p>
@@ -6181,7 +6326,6 @@
               </a:defRPr>
             </a:pPr>
             <a:r>
-              <a:rPr dirty="0"/>
               <a:t>•  Grounded Gemini 2.5 Flash Operations Copilot.</a:t>
             </a:r>
           </a:p>
@@ -6225,7 +6369,7 @@
           </a:fontRef>
         </p:style>
         <p:txBody>
-          <a:bodyPr wrap="square" rtlCol="0" anchor="ctr"/>
+          <a:bodyPr rtlCol="0" anchor="ctr" wrap="square"/>
           <a:lstStyle/>
           <a:p>
             <a:pPr algn="ctr">
@@ -6240,24 +6384,8 @@
               </a:defRPr>
             </a:pPr>
             <a:r>
-              <a:rPr sz="1400" dirty="0"/>
               <a:t>PHASE 2 • Q3 2026</a:t>
             </a:r>
-            <a:endParaRPr lang="en-US" sz="1400" dirty="0"/>
-          </a:p>
-          <a:p>
-            <a:pPr algn="ctr">
-              <a:spcBef>
-                <a:spcPts val="800"/>
-              </a:spcBef>
-              <a:defRPr sz="1100" b="1">
-                <a:solidFill>
-                  <a:srgbClr val="1D4ED8"/>
-                </a:solidFill>
-                <a:latin typeface="Consolas"/>
-              </a:defRPr>
-            </a:pPr>
-            <a:endParaRPr dirty="0"/>
           </a:p>
           <a:p>
             <a:pPr>
@@ -6272,32 +6400,8 @@
               </a:defRPr>
             </a:pPr>
             <a:r>
-              <a:rPr sz="1600" dirty="0"/>
-              <a:t>ABDM &amp; e-</a:t>
-            </a:r>
-            <a:r>
-              <a:rPr sz="1600" dirty="0" err="1"/>
-              <a:t>Aushadhi</a:t>
-            </a:r>
-            <a:r>
-              <a:rPr sz="1600" dirty="0"/>
-              <a:t> Connectors</a:t>
-            </a:r>
-            <a:endParaRPr lang="en-US" sz="1600" dirty="0"/>
-          </a:p>
-          <a:p>
-            <a:pPr>
-              <a:spcBef>
-                <a:spcPts val="400"/>
-              </a:spcBef>
-              <a:defRPr sz="1400" b="1">
-                <a:solidFill>
-                  <a:srgbClr val="0F172A"/>
-                </a:solidFill>
-                <a:latin typeface="Arial"/>
-              </a:defRPr>
-            </a:pPr>
-            <a:endParaRPr dirty="0"/>
+              <a:t>ABDM &amp; e-Aushadhi Connectors</a:t>
+            </a:r>
           </a:p>
           <a:p>
             <a:pPr>
@@ -6312,16 +6416,7 @@
               </a:defRPr>
             </a:pPr>
             <a:r>
-              <a:rPr dirty="0"/>
-              <a:t>•  Direct API connectors to DVDMS / e-</a:t>
-            </a:r>
-            <a:r>
-              <a:rPr dirty="0" err="1"/>
-              <a:t>Aushadhi</a:t>
-            </a:r>
-            <a:r>
-              <a:rPr dirty="0"/>
-              <a:t> portals.</a:t>
+              <a:t>•  Direct API connectors to DVDMS / e-Aushadhi portals.</a:t>
             </a:r>
           </a:p>
           <a:p>
@@ -6337,7 +6432,6 @@
               </a:defRPr>
             </a:pPr>
             <a:r>
-              <a:rPr dirty="0"/>
               <a:t>•  Ayushman Bharat Health Facility Registry (HFR) sync.</a:t>
             </a:r>
           </a:p>
@@ -6354,7 +6448,6 @@
               </a:defRPr>
             </a:pPr>
             <a:r>
-              <a:rPr dirty="0"/>
               <a:t>•  Automated WhatsApp/SMS alerts to PHC doctors.</a:t>
             </a:r>
           </a:p>
@@ -6371,7 +6464,6 @@
               </a:defRPr>
             </a:pPr>
             <a:r>
-              <a:rPr dirty="0"/>
               <a:t>•  Expansion to 1,000 clinics in flood-prone districts.</a:t>
             </a:r>
           </a:p>
@@ -6415,7 +6507,7 @@
           </a:fontRef>
         </p:style>
         <p:txBody>
-          <a:bodyPr wrap="square" rtlCol="0" anchor="ctr"/>
+          <a:bodyPr rtlCol="0" anchor="ctr" wrap="square"/>
           <a:lstStyle/>
           <a:p>
             <a:pPr algn="ctr">
@@ -6430,24 +6522,8 @@
               </a:defRPr>
             </a:pPr>
             <a:r>
-              <a:rPr sz="1400" dirty="0"/>
               <a:t>PHASE 3 • 2027</a:t>
             </a:r>
-            <a:endParaRPr lang="en-US" sz="1400" dirty="0"/>
-          </a:p>
-          <a:p>
-            <a:pPr algn="ctr">
-              <a:spcBef>
-                <a:spcPts val="800"/>
-              </a:spcBef>
-              <a:defRPr sz="1100" b="1">
-                <a:solidFill>
-                  <a:srgbClr val="7C3AED"/>
-                </a:solidFill>
-                <a:latin typeface="Consolas"/>
-              </a:defRPr>
-            </a:pPr>
-            <a:endParaRPr dirty="0"/>
           </a:p>
           <a:p>
             <a:pPr>
@@ -6462,24 +6538,8 @@
               </a:defRPr>
             </a:pPr>
             <a:r>
-              <a:rPr sz="1600" dirty="0"/>
               <a:t>Pan-India National Grid</a:t>
             </a:r>
-            <a:endParaRPr lang="en-US" sz="1600" dirty="0"/>
-          </a:p>
-          <a:p>
-            <a:pPr>
-              <a:spcBef>
-                <a:spcPts val="400"/>
-              </a:spcBef>
-              <a:defRPr sz="1400" b="1">
-                <a:solidFill>
-                  <a:srgbClr val="0F172A"/>
-                </a:solidFill>
-                <a:latin typeface="Arial"/>
-              </a:defRPr>
-            </a:pPr>
-            <a:endParaRPr dirty="0"/>
           </a:p>
           <a:p>
             <a:pPr>
@@ -6494,7 +6554,6 @@
               </a:defRPr>
             </a:pPr>
             <a:r>
-              <a:rPr dirty="0"/>
               <a:t>•  National rollout across 30,000+ PHCs in 36 States/UTs.</a:t>
             </a:r>
           </a:p>
@@ -6511,7 +6570,6 @@
               </a:defRPr>
             </a:pPr>
             <a:r>
-              <a:rPr dirty="0"/>
               <a:t>•  Drone logistics dispatch for isolated tribal clinics.</a:t>
             </a:r>
           </a:p>
@@ -6528,7 +6586,6 @@
               </a:defRPr>
             </a:pPr>
             <a:r>
-              <a:rPr dirty="0"/>
               <a:t>•  Epidemic early-warning meteorological radar.</a:t>
             </a:r>
           </a:p>
@@ -6545,7 +6602,6 @@
               </a:defRPr>
             </a:pPr>
             <a:r>
-              <a:rPr dirty="0"/>
               <a:t>•  Real-time vaccine cold-chain IoT integration.</a:t>
             </a:r>
           </a:p>
@@ -6601,18 +6657,8 @@
               </a:defRPr>
             </a:pPr>
             <a:r>
-              <a:rPr dirty="0"/>
-              <a:t>'How does </a:t>
-            </a:r>
-            <a:r>
-              <a:rPr dirty="0" err="1"/>
-              <a:t>SwasthyaGrid</a:t>
-            </a:r>
-            <a:r>
-              <a:rPr dirty="0"/>
-              <a:t> handle intermittent rural internet connectivity?'</a:t>
-            </a:r>
-            <a:endParaRPr lang="en-IN" dirty="0"/>
+              <a:t>JUDGE FAQ: 'How does SwasthyaGrid handle intermittent rural internet connectivity?'</a:t>
+            </a:r>
           </a:p>
           <a:p>
             <a:pPr>
@@ -6627,7 +6673,6 @@
               </a:defRPr>
             </a:pPr>
             <a:r>
-              <a:rPr lang="en-IN" dirty="0"/>
               <a:t>Answer: Aggressive ServiceWorker offline caching. PHC workers log dispensing records offline; the system syncs delta batches via compressed background HTTP payloads or SMS gateway fallback upon reconnection.</a:t>
             </a:r>
           </a:p>
@@ -6673,7 +6718,42 @@
           <a:lstStyle/>
           <a:p>
             <a:pPr algn="ctr"/>
-            <a:endParaRPr/>
+          </a:p>
+        </p:txBody>
+      </p:sp>
+      <p:sp>
+        <p:nvSpPr>
+          <p:cNvPr id="11" name="TextBox 10"/>
+          <p:cNvSpPr txBox="1"/>
+          <p:nvPr/>
+        </p:nvSpPr>
+        <p:spPr>
+          <a:xfrm>
+            <a:off x="731520" y="6355080"/>
+            <a:ext cx="7315200" cy="320040"/>
+          </a:xfrm>
+          <a:prstGeom prst="rect">
+            <a:avLst/>
+          </a:prstGeom>
+          <a:noFill/>
+        </p:spPr>
+        <p:txBody>
+          <a:bodyPr wrap="none">
+            <a:spAutoFit/>
+          </a:bodyPr>
+          <a:lstStyle/>
+          <a:p>
+            <a:pPr>
+              <a:defRPr sz="950">
+                <a:solidFill>
+                  <a:srgbClr val="94A3B8"/>
+                </a:solidFill>
+                <a:latin typeface="Consolas"/>
+              </a:defRPr>
+            </a:pPr>
+            <a:r>
+              <a:t>SWASTHYAGRID AI • Google Cloud GenAI Hackathon 2026 • Track 3: Smart Health &amp; Resilience</a:t>
+            </a:r>
           </a:p>
         </p:txBody>
       </p:sp>
@@ -6722,7 +6802,7 @@
 </file>
 
 <file path=ppt/slides/slide12.xml><?xml version="1.0" encoding="utf-8"?>
-<p:sld xmlns:a="http://schemas.openxmlformats.org/drawingml/2006/main" xmlns:r="http://schemas.openxmlformats.org/officeDocument/2006/relationships" xmlns:p="http://schemas.openxmlformats.org/presentationml/2006/main">
+<p:sld xmlns:a="http://schemas.openxmlformats.org/drawingml/2006/main" xmlns:p="http://schemas.openxmlformats.org/presentationml/2006/main" xmlns:r="http://schemas.openxmlformats.org/officeDocument/2006/relationships">
   <p:cSld>
     <p:spTree>
       <p:nvGrpSpPr>
@@ -6730,14 +6810,7 @@
         <p:cNvGrpSpPr/>
         <p:nvPr/>
       </p:nvGrpSpPr>
-      <p:grpSpPr>
-        <a:xfrm>
-          <a:off x="0" y="0"/>
-          <a:ext cx="0" cy="0"/>
-          <a:chOff x="0" y="0"/>
-          <a:chExt cx="0" cy="0"/>
-        </a:xfrm>
-      </p:grpSpPr>
+      <p:grpSpPr/>
       <p:sp>
         <p:nvSpPr>
           <p:cNvPr id="2" name="Rectangle 1"/>
@@ -6778,7 +6851,6 @@
           <a:lstStyle/>
           <a:p>
             <a:pPr algn="ctr"/>
-            <a:endParaRPr/>
           </a:p>
         </p:txBody>
       </p:sp>
@@ -6832,16 +6904,7 @@
               </a:defRPr>
             </a:pPr>
             <a:r>
-              <a:rPr dirty="0"/>
-              <a:t> </a:t>
-            </a:r>
-            <a:r>
-              <a:rPr lang="en-US" dirty="0"/>
-              <a:t>Build with Ai </a:t>
-            </a:r>
-            <a:r>
-              <a:rPr dirty="0"/>
-              <a:t>HACKATHON 2026 • SUMMARY &amp; CONCLUSION</a:t>
+              <a:t>GCP GENAI HACKATHON 2026 • SUMMARY &amp; CONCLUSION</a:t>
             </a:r>
           </a:p>
         </p:txBody>
@@ -6891,7 +6954,7 @@
         <p:spPr>
           <a:xfrm>
             <a:off x="1371600" y="2194560"/>
-            <a:ext cx="9448495" cy="584775"/>
+            <a:ext cx="9448495" cy="822960"/>
           </a:xfrm>
           <a:prstGeom prst="rect">
             <a:avLst/>
@@ -6899,7 +6962,7 @@
           <a:noFill/>
         </p:spPr>
         <p:txBody>
-          <a:bodyPr wrap="square">
+          <a:bodyPr wrap="none">
             <a:spAutoFit/>
           </a:bodyPr>
           <a:lstStyle/>
@@ -6913,12 +6976,7 @@
               </a:defRPr>
             </a:pPr>
             <a:r>
-              <a:rPr dirty="0" err="1"/>
-              <a:t>SwasthyaGrid</a:t>
-            </a:r>
-            <a:r>
-              <a:rPr dirty="0"/>
-              <a:t> AI transforms India's public health logistics from a blind, reactive panic into an autonomous, predictive resilience grid powered by Google Cloud.</a:t>
+              <a:t>SwasthyaGrid AI transforms India's public health logistics from a blind, reactive panic into an autonomous, predictive resilience grid powered by Google Cloud.</a:t>
             </a:r>
           </a:p>
         </p:txBody>
@@ -6931,7 +6989,7 @@
         </p:nvSpPr>
         <p:spPr>
           <a:xfrm>
-            <a:off x="731520" y="3244950"/>
+            <a:off x="731520" y="3291840"/>
             <a:ext cx="2468880" cy="1371600"/>
           </a:xfrm>
           <a:prstGeom prst="roundRect">
@@ -6961,7 +7019,7 @@
           </a:fontRef>
         </p:style>
         <p:txBody>
-          <a:bodyPr wrap="square" rtlCol="0" anchor="ctr"/>
+          <a:bodyPr rtlCol="0" anchor="ctr" wrap="square"/>
           <a:lstStyle/>
           <a:p>
             <a:pPr algn="ctr">
@@ -7005,7 +7063,7 @@
         </p:nvSpPr>
         <p:spPr>
           <a:xfrm>
-            <a:off x="3419856" y="3244950"/>
+            <a:off x="3419856" y="3291840"/>
             <a:ext cx="2468880" cy="1371600"/>
           </a:xfrm>
           <a:prstGeom prst="roundRect">
@@ -7035,7 +7093,7 @@
           </a:fontRef>
         </p:style>
         <p:txBody>
-          <a:bodyPr wrap="square" rtlCol="0" anchor="ctr"/>
+          <a:bodyPr rtlCol="0" anchor="ctr" wrap="square"/>
           <a:lstStyle/>
           <a:p>
             <a:pPr algn="ctr">
@@ -7079,7 +7137,7 @@
         </p:nvSpPr>
         <p:spPr>
           <a:xfrm>
-            <a:off x="6108192" y="3244950"/>
+            <a:off x="6108192" y="3291840"/>
             <a:ext cx="2468880" cy="1371600"/>
           </a:xfrm>
           <a:prstGeom prst="roundRect">
@@ -7109,7 +7167,7 @@
           </a:fontRef>
         </p:style>
         <p:txBody>
-          <a:bodyPr wrap="square" rtlCol="0" anchor="ctr"/>
+          <a:bodyPr rtlCol="0" anchor="ctr" wrap="square"/>
           <a:lstStyle/>
           <a:p>
             <a:pPr algn="ctr">
@@ -7153,7 +7211,7 @@
         </p:nvSpPr>
         <p:spPr>
           <a:xfrm>
-            <a:off x="8796528" y="3244950"/>
+            <a:off x="8796528" y="3291840"/>
             <a:ext cx="2468880" cy="1371600"/>
           </a:xfrm>
           <a:prstGeom prst="roundRect">
@@ -7183,7 +7241,7 @@
           </a:fontRef>
         </p:style>
         <p:txBody>
-          <a:bodyPr wrap="square" rtlCol="0" anchor="ctr"/>
+          <a:bodyPr rtlCol="0" anchor="ctr" wrap="square"/>
           <a:lstStyle/>
           <a:p>
             <a:pPr algn="ctr">
@@ -7227,7 +7285,7 @@
         </p:nvSpPr>
         <p:spPr>
           <a:xfrm>
-            <a:off x="1828800" y="4914315"/>
+            <a:off x="1828800" y="4937760"/>
             <a:ext cx="8534095" cy="731520"/>
           </a:xfrm>
           <a:prstGeom prst="roundRect">
@@ -7298,8 +7356,8 @@
         </p:nvSpPr>
         <p:spPr>
           <a:xfrm>
-            <a:off x="5143972" y="5877413"/>
-            <a:ext cx="1891865" cy="461665"/>
+            <a:off x="731520" y="5760720"/>
+            <a:ext cx="10728655" cy="365760"/>
           </a:xfrm>
           <a:prstGeom prst="rect">
             <a:avLst/>
@@ -7321,16 +7379,7 @@
               </a:defRPr>
             </a:pPr>
             <a:r>
-              <a:rPr sz="2400" dirty="0"/>
-              <a:t> </a:t>
-            </a:r>
-            <a:r>
-              <a:rPr sz="2400" dirty="0">
-                <a:solidFill>
-                  <a:srgbClr val="FF0000"/>
-                </a:solidFill>
-              </a:rPr>
-              <a:t>Thank you </a:t>
+              <a:t>✨ Thank you, Judges! We look forward to your questions. ✨</a:t>
             </a:r>
           </a:p>
         </p:txBody>
@@ -7375,7 +7424,42 @@
           <a:lstStyle/>
           <a:p>
             <a:pPr algn="ctr"/>
-            <a:endParaRPr/>
+          </a:p>
+        </p:txBody>
+      </p:sp>
+      <p:sp>
+        <p:nvSpPr>
+          <p:cNvPr id="13" name="TextBox 12"/>
+          <p:cNvSpPr txBox="1"/>
+          <p:nvPr/>
+        </p:nvSpPr>
+        <p:spPr>
+          <a:xfrm>
+            <a:off x="731520" y="6355080"/>
+            <a:ext cx="7315200" cy="320040"/>
+          </a:xfrm>
+          <a:prstGeom prst="rect">
+            <a:avLst/>
+          </a:prstGeom>
+          <a:noFill/>
+        </p:spPr>
+        <p:txBody>
+          <a:bodyPr wrap="none">
+            <a:spAutoFit/>
+          </a:bodyPr>
+          <a:lstStyle/>
+          <a:p>
+            <a:pPr>
+              <a:defRPr sz="950">
+                <a:solidFill>
+                  <a:srgbClr val="94A3B8"/>
+                </a:solidFill>
+                <a:latin typeface="Consolas"/>
+              </a:defRPr>
+            </a:pPr>
+            <a:r>
+              <a:t>SWASTHYAGRID AI • Google Cloud GenAI Hackathon 2026 • Track 3: Smart Health &amp; Resilience</a:t>
+            </a:r>
           </a:p>
         </p:txBody>
       </p:sp>
@@ -7424,7 +7508,7 @@
 </file>
 
 <file path=ppt/slides/slide2.xml><?xml version="1.0" encoding="utf-8"?>
-<p:sld xmlns:a="http://schemas.openxmlformats.org/drawingml/2006/main" xmlns:r="http://schemas.openxmlformats.org/officeDocument/2006/relationships" xmlns:p="http://schemas.openxmlformats.org/presentationml/2006/main">
+<p:sld xmlns:a="http://schemas.openxmlformats.org/drawingml/2006/main" xmlns:p="http://schemas.openxmlformats.org/presentationml/2006/main" xmlns:r="http://schemas.openxmlformats.org/officeDocument/2006/relationships">
   <p:cSld>
     <p:spTree>
       <p:nvGrpSpPr>
@@ -7432,14 +7516,7 @@
         <p:cNvGrpSpPr/>
         <p:nvPr/>
       </p:nvGrpSpPr>
-      <p:grpSpPr>
-        <a:xfrm>
-          <a:off x="0" y="0"/>
-          <a:ext cx="0" cy="0"/>
-          <a:chOff x="0" y="0"/>
-          <a:chExt cx="0" cy="0"/>
-        </a:xfrm>
-      </p:grpSpPr>
+      <p:grpSpPr/>
       <p:sp>
         <p:nvSpPr>
           <p:cNvPr id="2" name="Rectangle 1"/>
@@ -7480,7 +7557,6 @@
           <a:lstStyle/>
           <a:p>
             <a:pPr algn="ctr"/>
-            <a:endParaRPr/>
           </a:p>
         </p:txBody>
       </p:sp>
@@ -7522,7 +7598,7 @@
           </a:fontRef>
         </p:style>
         <p:txBody>
-          <a:bodyPr wrap="square" rtlCol="0" anchor="ctr"/>
+          <a:bodyPr rtlCol="0" anchor="ctr" wrap="square"/>
           <a:lstStyle/>
           <a:p>
             <a:pPr algn="ctr">
@@ -7619,7 +7695,7 @@
         </p:nvSpPr>
         <p:spPr>
           <a:xfrm>
-            <a:off x="457200" y="1764792"/>
+            <a:off x="731520" y="1828800"/>
             <a:ext cx="5120640" cy="3474720"/>
           </a:xfrm>
           <a:prstGeom prst="roundRect">
@@ -7649,7 +7725,7 @@
           </a:fontRef>
         </p:style>
         <p:txBody>
-          <a:bodyPr wrap="square" rtlCol="0" anchor="ctr"/>
+          <a:bodyPr rtlCol="0" anchor="ctr" wrap="square"/>
           <a:lstStyle/>
           <a:p>
             <a:pPr algn="ctr">
@@ -7664,7 +7740,6 @@
               </a:defRPr>
             </a:pPr>
             <a:r>
-              <a:rPr dirty="0"/>
               <a:t>CLINIC A: CRITICAL STOCKOUT</a:t>
             </a:r>
           </a:p>
@@ -7681,20 +7756,7 @@
               </a:defRPr>
             </a:pPr>
             <a:r>
-              <a:rPr lang="en-US" dirty="0"/>
-              <a:t>                          </a:t>
-            </a:r>
-            <a:r>
-              <a:rPr dirty="0"/>
-              <a:t>PHC </a:t>
-            </a:r>
-            <a:r>
-              <a:rPr dirty="0" err="1"/>
-              <a:t>Bakhtiyarpur</a:t>
-            </a:r>
-            <a:r>
-              <a:rPr dirty="0"/>
-              <a:t> (District: Patna)</a:t>
+              <a:t>PHC Bakhtiyarpur (District: Patna)</a:t>
             </a:r>
           </a:p>
         </p:txBody>
@@ -7706,9 +7768,9 @@
           <p:nvPr/>
         </p:nvSpPr>
         <p:spPr>
-          <a:xfrm rot="5400000">
-            <a:off x="4072796" y="3516723"/>
-            <a:ext cx="3451977" cy="76129"/>
+          <a:xfrm>
+            <a:off x="731520" y="1828800"/>
+            <a:ext cx="5120640" cy="73152"/>
           </a:xfrm>
           <a:prstGeom prst="rect">
             <a:avLst/>
@@ -7739,7 +7801,6 @@
           <a:lstStyle/>
           <a:p>
             <a:pPr algn="ctr"/>
-            <a:endParaRPr/>
           </a:p>
         </p:txBody>
       </p:sp>
@@ -7751,7 +7812,7 @@
         </p:nvSpPr>
         <p:spPr>
           <a:xfrm>
-            <a:off x="731520" y="2164255"/>
+            <a:off x="1005840" y="2560320"/>
             <a:ext cx="4572000" cy="777240"/>
           </a:xfrm>
           <a:prstGeom prst="roundRect">
@@ -7819,7 +7880,7 @@
         </p:nvSpPr>
         <p:spPr>
           <a:xfrm>
-            <a:off x="640080" y="3473137"/>
+            <a:off x="914400" y="3429000"/>
             <a:ext cx="4754880" cy="1737360"/>
           </a:xfrm>
           <a:prstGeom prst="rect">
@@ -7832,9 +7893,7 @@
             <a:spAutoFit/>
           </a:bodyPr>
           <a:lstStyle/>
-          <a:p>
-            <a:endParaRPr dirty="0"/>
-          </a:p>
+          <a:p/>
           <a:p>
             <a:pPr>
               <a:spcBef>
@@ -7848,7 +7907,6 @@
               </a:defRPr>
             </a:pPr>
             <a:r>
-              <a:rPr dirty="0"/>
               <a:t>• Monsoon Flood Outbreak: +340% demand surge for Paracetamol &amp; IV fluids.</a:t>
             </a:r>
           </a:p>
@@ -7865,7 +7923,6 @@
               </a:defRPr>
             </a:pPr>
             <a:r>
-              <a:rPr dirty="0"/>
               <a:t>• Complete Blindness: Clinic runs dry by Day 3; emergency patients turned away.</a:t>
             </a:r>
           </a:p>
@@ -7882,7 +7939,6 @@
               </a:defRPr>
             </a:pPr>
             <a:r>
-              <a:rPr dirty="0"/>
               <a:t>• Bureaucratic Inertia: Manual paperwork requisition takes 5 to 7 working days.</a:t>
             </a:r>
           </a:p>
@@ -7926,7 +7982,7 @@
           </a:fontRef>
         </p:style>
         <p:txBody>
-          <a:bodyPr wrap="square" rtlCol="0" anchor="ctr"/>
+          <a:bodyPr rtlCol="0" anchor="ctr" wrap="square"/>
           <a:lstStyle/>
           <a:p>
             <a:pPr algn="ctr">
@@ -7941,7 +7997,6 @@
               </a:defRPr>
             </a:pPr>
             <a:r>
-              <a:rPr dirty="0"/>
               <a:t>CLINIC B: IDLE UNUSED SURPLUS</a:t>
             </a:r>
           </a:p>
@@ -7958,20 +8013,7 @@
               </a:defRPr>
             </a:pPr>
             <a:r>
-              <a:rPr lang="en-US" dirty="0"/>
-              <a:t>                   </a:t>
-            </a:r>
-            <a:r>
-              <a:rPr dirty="0"/>
-              <a:t>PHC </a:t>
-            </a:r>
-            <a:r>
-              <a:rPr dirty="0" err="1"/>
-              <a:t>Danapur</a:t>
-            </a:r>
-            <a:r>
-              <a:rPr dirty="0"/>
-              <a:t> (Distance: 18.4 km via NH31)</a:t>
+              <a:t>PHC Danapur (Distance: 18.4 km via NH31)</a:t>
             </a:r>
           </a:p>
         </p:txBody>
@@ -7983,9 +8025,9 @@
           <p:nvPr/>
         </p:nvSpPr>
         <p:spPr>
-          <a:xfrm rot="5400000">
-            <a:off x="4416289" y="3525869"/>
-            <a:ext cx="3433689" cy="76129"/>
+          <a:xfrm>
+            <a:off x="6339535" y="1828800"/>
+            <a:ext cx="5120640" cy="73152"/>
           </a:xfrm>
           <a:prstGeom prst="rect">
             <a:avLst/>
@@ -8016,7 +8058,6 @@
           <a:lstStyle/>
           <a:p>
             <a:pPr algn="ctr"/>
-            <a:endParaRPr/>
           </a:p>
         </p:txBody>
       </p:sp>
@@ -8028,7 +8069,7 @@
         </p:nvSpPr>
         <p:spPr>
           <a:xfrm>
-            <a:off x="6522415" y="2221992"/>
+            <a:off x="6613855" y="2560320"/>
             <a:ext cx="4572000" cy="777240"/>
           </a:xfrm>
           <a:prstGeom prst="roundRect">
@@ -8070,7 +8111,6 @@
               </a:defRPr>
             </a:pPr>
             <a:r>
-              <a:rPr dirty="0"/>
               <a:t>DOSA = 48.5 Days (Idle Excess Surplus)</a:t>
             </a:r>
           </a:p>
@@ -8084,7 +8124,6 @@
               </a:defRPr>
             </a:pPr>
             <a:r>
-              <a:rPr dirty="0"/>
               <a:t>Sitting on 3,500 unopened packs of Paracetamol &amp; Amoxicillin</a:t>
             </a:r>
           </a:p>
@@ -8098,7 +8137,7 @@
         </p:nvSpPr>
         <p:spPr>
           <a:xfrm>
-            <a:off x="6522415" y="3502152"/>
+            <a:off x="6522415" y="3429000"/>
             <a:ext cx="4754880" cy="1737360"/>
           </a:xfrm>
           <a:prstGeom prst="rect">
@@ -8111,9 +8150,7 @@
             <a:spAutoFit/>
           </a:bodyPr>
           <a:lstStyle/>
-          <a:p>
-            <a:endParaRPr dirty="0"/>
-          </a:p>
+          <a:p/>
           <a:p>
             <a:pPr>
               <a:spcBef>
@@ -8127,12 +8164,7 @@
               </a:defRPr>
             </a:pPr>
             <a:r>
-              <a:rPr dirty="0"/>
-              <a:t>• Invisible Inventory: District officers cannot s</a:t>
-            </a:r>
-            <a:r>
-              <a:rPr lang="en-US" dirty="0"/>
-              <a:t>ee real-time cross-facility stock.</a:t>
+              <a:t>• Invisible Inventory: District officers cannot see real-time cross-facility stock.</a:t>
             </a:r>
           </a:p>
           <a:p>
@@ -8148,7 +8180,6 @@
               </a:defRPr>
             </a:pPr>
             <a:r>
-              <a:rPr dirty="0"/>
               <a:t>• Waste &amp; Expiry: Life-saving medicine risks expiring on shelves while neighbors die.</a:t>
             </a:r>
           </a:p>
@@ -8165,7 +8196,6 @@
               </a:defRPr>
             </a:pPr>
             <a:r>
-              <a:rPr dirty="0"/>
               <a:t>• Zero Coordination: No automated mechanism to pair surplus donors with clinics in deficit.</a:t>
             </a:r>
           </a:p>
@@ -8266,7 +8296,42 @@
           <a:lstStyle/>
           <a:p>
             <a:pPr algn="ctr"/>
-            <a:endParaRPr/>
+          </a:p>
+        </p:txBody>
+      </p:sp>
+      <p:sp>
+        <p:nvSpPr>
+          <p:cNvPr id="16" name="TextBox 15"/>
+          <p:cNvSpPr txBox="1"/>
+          <p:nvPr/>
+        </p:nvSpPr>
+        <p:spPr>
+          <a:xfrm>
+            <a:off x="731520" y="6355080"/>
+            <a:ext cx="7315200" cy="320040"/>
+          </a:xfrm>
+          <a:prstGeom prst="rect">
+            <a:avLst/>
+          </a:prstGeom>
+          <a:noFill/>
+        </p:spPr>
+        <p:txBody>
+          <a:bodyPr wrap="none">
+            <a:spAutoFit/>
+          </a:bodyPr>
+          <a:lstStyle/>
+          <a:p>
+            <a:pPr>
+              <a:defRPr sz="950">
+                <a:solidFill>
+                  <a:srgbClr val="94A3B8"/>
+                </a:solidFill>
+                <a:latin typeface="Consolas"/>
+              </a:defRPr>
+            </a:pPr>
+            <a:r>
+              <a:t>SWASTHYAGRID AI • Google Cloud GenAI Hackathon 2026 • Track 3: Smart Health &amp; Resilience</a:t>
+            </a:r>
           </a:p>
         </p:txBody>
       </p:sp>
@@ -8315,7 +8380,7 @@
 </file>
 
 <file path=ppt/slides/slide3.xml><?xml version="1.0" encoding="utf-8"?>
-<p:sld xmlns:a="http://schemas.openxmlformats.org/drawingml/2006/main" xmlns:r="http://schemas.openxmlformats.org/officeDocument/2006/relationships" xmlns:p="http://schemas.openxmlformats.org/presentationml/2006/main">
+<p:sld xmlns:a="http://schemas.openxmlformats.org/drawingml/2006/main" xmlns:p="http://schemas.openxmlformats.org/presentationml/2006/main" xmlns:r="http://schemas.openxmlformats.org/officeDocument/2006/relationships">
   <p:cSld>
     <p:spTree>
       <p:nvGrpSpPr>
@@ -8323,14 +8388,7 @@
         <p:cNvGrpSpPr/>
         <p:nvPr/>
       </p:nvGrpSpPr>
-      <p:grpSpPr>
-        <a:xfrm>
-          <a:off x="0" y="0"/>
-          <a:ext cx="0" cy="0"/>
-          <a:chOff x="0" y="0"/>
-          <a:chExt cx="0" cy="0"/>
-        </a:xfrm>
-      </p:grpSpPr>
+      <p:grpSpPr/>
       <p:sp>
         <p:nvSpPr>
           <p:cNvPr id="2" name="Rectangle 1"/>
@@ -8371,7 +8429,6 @@
           <a:lstStyle/>
           <a:p>
             <a:pPr algn="ctr"/>
-            <a:endParaRPr/>
           </a:p>
         </p:txBody>
       </p:sp>
@@ -8413,7 +8470,7 @@
           </a:fontRef>
         </p:style>
         <p:txBody>
-          <a:bodyPr wrap="square" rtlCol="0" anchor="ctr"/>
+          <a:bodyPr rtlCol="0" anchor="ctr" wrap="square"/>
           <a:lstStyle/>
           <a:p>
             <a:pPr algn="ctr">
@@ -8497,7 +8554,6 @@
               </a:defRPr>
             </a:pPr>
             <a:r>
-              <a:rPr dirty="0"/>
               <a:t>Transforming fragmented operational telemetry into predictive, automated early action.</a:t>
             </a:r>
           </a:p>
@@ -8541,7 +8597,7 @@
           </a:fontRef>
         </p:style>
         <p:txBody>
-          <a:bodyPr wrap="square" rtlCol="0" anchor="ctr"/>
+          <a:bodyPr rtlCol="0" anchor="ctr" wrap="square"/>
           <a:lstStyle/>
           <a:p>
             <a:pPr algn="ctr">
@@ -8614,7 +8670,7 @@
         </p:nvSpPr>
         <p:spPr>
           <a:xfrm>
-            <a:off x="731520" y="1904610"/>
+            <a:off x="731520" y="1920240"/>
             <a:ext cx="2514600" cy="73152"/>
           </a:xfrm>
           <a:prstGeom prst="rect">
@@ -8646,7 +8702,6 @@
           <a:lstStyle/>
           <a:p>
             <a:pPr algn="ctr"/>
-            <a:endParaRPr/>
           </a:p>
         </p:txBody>
       </p:sp>
@@ -8743,7 +8798,7 @@
           </a:fontRef>
         </p:style>
         <p:txBody>
-          <a:bodyPr wrap="square" rtlCol="0" anchor="ctr"/>
+          <a:bodyPr rtlCol="0" anchor="ctr" wrap="square"/>
           <a:lstStyle/>
           <a:p>
             <a:pPr algn="ctr">
@@ -8758,24 +8813,8 @@
               </a:defRPr>
             </a:pPr>
             <a:r>
-              <a:rPr dirty="0"/>
               <a:t>02 / WARN</a:t>
             </a:r>
-            <a:endParaRPr lang="en-US" dirty="0"/>
-          </a:p>
-          <a:p>
-            <a:pPr algn="ctr">
-              <a:spcBef>
-                <a:spcPts val="1200"/>
-              </a:spcBef>
-              <a:defRPr sz="1100" b="1">
-                <a:solidFill>
-                  <a:srgbClr val="D97706"/>
-                </a:solidFill>
-                <a:latin typeface="Consolas"/>
-              </a:defRPr>
-            </a:pPr>
-            <a:endParaRPr dirty="0"/>
           </a:p>
           <a:p>
             <a:pPr>
@@ -8790,7 +8829,6 @@
               </a:defRPr>
             </a:pPr>
             <a:r>
-              <a:rPr dirty="0"/>
               <a:t>72-Hour Risk Engine</a:t>
             </a:r>
           </a:p>
@@ -8807,31 +8845,19 @@
               </a:defRPr>
             </a:pPr>
             <a:r>
-              <a:rPr dirty="0"/>
               <a:t>Mathematical calculation of Days of Stock Available (DOSA = Stock / Demand).</a:t>
             </a:r>
-            <a:br>
-              <a:rPr dirty="0"/>
-            </a:br>
-            <a:br>
-              <a:rPr dirty="0"/>
-            </a:br>
-            <a:r>
-              <a:rPr dirty="0"/>
+            <a:br/>
+            <a:br/>
+            <a:r>
               <a:t>• Automated early warnings when DOSA &lt; 3.0d</a:t>
             </a:r>
-            <a:br>
-              <a:rPr dirty="0"/>
-            </a:br>
-            <a:r>
-              <a:rPr dirty="0"/>
+            <a:br/>
+            <a:r>
               <a:t>• Flags shortages 72 hours early</a:t>
             </a:r>
-            <a:br>
-              <a:rPr dirty="0"/>
-            </a:br>
-            <a:r>
-              <a:rPr dirty="0"/>
+            <a:br/>
+            <a:r>
               <a:t>• Categorizes facilities into 4 risk tiers</a:t>
             </a:r>
           </a:p>
@@ -8845,7 +8871,7 @@
         </p:nvSpPr>
         <p:spPr>
           <a:xfrm>
-            <a:off x="3465576" y="1904610"/>
+            <a:off x="3465576" y="1920240"/>
             <a:ext cx="2514600" cy="73152"/>
           </a:xfrm>
           <a:prstGeom prst="rect">
@@ -8877,7 +8903,6 @@
           <a:lstStyle/>
           <a:p>
             <a:pPr algn="ctr"/>
-            <a:endParaRPr/>
           </a:p>
         </p:txBody>
       </p:sp>
@@ -8974,7 +8999,7 @@
           </a:fontRef>
         </p:style>
         <p:txBody>
-          <a:bodyPr wrap="square" rtlCol="0" anchor="ctr"/>
+          <a:bodyPr rtlCol="0" anchor="ctr" wrap="square"/>
           <a:lstStyle/>
           <a:p>
             <a:pPr algn="ctr">
@@ -8989,24 +9014,8 @@
               </a:defRPr>
             </a:pPr>
             <a:r>
-              <a:rPr dirty="0"/>
               <a:t>03 / REDISTRIBUTE</a:t>
             </a:r>
-            <a:endParaRPr lang="en-US" dirty="0"/>
-          </a:p>
-          <a:p>
-            <a:pPr algn="ctr">
-              <a:spcBef>
-                <a:spcPts val="1200"/>
-              </a:spcBef>
-              <a:defRPr sz="1100" b="1">
-                <a:solidFill>
-                  <a:srgbClr val="059669"/>
-                </a:solidFill>
-                <a:latin typeface="Consolas"/>
-              </a:defRPr>
-            </a:pPr>
-            <a:endParaRPr dirty="0"/>
           </a:p>
           <a:p>
             <a:pPr>
@@ -9021,7 +9030,6 @@
               </a:defRPr>
             </a:pPr>
             <a:r>
-              <a:rPr dirty="0"/>
               <a:t>Google OR-Tools MILP</a:t>
             </a:r>
           </a:p>
@@ -9038,31 +9046,19 @@
               </a:defRPr>
             </a:pPr>
             <a:r>
-              <a:rPr dirty="0"/>
               <a:t>Combinatorial Mixed-Integer Linear Programming rebalances multi-donor, multi-recipient nodes.</a:t>
             </a:r>
-            <a:br>
-              <a:rPr dirty="0"/>
-            </a:br>
-            <a:br>
-              <a:rPr dirty="0"/>
-            </a:br>
-            <a:r>
-              <a:rPr dirty="0"/>
+            <a:br/>
+            <a:br/>
+            <a:r>
               <a:t>• Strict 50 km road transit radius</a:t>
             </a:r>
-            <a:br>
-              <a:rPr dirty="0"/>
-            </a:br>
-            <a:r>
-              <a:rPr dirty="0"/>
+            <a:br/>
+            <a:r>
               <a:t>• Zero Donor Deficit mathematical guarantee</a:t>
             </a:r>
-            <a:br>
-              <a:rPr dirty="0"/>
-            </a:br>
-            <a:r>
-              <a:rPr dirty="0"/>
+            <a:br/>
+            <a:r>
               <a:t>• Solves in under 45 milliseconds</a:t>
             </a:r>
           </a:p>
@@ -9076,7 +9072,7 @@
         </p:nvSpPr>
         <p:spPr>
           <a:xfrm>
-            <a:off x="6199632" y="1904610"/>
+            <a:off x="6199632" y="1920240"/>
             <a:ext cx="2514600" cy="73152"/>
           </a:xfrm>
           <a:prstGeom prst="rect">
@@ -9108,7 +9104,6 @@
           <a:lstStyle/>
           <a:p>
             <a:pPr algn="ctr"/>
-            <a:endParaRPr/>
           </a:p>
         </p:txBody>
       </p:sp>
@@ -9205,7 +9200,7 @@
           </a:fontRef>
         </p:style>
         <p:txBody>
-          <a:bodyPr wrap="square" rtlCol="0" anchor="ctr"/>
+          <a:bodyPr rtlCol="0" anchor="ctr" wrap="square"/>
           <a:lstStyle/>
           <a:p>
             <a:pPr algn="ctr">
@@ -9220,24 +9215,8 @@
               </a:defRPr>
             </a:pPr>
             <a:r>
-              <a:rPr dirty="0"/>
               <a:t>04 / RESPOND</a:t>
             </a:r>
-            <a:endParaRPr lang="en-US" dirty="0"/>
-          </a:p>
-          <a:p>
-            <a:pPr algn="ctr">
-              <a:spcBef>
-                <a:spcPts val="1200"/>
-              </a:spcBef>
-              <a:defRPr sz="1100" b="1">
-                <a:solidFill>
-                  <a:srgbClr val="7C3AED"/>
-                </a:solidFill>
-                <a:latin typeface="Consolas"/>
-              </a:defRPr>
-            </a:pPr>
-            <a:endParaRPr dirty="0"/>
           </a:p>
           <a:p>
             <a:pPr>
@@ -9252,7 +9231,6 @@
               </a:defRPr>
             </a:pPr>
             <a:r>
-              <a:rPr dirty="0"/>
               <a:t>Grounded Gemini 2.5 Flash</a:t>
             </a:r>
           </a:p>
@@ -9269,31 +9247,19 @@
               </a:defRPr>
             </a:pPr>
             <a:r>
-              <a:rPr dirty="0"/>
               <a:t>Voice-enabled, bilingual (English / Hindi) Operations Copilot for healthcare directors.</a:t>
             </a:r>
-            <a:br>
-              <a:rPr dirty="0"/>
-            </a:br>
-            <a:br>
-              <a:rPr dirty="0"/>
-            </a:br>
-            <a:r>
-              <a:rPr dirty="0"/>
+            <a:br/>
+            <a:br/>
+            <a:r>
               <a:t>• Grounded in 10+ deterministic Python tools</a:t>
             </a:r>
-            <a:br>
-              <a:rPr dirty="0"/>
-            </a:br>
-            <a:r>
-              <a:rPr dirty="0"/>
+            <a:br/>
+            <a:r>
               <a:t>• 1-Click Verified Evidence Drawer</a:t>
             </a:r>
-            <a:br>
-              <a:rPr dirty="0"/>
-            </a:br>
-            <a:r>
-              <a:rPr dirty="0"/>
+            <a:br/>
+            <a:r>
               <a:t>• What-If disaster scenario sandboxing</a:t>
             </a:r>
           </a:p>
@@ -9307,7 +9273,7 @@
         </p:nvSpPr>
         <p:spPr>
           <a:xfrm>
-            <a:off x="8933688" y="1904610"/>
+            <a:off x="8933688" y="1920240"/>
             <a:ext cx="2514600" cy="73152"/>
           </a:xfrm>
           <a:prstGeom prst="rect">
@@ -9339,7 +9305,6 @@
           <a:lstStyle/>
           <a:p>
             <a:pPr algn="ctr"/>
-            <a:endParaRPr/>
           </a:p>
         </p:txBody>
       </p:sp>
@@ -9438,7 +9403,42 @@
           <a:lstStyle/>
           <a:p>
             <a:pPr algn="ctr"/>
-            <a:endParaRPr/>
+          </a:p>
+        </p:txBody>
+      </p:sp>
+      <p:sp>
+        <p:nvSpPr>
+          <p:cNvPr id="19" name="TextBox 18"/>
+          <p:cNvSpPr txBox="1"/>
+          <p:nvPr/>
+        </p:nvSpPr>
+        <p:spPr>
+          <a:xfrm>
+            <a:off x="731520" y="6355080"/>
+            <a:ext cx="7315200" cy="320040"/>
+          </a:xfrm>
+          <a:prstGeom prst="rect">
+            <a:avLst/>
+          </a:prstGeom>
+          <a:noFill/>
+        </p:spPr>
+        <p:txBody>
+          <a:bodyPr wrap="none">
+            <a:spAutoFit/>
+          </a:bodyPr>
+          <a:lstStyle/>
+          <a:p>
+            <a:pPr>
+              <a:defRPr sz="950">
+                <a:solidFill>
+                  <a:srgbClr val="94A3B8"/>
+                </a:solidFill>
+                <a:latin typeface="Consolas"/>
+              </a:defRPr>
+            </a:pPr>
+            <a:r>
+              <a:t>SWASTHYAGRID AI • Google Cloud GenAI Hackathon 2026 • Track 3: Smart Health &amp; Resilience</a:t>
+            </a:r>
           </a:p>
         </p:txBody>
       </p:sp>
@@ -9487,7 +9487,7 @@
 </file>
 
 <file path=ppt/slides/slide4.xml><?xml version="1.0" encoding="utf-8"?>
-<p:sld xmlns:a="http://schemas.openxmlformats.org/drawingml/2006/main" xmlns:r="http://schemas.openxmlformats.org/officeDocument/2006/relationships" xmlns:p="http://schemas.openxmlformats.org/presentationml/2006/main">
+<p:sld xmlns:a="http://schemas.openxmlformats.org/drawingml/2006/main" xmlns:p="http://schemas.openxmlformats.org/presentationml/2006/main" xmlns:r="http://schemas.openxmlformats.org/officeDocument/2006/relationships">
   <p:cSld>
     <p:spTree>
       <p:nvGrpSpPr>
@@ -9495,14 +9495,50 @@
         <p:cNvGrpSpPr/>
         <p:nvPr/>
       </p:nvGrpSpPr>
-      <p:grpSpPr>
-        <a:xfrm>
-          <a:off x="0" y="0"/>
-          <a:ext cx="0" cy="0"/>
-          <a:chOff x="0" y="0"/>
-          <a:chExt cx="0" cy="0"/>
-        </a:xfrm>
-      </p:grpSpPr>
+      <p:grpSpPr/>
+      <p:sp>
+        <p:nvSpPr>
+          <p:cNvPr id="2" name="Rectangle 1"/>
+          <p:cNvSpPr/>
+          <p:nvPr/>
+        </p:nvSpPr>
+        <p:spPr>
+          <a:xfrm>
+            <a:off x="0" y="0"/>
+            <a:ext cx="12191695" cy="6858000"/>
+          </a:xfrm>
+          <a:prstGeom prst="rect">
+            <a:avLst/>
+          </a:prstGeom>
+          <a:solidFill>
+            <a:srgbClr val="F8FAFC"/>
+          </a:solidFill>
+          <a:ln>
+            <a:noFill/>
+          </a:ln>
+        </p:spPr>
+        <p:style>
+          <a:lnRef idx="1">
+            <a:schemeClr val="accent1"/>
+          </a:lnRef>
+          <a:fillRef idx="3">
+            <a:schemeClr val="accent1"/>
+          </a:fillRef>
+          <a:effectRef idx="2">
+            <a:schemeClr val="accent1"/>
+          </a:effectRef>
+          <a:fontRef idx="minor">
+            <a:schemeClr val="lt1"/>
+          </a:fontRef>
+        </p:style>
+        <p:txBody>
+          <a:bodyPr rtlCol="0" anchor="ctr"/>
+          <a:lstStyle/>
+          <a:p>
+            <a:pPr algn="ctr"/>
+          </a:p>
+        </p:txBody>
+      </p:sp>
       <p:sp>
         <p:nvSpPr>
           <p:cNvPr id="3" name="Rounded Rectangle 2"/>
@@ -9541,7 +9577,7 @@
           </a:fontRef>
         </p:style>
         <p:txBody>
-          <a:bodyPr wrap="square" rtlCol="0" anchor="ctr"/>
+          <a:bodyPr rtlCol="0" anchor="ctr" wrap="square"/>
           <a:lstStyle/>
           <a:p>
             <a:pPr algn="ctr">
@@ -9668,7 +9704,7 @@
           </a:fontRef>
         </p:style>
         <p:txBody>
-          <a:bodyPr wrap="square" rtlCol="0" anchor="ctr"/>
+          <a:bodyPr rtlCol="0" anchor="ctr" wrap="square"/>
           <a:lstStyle/>
           <a:p>
             <a:pPr algn="ctr">
@@ -9680,32 +9716,8 @@
               </a:defRPr>
             </a:pPr>
             <a:r>
-              <a:rPr dirty="0"/>
               <a:t>Feature Pipeline &amp; Leakage Elimination</a:t>
             </a:r>
-            <a:endParaRPr lang="en-US" dirty="0"/>
-          </a:p>
-          <a:p>
-            <a:pPr algn="ctr">
-              <a:defRPr sz="1600" b="1">
-                <a:solidFill>
-                  <a:srgbClr val="0891B2"/>
-                </a:solidFill>
-                <a:latin typeface="Arial"/>
-              </a:defRPr>
-            </a:pPr>
-            <a:endParaRPr lang="en-IN" dirty="0"/>
-          </a:p>
-          <a:p>
-            <a:pPr algn="ctr">
-              <a:defRPr sz="1600" b="1">
-                <a:solidFill>
-                  <a:srgbClr val="0891B2"/>
-                </a:solidFill>
-                <a:latin typeface="Arial"/>
-              </a:defRPr>
-            </a:pPr>
-            <a:endParaRPr dirty="0"/>
           </a:p>
           <a:p>
             <a:pPr>
@@ -9720,7 +9732,6 @@
               </a:defRPr>
             </a:pPr>
             <a:r>
-              <a:rPr dirty="0"/>
               <a:t>• Strict Chronological Split: 70% Train, 15% Val, 15% Test without temporal leakage across dates.</a:t>
             </a:r>
           </a:p>
@@ -9737,7 +9748,6 @@
               </a:defRPr>
             </a:pPr>
             <a:r>
-              <a:rPr dirty="0"/>
               <a:t>• Multi-Order Lags: Consumption shifts across 1-day, 2-day, 3-day, 7-day, and 14-day intervals.</a:t>
             </a:r>
           </a:p>
@@ -9754,7 +9764,6 @@
               </a:defRPr>
             </a:pPr>
             <a:r>
-              <a:rPr dirty="0"/>
               <a:t>• Calendar Signals: Day-of-week, weekend effects, Monday outpatient surge indices, and seasonality.</a:t>
             </a:r>
           </a:p>
@@ -9771,7 +9780,6 @@
               </a:defRPr>
             </a:pPr>
             <a:r>
-              <a:rPr dirty="0"/>
               <a:t>• Contextual Multipliers: Real-time patient OPD footfall, bed occupancy rates, and active epidemic status.</a:t>
             </a:r>
           </a:p>
@@ -9788,7 +9796,6 @@
               </a:defRPr>
             </a:pPr>
             <a:r>
-              <a:rPr dirty="0"/>
               <a:t>• Uncertainty Modeling: Outputs point forecasts (p50) plus p10 &amp; p90 quantile intervals for risk safety buffers.</a:t>
             </a:r>
           </a:p>
@@ -9832,7 +9839,7 @@
           </a:fontRef>
         </p:style>
         <p:txBody>
-          <a:bodyPr wrap="square" rtlCol="0" anchor="ctr"/>
+          <a:bodyPr rtlCol="0" anchor="ctr" wrap="square"/>
           <a:lstStyle/>
           <a:p>
             <a:pPr algn="ctr">
@@ -9855,16 +9862,10 @@
           <p:cNvGraphicFramePr>
             <a:graphicFrameLocks noGrp="1"/>
           </p:cNvGraphicFramePr>
-          <p:nvPr>
-            <p:extLst>
-              <p:ext uri="{D42A27DB-BD31-4B8C-83A1-F6EECF244321}">
-                <p14:modId xmlns:p14="http://schemas.microsoft.com/office/powerpoint/2010/main" val="3207627071"/>
-              </p:ext>
-            </p:extLst>
-          </p:nvPr>
+          <p:nvPr/>
         </p:nvGraphicFramePr>
         <p:xfrm>
-          <a:off x="6522415" y="2301162"/>
+          <a:off x="6522415" y="2560320"/>
           <a:ext cx="4754880" cy="2011680"/>
         </p:xfrm>
         <a:graphic>
@@ -9874,34 +9875,10 @@
                 <a:tableStyleId>{5C22544A-7EE6-4342-B048-85BDC9FD1C3A}</a:tableStyleId>
               </a:tblPr>
               <a:tblGrid>
-                <a:gridCol w="1188720">
-                  <a:extLst>
-                    <a:ext uri="{9D8B030D-6E8A-4147-A177-3AD203B41FA5}">
-                      <a16:colId xmlns:a16="http://schemas.microsoft.com/office/drawing/2014/main" val="20000"/>
-                    </a:ext>
-                  </a:extLst>
-                </a:gridCol>
-                <a:gridCol w="1188720">
-                  <a:extLst>
-                    <a:ext uri="{9D8B030D-6E8A-4147-A177-3AD203B41FA5}">
-                      <a16:colId xmlns:a16="http://schemas.microsoft.com/office/drawing/2014/main" val="20001"/>
-                    </a:ext>
-                  </a:extLst>
-                </a:gridCol>
-                <a:gridCol w="1188720">
-                  <a:extLst>
-                    <a:ext uri="{9D8B030D-6E8A-4147-A177-3AD203B41FA5}">
-                      <a16:colId xmlns:a16="http://schemas.microsoft.com/office/drawing/2014/main" val="20002"/>
-                    </a:ext>
-                  </a:extLst>
-                </a:gridCol>
-                <a:gridCol w="1188720">
-                  <a:extLst>
-                    <a:ext uri="{9D8B030D-6E8A-4147-A177-3AD203B41FA5}">
-                      <a16:colId xmlns:a16="http://schemas.microsoft.com/office/drawing/2014/main" val="20003"/>
-                    </a:ext>
-                  </a:extLst>
-                </a:gridCol>
+                <a:gridCol w="1188720"/>
+                <a:gridCol w="1188720"/>
+                <a:gridCol w="1188720"/>
+                <a:gridCol w="1188720"/>
               </a:tblGrid>
               <a:tr h="502920">
                 <a:tc>
@@ -9966,12 +9943,7 @@
                         </a:defRPr>
                       </a:pPr>
                       <a:r>
-                        <a:rPr dirty="0" err="1"/>
-                        <a:t>Swasthya</a:t>
-                      </a:r>
-                      <a:r>
-                        <a:rPr dirty="0"/>
-                        <a:t> ML</a:t>
+                        <a:t>Swasthya ML</a:t>
                       </a:r>
                     </a:p>
                   </a:txBody>
@@ -10005,11 +9977,6 @@
                     </a:solidFill>
                   </a:tcPr>
                 </a:tc>
-                <a:extLst>
-                  <a:ext uri="{0D108BD9-81ED-4DB2-BD59-A6C34878D82A}">
-                    <a16:rowId xmlns:a16="http://schemas.microsoft.com/office/drawing/2014/main" val="10000"/>
-                  </a:ext>
-                </a:extLst>
               </a:tr>
               <a:tr h="502920">
                 <a:tc>
@@ -10108,11 +10075,6 @@
                     </a:solidFill>
                   </a:tcPr>
                 </a:tc>
-                <a:extLst>
-                  <a:ext uri="{0D108BD9-81ED-4DB2-BD59-A6C34878D82A}">
-                    <a16:rowId xmlns:a16="http://schemas.microsoft.com/office/drawing/2014/main" val="10001"/>
-                  </a:ext>
-                </a:extLst>
               </a:tr>
               <a:tr h="502920">
                 <a:tc>
@@ -10211,11 +10173,6 @@
                     </a:solidFill>
                   </a:tcPr>
                 </a:tc>
-                <a:extLst>
-                  <a:ext uri="{0D108BD9-81ED-4DB2-BD59-A6C34878D82A}">
-                    <a16:rowId xmlns:a16="http://schemas.microsoft.com/office/drawing/2014/main" val="10002"/>
-                  </a:ext>
-                </a:extLst>
               </a:tr>
               <a:tr h="502920">
                 <a:tc>
@@ -10304,7 +10261,6 @@
                         </a:defRPr>
                       </a:pPr>
                       <a:r>
-                        <a:rPr dirty="0"/>
                         <a:t>+34.33%</a:t>
                       </a:r>
                     </a:p>
@@ -10315,11 +10271,6 @@
                     </a:solidFill>
                   </a:tcPr>
                 </a:tc>
-                <a:extLst>
-                  <a:ext uri="{0D108BD9-81ED-4DB2-BD59-A6C34878D82A}">
-                    <a16:rowId xmlns:a16="http://schemas.microsoft.com/office/drawing/2014/main" val="10003"/>
-                  </a:ext>
-                </a:extLst>
               </a:tr>
             </a:tbl>
           </a:graphicData>
@@ -10333,7 +10284,7 @@
         </p:nvSpPr>
         <p:spPr>
           <a:xfrm>
-            <a:off x="6522415" y="4526280"/>
+            <a:off x="6522415" y="4754880"/>
             <a:ext cx="4754880" cy="1097280"/>
           </a:xfrm>
           <a:prstGeom prst="roundRect">
@@ -10363,7 +10314,7 @@
           </a:fontRef>
         </p:style>
         <p:txBody>
-          <a:bodyPr wrap="square" rtlCol="0" anchor="ctr"/>
+          <a:bodyPr rtlCol="0" anchor="ctr" wrap="square"/>
           <a:lstStyle/>
           <a:p>
             <a:pPr algn="ctr">
@@ -10420,7 +10371,42 @@
           <a:lstStyle/>
           <a:p>
             <a:pPr algn="ctr"/>
-            <a:endParaRPr/>
+          </a:p>
+        </p:txBody>
+      </p:sp>
+      <p:sp>
+        <p:nvSpPr>
+          <p:cNvPr id="11" name="TextBox 10"/>
+          <p:cNvSpPr txBox="1"/>
+          <p:nvPr/>
+        </p:nvSpPr>
+        <p:spPr>
+          <a:xfrm>
+            <a:off x="731520" y="6355080"/>
+            <a:ext cx="7315200" cy="320040"/>
+          </a:xfrm>
+          <a:prstGeom prst="rect">
+            <a:avLst/>
+          </a:prstGeom>
+          <a:noFill/>
+        </p:spPr>
+        <p:txBody>
+          <a:bodyPr wrap="none">
+            <a:spAutoFit/>
+          </a:bodyPr>
+          <a:lstStyle/>
+          <a:p>
+            <a:pPr>
+              <a:defRPr sz="950">
+                <a:solidFill>
+                  <a:srgbClr val="94A3B8"/>
+                </a:solidFill>
+                <a:latin typeface="Consolas"/>
+              </a:defRPr>
+            </a:pPr>
+            <a:r>
+              <a:t>SWASTHYAGRID AI • Google Cloud GenAI Hackathon 2026 • Track 3: Smart Health &amp; Resilience</a:t>
+            </a:r>
           </a:p>
         </p:txBody>
       </p:sp>
@@ -10469,7 +10455,7 @@
 </file>
 
 <file path=ppt/slides/slide5.xml><?xml version="1.0" encoding="utf-8"?>
-<p:sld xmlns:a="http://schemas.openxmlformats.org/drawingml/2006/main" xmlns:r="http://schemas.openxmlformats.org/officeDocument/2006/relationships" xmlns:p="http://schemas.openxmlformats.org/presentationml/2006/main">
+<p:sld xmlns:a="http://schemas.openxmlformats.org/drawingml/2006/main" xmlns:p="http://schemas.openxmlformats.org/presentationml/2006/main" xmlns:r="http://schemas.openxmlformats.org/officeDocument/2006/relationships">
   <p:cSld>
     <p:spTree>
       <p:nvGrpSpPr>
@@ -10477,14 +10463,7 @@
         <p:cNvGrpSpPr/>
         <p:nvPr/>
       </p:nvGrpSpPr>
-      <p:grpSpPr>
-        <a:xfrm>
-          <a:off x="0" y="0"/>
-          <a:ext cx="0" cy="0"/>
-          <a:chOff x="0" y="0"/>
-          <a:chExt cx="0" cy="0"/>
-        </a:xfrm>
-      </p:grpSpPr>
+      <p:grpSpPr/>
       <p:sp>
         <p:nvSpPr>
           <p:cNvPr id="2" name="Rectangle 1"/>
@@ -10525,7 +10504,6 @@
           <a:lstStyle/>
           <a:p>
             <a:pPr algn="ctr"/>
-            <a:endParaRPr/>
           </a:p>
         </p:txBody>
       </p:sp>
@@ -10567,7 +10545,7 @@
           </a:fontRef>
         </p:style>
         <p:txBody>
-          <a:bodyPr wrap="square" rtlCol="0" anchor="ctr"/>
+          <a:bodyPr rtlCol="0" anchor="ctr" wrap="square"/>
           <a:lstStyle/>
           <a:p>
             <a:pPr algn="ctr">
@@ -10694,7 +10672,7 @@
           </a:fontRef>
         </p:style>
         <p:txBody>
-          <a:bodyPr wrap="square" rtlCol="0" anchor="ctr"/>
+          <a:bodyPr rtlCol="0" anchor="ctr" wrap="square"/>
           <a:lstStyle/>
           <a:p>
             <a:pPr algn="ctr">
@@ -10754,7 +10732,7 @@
         </p:nvSpPr>
         <p:spPr>
           <a:xfrm>
-            <a:off x="731520" y="1904610"/>
+            <a:off x="731520" y="1920240"/>
             <a:ext cx="2514600" cy="73152"/>
           </a:xfrm>
           <a:prstGeom prst="rect">
@@ -10786,7 +10764,6 @@
           <a:lstStyle/>
           <a:p>
             <a:pPr algn="ctr"/>
-            <a:endParaRPr/>
           </a:p>
         </p:txBody>
       </p:sp>
@@ -10883,7 +10860,7 @@
           </a:fontRef>
         </p:style>
         <p:txBody>
-          <a:bodyPr wrap="square" rtlCol="0" anchor="ctr"/>
+          <a:bodyPr rtlCol="0" anchor="ctr" wrap="square"/>
           <a:lstStyle/>
           <a:p>
             <a:pPr algn="ctr">
@@ -10943,7 +10920,7 @@
         </p:nvSpPr>
         <p:spPr>
           <a:xfrm>
-            <a:off x="3465576" y="1912425"/>
+            <a:off x="3465576" y="1920240"/>
             <a:ext cx="2514600" cy="73152"/>
           </a:xfrm>
           <a:prstGeom prst="rect">
@@ -10975,7 +10952,6 @@
           <a:lstStyle/>
           <a:p>
             <a:pPr algn="ctr"/>
-            <a:endParaRPr/>
           </a:p>
         </p:txBody>
       </p:sp>
@@ -11072,7 +11048,7 @@
           </a:fontRef>
         </p:style>
         <p:txBody>
-          <a:bodyPr wrap="square" rtlCol="0" anchor="ctr"/>
+          <a:bodyPr rtlCol="0" anchor="ctr" wrap="square"/>
           <a:lstStyle/>
           <a:p>
             <a:pPr algn="ctr">
@@ -11132,7 +11108,7 @@
         </p:nvSpPr>
         <p:spPr>
           <a:xfrm>
-            <a:off x="6199632" y="1904610"/>
+            <a:off x="6199632" y="1920240"/>
             <a:ext cx="2514600" cy="73152"/>
           </a:xfrm>
           <a:prstGeom prst="rect">
@@ -11164,7 +11140,6 @@
           <a:lstStyle/>
           <a:p>
             <a:pPr algn="ctr"/>
-            <a:endParaRPr/>
           </a:p>
         </p:txBody>
       </p:sp>
@@ -11261,7 +11236,7 @@
           </a:fontRef>
         </p:style>
         <p:txBody>
-          <a:bodyPr wrap="square" rtlCol="0" anchor="ctr"/>
+          <a:bodyPr rtlCol="0" anchor="ctr" wrap="square"/>
           <a:lstStyle/>
           <a:p>
             <a:pPr algn="ctr">
@@ -11321,7 +11296,7 @@
         </p:nvSpPr>
         <p:spPr>
           <a:xfrm>
-            <a:off x="8933688" y="1904610"/>
+            <a:off x="8933688" y="1920240"/>
             <a:ext cx="2514600" cy="73152"/>
           </a:xfrm>
           <a:prstGeom prst="rect">
@@ -11353,7 +11328,6 @@
           <a:lstStyle/>
           <a:p>
             <a:pPr algn="ctr"/>
-            <a:endParaRPr/>
           </a:p>
         </p:txBody>
       </p:sp>
@@ -11523,7 +11497,42 @@
           <a:lstStyle/>
           <a:p>
             <a:pPr algn="ctr"/>
-            <a:endParaRPr/>
+          </a:p>
+        </p:txBody>
+      </p:sp>
+      <p:sp>
+        <p:nvSpPr>
+          <p:cNvPr id="20" name="TextBox 19"/>
+          <p:cNvSpPr txBox="1"/>
+          <p:nvPr/>
+        </p:nvSpPr>
+        <p:spPr>
+          <a:xfrm>
+            <a:off x="731520" y="6355080"/>
+            <a:ext cx="7315200" cy="320040"/>
+          </a:xfrm>
+          <a:prstGeom prst="rect">
+            <a:avLst/>
+          </a:prstGeom>
+          <a:noFill/>
+        </p:spPr>
+        <p:txBody>
+          <a:bodyPr wrap="none">
+            <a:spAutoFit/>
+          </a:bodyPr>
+          <a:lstStyle/>
+          <a:p>
+            <a:pPr>
+              <a:defRPr sz="950">
+                <a:solidFill>
+                  <a:srgbClr val="94A3B8"/>
+                </a:solidFill>
+                <a:latin typeface="Consolas"/>
+              </a:defRPr>
+            </a:pPr>
+            <a:r>
+              <a:t>SWASTHYAGRID AI • Google Cloud GenAI Hackathon 2026 • Track 3: Smart Health &amp; Resilience</a:t>
+            </a:r>
           </a:p>
         </p:txBody>
       </p:sp>
@@ -11572,7 +11581,7 @@
 </file>
 
 <file path=ppt/slides/slide6.xml><?xml version="1.0" encoding="utf-8"?>
-<p:sld xmlns:a="http://schemas.openxmlformats.org/drawingml/2006/main" xmlns:r="http://schemas.openxmlformats.org/officeDocument/2006/relationships" xmlns:p="http://schemas.openxmlformats.org/presentationml/2006/main">
+<p:sld xmlns:a="http://schemas.openxmlformats.org/drawingml/2006/main" xmlns:p="http://schemas.openxmlformats.org/presentationml/2006/main" xmlns:r="http://schemas.openxmlformats.org/officeDocument/2006/relationships">
   <p:cSld>
     <p:spTree>
       <p:nvGrpSpPr>
@@ -11580,14 +11589,7 @@
         <p:cNvGrpSpPr/>
         <p:nvPr/>
       </p:nvGrpSpPr>
-      <p:grpSpPr>
-        <a:xfrm>
-          <a:off x="0" y="0"/>
-          <a:ext cx="0" cy="0"/>
-          <a:chOff x="0" y="0"/>
-          <a:chExt cx="0" cy="0"/>
-        </a:xfrm>
-      </p:grpSpPr>
+      <p:grpSpPr/>
       <p:sp>
         <p:nvSpPr>
           <p:cNvPr id="2" name="Rectangle 1"/>
@@ -11628,7 +11630,6 @@
           <a:lstStyle/>
           <a:p>
             <a:pPr algn="ctr"/>
-            <a:endParaRPr/>
           </a:p>
         </p:txBody>
       </p:sp>
@@ -11670,7 +11671,7 @@
           </a:fontRef>
         </p:style>
         <p:txBody>
-          <a:bodyPr wrap="square" rtlCol="0" anchor="ctr"/>
+          <a:bodyPr rtlCol="0" anchor="ctr" wrap="square"/>
           <a:lstStyle/>
           <a:p>
             <a:pPr algn="ctr">
@@ -11797,7 +11798,7 @@
           </a:fontRef>
         </p:style>
         <p:txBody>
-          <a:bodyPr wrap="square" rtlCol="0" anchor="ctr"/>
+          <a:bodyPr rtlCol="0" anchor="ctr" wrap="square"/>
           <a:lstStyle/>
           <a:p>
             <a:pPr algn="ctr">
@@ -11814,6 +11815,14 @@
           </a:p>
           <a:p>
             <a:br/>
+            <a:pPr>
+              <a:defRPr sz="1200">
+                <a:solidFill>
+                  <a:srgbClr val="1E293B"/>
+                </a:solidFill>
+                <a:latin typeface="Arial"/>
+              </a:defRPr>
+            </a:pPr>
             <a:r>
               <a:t>• Minimizes aggregate vehicle transport distance across the road network.</a:t>
             </a:r>
@@ -11836,7 +11845,7 @@
         </p:nvSpPr>
         <p:spPr>
           <a:xfrm>
-            <a:off x="1036015" y="3163824"/>
+            <a:off x="1005840" y="2514600"/>
             <a:ext cx="4572000" cy="822960"/>
           </a:xfrm>
           <a:prstGeom prst="rect">
@@ -11921,7 +11930,7 @@
           </a:fontRef>
         </p:style>
         <p:txBody>
-          <a:bodyPr wrap="square" rtlCol="0" anchor="ctr"/>
+          <a:bodyPr rtlCol="0" anchor="ctr" wrap="square"/>
           <a:lstStyle/>
           <a:p>
             <a:pPr algn="ctr">
@@ -11933,21 +11942,8 @@
               </a:defRPr>
             </a:pPr>
             <a:r>
-              <a:rPr dirty="0"/>
               <a:t>Inviolable Operational Constraints</a:t>
             </a:r>
-            <a:endParaRPr lang="en-US" dirty="0"/>
-          </a:p>
-          <a:p>
-            <a:pPr algn="ctr">
-              <a:defRPr sz="1600" b="1">
-                <a:solidFill>
-                  <a:srgbClr val="1D4ED8"/>
-                </a:solidFill>
-                <a:latin typeface="Arial"/>
-              </a:defRPr>
-            </a:pPr>
-            <a:endParaRPr dirty="0"/>
           </a:p>
           <a:p>
             <a:pPr>
@@ -11962,26 +11958,10 @@
               </a:defRPr>
             </a:pPr>
             <a:r>
-              <a:rPr dirty="0"/>
-              <a:t>1. Donor Safety Stock Invariant: </a:t>
-            </a:r>
-            <a:r>
-              <a:rPr dirty="0" err="1"/>
-              <a:t>Stock_donor</a:t>
-            </a:r>
-            <a:r>
-              <a:rPr dirty="0"/>
-              <a:t> - Transferred &gt;= </a:t>
-            </a:r>
-            <a:r>
-              <a:rPr dirty="0" err="1"/>
-              <a:t>SafetyStock_donor</a:t>
-            </a:r>
-            <a:br>
-              <a:rPr dirty="0"/>
-            </a:br>
-            <a:r>
-              <a:rPr dirty="0"/>
+              <a:t>1. Donor Safety Stock Invariant: Stock_donor - Transferred &gt;= SafetyStock_donor</a:t>
+            </a:r>
+            <a:br/>
+            <a:r>
               <a:t>   (A donor facility is NEVER left in deficit!).</a:t>
             </a:r>
           </a:p>
@@ -11998,7 +11978,6 @@
               </a:defRPr>
             </a:pPr>
             <a:r>
-              <a:rPr dirty="0"/>
               <a:t>2. Maximum 50 km Road Transit Radius: Guarantees same-day delivery &amp; cold-chain validity.</a:t>
             </a:r>
           </a:p>
@@ -12015,7 +11994,6 @@
               </a:defRPr>
             </a:pPr>
             <a:r>
-              <a:rPr dirty="0"/>
               <a:t>3. Rural Vehicle Capacity Limits: Accounts for cargo bounds of two-wheelers &amp; ambulances.</a:t>
             </a:r>
           </a:p>
@@ -12032,7 +12010,6 @@
               </a:defRPr>
             </a:pPr>
             <a:r>
-              <a:rPr dirty="0"/>
               <a:t>4. Exact Integer Packaging: Transfers discrete medicine pack units without fractional splitting.</a:t>
             </a:r>
           </a:p>
@@ -12076,7 +12053,7 @@
           </a:fontRef>
         </p:style>
         <p:txBody>
-          <a:bodyPr wrap="square" rtlCol="0" anchor="ctr"/>
+          <a:bodyPr rtlCol="0" anchor="ctr" wrap="square"/>
           <a:lstStyle/>
           <a:p>
             <a:pPr algn="ctr">
@@ -12147,7 +12124,7 @@
           </a:fontRef>
         </p:style>
         <p:txBody>
-          <a:bodyPr wrap="square" rtlCol="0" anchor="ctr"/>
+          <a:bodyPr rtlCol="0" anchor="ctr" wrap="square"/>
           <a:lstStyle/>
           <a:p>
             <a:pPr algn="ctr">
@@ -12218,7 +12195,7 @@
           </a:fontRef>
         </p:style>
         <p:txBody>
-          <a:bodyPr wrap="square" rtlCol="0" anchor="ctr"/>
+          <a:bodyPr rtlCol="0" anchor="ctr" wrap="square"/>
           <a:lstStyle/>
           <a:p>
             <a:pPr algn="ctr">
@@ -12289,7 +12266,7 @@
           </a:fontRef>
         </p:style>
         <p:txBody>
-          <a:bodyPr wrap="square" rtlCol="0" anchor="ctr"/>
+          <a:bodyPr rtlCol="0" anchor="ctr" wrap="square"/>
           <a:lstStyle/>
           <a:p>
             <a:pPr algn="ctr">
@@ -12362,7 +12339,42 @@
           <a:lstStyle/>
           <a:p>
             <a:pPr algn="ctr"/>
-            <a:endParaRPr/>
+          </a:p>
+        </p:txBody>
+      </p:sp>
+      <p:sp>
+        <p:nvSpPr>
+          <p:cNvPr id="14" name="TextBox 13"/>
+          <p:cNvSpPr txBox="1"/>
+          <p:nvPr/>
+        </p:nvSpPr>
+        <p:spPr>
+          <a:xfrm>
+            <a:off x="731520" y="6355080"/>
+            <a:ext cx="7315200" cy="320040"/>
+          </a:xfrm>
+          <a:prstGeom prst="rect">
+            <a:avLst/>
+          </a:prstGeom>
+          <a:noFill/>
+        </p:spPr>
+        <p:txBody>
+          <a:bodyPr wrap="none">
+            <a:spAutoFit/>
+          </a:bodyPr>
+          <a:lstStyle/>
+          <a:p>
+            <a:pPr>
+              <a:defRPr sz="950">
+                <a:solidFill>
+                  <a:srgbClr val="94A3B8"/>
+                </a:solidFill>
+                <a:latin typeface="Consolas"/>
+              </a:defRPr>
+            </a:pPr>
+            <a:r>
+              <a:t>SWASTHYAGRID AI • Google Cloud GenAI Hackathon 2026 • Track 3: Smart Health &amp; Resilience</a:t>
+            </a:r>
           </a:p>
         </p:txBody>
       </p:sp>
@@ -12411,7 +12423,7 @@
 </file>
 
 <file path=ppt/slides/slide7.xml><?xml version="1.0" encoding="utf-8"?>
-<p:sld xmlns:a="http://schemas.openxmlformats.org/drawingml/2006/main" xmlns:r="http://schemas.openxmlformats.org/officeDocument/2006/relationships" xmlns:p="http://schemas.openxmlformats.org/presentationml/2006/main">
+<p:sld xmlns:a="http://schemas.openxmlformats.org/drawingml/2006/main" xmlns:p="http://schemas.openxmlformats.org/presentationml/2006/main" xmlns:r="http://schemas.openxmlformats.org/officeDocument/2006/relationships">
   <p:cSld>
     <p:spTree>
       <p:nvGrpSpPr>
@@ -12419,14 +12431,7 @@
         <p:cNvGrpSpPr/>
         <p:nvPr/>
       </p:nvGrpSpPr>
-      <p:grpSpPr>
-        <a:xfrm>
-          <a:off x="0" y="0"/>
-          <a:ext cx="0" cy="0"/>
-          <a:chOff x="0" y="0"/>
-          <a:chExt cx="0" cy="0"/>
-        </a:xfrm>
-      </p:grpSpPr>
+      <p:grpSpPr/>
       <p:sp>
         <p:nvSpPr>
           <p:cNvPr id="2" name="Rectangle 1"/>
@@ -12467,7 +12472,6 @@
           <a:lstStyle/>
           <a:p>
             <a:pPr algn="ctr"/>
-            <a:endParaRPr/>
           </a:p>
         </p:txBody>
       </p:sp>
@@ -12509,7 +12513,7 @@
           </a:fontRef>
         </p:style>
         <p:txBody>
-          <a:bodyPr wrap="square" rtlCol="0" anchor="ctr"/>
+          <a:bodyPr rtlCol="0" anchor="ctr" wrap="square"/>
           <a:lstStyle/>
           <a:p>
             <a:pPr algn="ctr">
@@ -12636,7 +12640,7 @@
           </a:fontRef>
         </p:style>
         <p:txBody>
-          <a:bodyPr wrap="square" rtlCol="0" anchor="ctr"/>
+          <a:bodyPr rtlCol="0" anchor="ctr" wrap="square"/>
           <a:lstStyle/>
           <a:p>
             <a:pPr algn="ctr">
@@ -12648,32 +12652,8 @@
               </a:defRPr>
             </a:pPr>
             <a:r>
-              <a:rPr dirty="0"/>
               <a:t>Grounded Copilot Architecture</a:t>
             </a:r>
-            <a:endParaRPr lang="en-US" dirty="0"/>
-          </a:p>
-          <a:p>
-            <a:pPr algn="ctr">
-              <a:defRPr sz="1600" b="1">
-                <a:solidFill>
-                  <a:srgbClr val="7C3AED"/>
-                </a:solidFill>
-                <a:latin typeface="Arial"/>
-              </a:defRPr>
-            </a:pPr>
-            <a:endParaRPr lang="en-IN" dirty="0"/>
-          </a:p>
-          <a:p>
-            <a:pPr algn="ctr">
-              <a:defRPr sz="1600" b="1">
-                <a:solidFill>
-                  <a:srgbClr val="7C3AED"/>
-                </a:solidFill>
-                <a:latin typeface="Arial"/>
-              </a:defRPr>
-            </a:pPr>
-            <a:endParaRPr dirty="0"/>
           </a:p>
           <a:p>
             <a:pPr>
@@ -12688,32 +12668,7 @@
               </a:defRPr>
             </a:pPr>
             <a:r>
-              <a:rPr sz="1300" dirty="0"/>
-              <a:t>• 10+ Deterministic Tool Bindings: Gemini never guesses inventory numbers. Autonomously calls </a:t>
-            </a:r>
-            <a:r>
-              <a:rPr sz="1300" dirty="0" err="1"/>
-              <a:t>get_facility_status</a:t>
-            </a:r>
-            <a:r>
-              <a:rPr sz="1300" dirty="0"/>
-              <a:t>(), </a:t>
-            </a:r>
-            <a:r>
-              <a:rPr sz="1300" dirty="0" err="1"/>
-              <a:t>calculate_stock_risk</a:t>
-            </a:r>
-            <a:r>
-              <a:rPr sz="1300" dirty="0"/>
-              <a:t>(), and </a:t>
-            </a:r>
-            <a:r>
-              <a:rPr sz="1300" dirty="0" err="1"/>
-              <a:t>run_redistribution_solver</a:t>
-            </a:r>
-            <a:r>
-              <a:rPr sz="1300" dirty="0"/>
-              <a:t>().</a:t>
+              <a:t>• 10+ Deterministic Tool Bindings: Gemini never guesses inventory numbers. Autonomously calls get_facility_status(), calculate_stock_risk(), and run_redistribution_solver().</a:t>
             </a:r>
           </a:p>
           <a:p>
@@ -12729,7 +12684,6 @@
               </a:defRPr>
             </a:pPr>
             <a:r>
-              <a:rPr sz="1300" dirty="0"/>
               <a:t>• 1-Click Evidence Drawer: Displays raw database queries, timestamps, and tool logs for complete legal &amp; medical auditability.</a:t>
             </a:r>
           </a:p>
@@ -12746,64 +12700,7 @@
               </a:defRPr>
             </a:pPr>
             <a:r>
-              <a:rPr sz="1300" dirty="0"/>
-              <a:t>• Bilingual Voice &amp; Text: Natural Hindi and English conversation for rural health workers (e.g. '</a:t>
-            </a:r>
-            <a:r>
-              <a:rPr sz="1300" dirty="0" err="1"/>
-              <a:t>कौन</a:t>
-            </a:r>
-            <a:r>
-              <a:rPr sz="1300" dirty="0"/>
-              <a:t> </a:t>
-            </a:r>
-            <a:r>
-              <a:rPr sz="1300" dirty="0" err="1"/>
-              <a:t>सा</a:t>
-            </a:r>
-            <a:r>
-              <a:rPr sz="1300" dirty="0"/>
-              <a:t> </a:t>
-            </a:r>
-            <a:r>
-              <a:rPr sz="1300" dirty="0" err="1"/>
-              <a:t>केंद्र</a:t>
-            </a:r>
-            <a:r>
-              <a:rPr sz="1300" dirty="0"/>
-              <a:t> </a:t>
-            </a:r>
-            <a:r>
-              <a:rPr sz="1300" dirty="0" err="1"/>
-              <a:t>पैरासिटामोल</a:t>
-            </a:r>
-            <a:r>
-              <a:rPr sz="1300" dirty="0"/>
-              <a:t> </a:t>
-            </a:r>
-            <a:r>
-              <a:rPr sz="1300" dirty="0" err="1"/>
-              <a:t>भेज</a:t>
-            </a:r>
-            <a:r>
-              <a:rPr sz="1300" dirty="0"/>
-              <a:t> </a:t>
-            </a:r>
-            <a:r>
-              <a:rPr sz="1300" dirty="0" err="1"/>
-              <a:t>सकता</a:t>
-            </a:r>
-            <a:r>
-              <a:rPr sz="1300" dirty="0"/>
-              <a:t> </a:t>
-            </a:r>
-            <a:r>
-              <a:rPr sz="1300" dirty="0" err="1"/>
-              <a:t>है</a:t>
-            </a:r>
-            <a:r>
-              <a:rPr sz="1300" dirty="0"/>
-              <a:t>?').</a:t>
+              <a:t>• Bilingual Voice &amp; Text: Natural Hindi and English conversation for rural health workers (e.g. 'कौन सा केंद्र पैरासिटामोल भेज सकता है?').</a:t>
             </a:r>
           </a:p>
           <a:p>
@@ -12819,7 +12716,6 @@
               </a:defRPr>
             </a:pPr>
             <a:r>
-              <a:rPr sz="1300" dirty="0"/>
               <a:t>• What-If Policy Sandbox: Enables health directors to simulate demand spikes (+30%) and road delays before approving actual logistics orders.</a:t>
             </a:r>
           </a:p>
@@ -12863,7 +12759,7 @@
           </a:fontRef>
         </p:style>
         <p:txBody>
-          <a:bodyPr wrap="square" rtlCol="0" anchor="ctr"/>
+          <a:bodyPr rtlCol="0" anchor="ctr" wrap="square"/>
           <a:lstStyle/>
           <a:p>
             <a:pPr algn="ctr">
@@ -12888,7 +12784,7 @@
         </p:nvSpPr>
         <p:spPr>
           <a:xfrm>
-            <a:off x="6613855" y="2249424"/>
+            <a:off x="6613855" y="2560320"/>
             <a:ext cx="4572000" cy="731520"/>
           </a:xfrm>
           <a:prstGeom prst="roundRect">
@@ -12916,7 +12812,7 @@
           </a:fontRef>
         </p:style>
         <p:txBody>
-          <a:bodyPr wrap="square" rtlCol="0" anchor="ctr"/>
+          <a:bodyPr rtlCol="0" anchor="ctr" wrap="square"/>
           <a:lstStyle/>
           <a:p>
             <a:pPr algn="ctr">
@@ -12928,16 +12824,7 @@
               </a:defRPr>
             </a:pPr>
             <a:r>
-              <a:rPr dirty="0"/>
-              <a:t>Why is PHC </a:t>
-            </a:r>
-            <a:r>
-              <a:rPr dirty="0" err="1"/>
-              <a:t>Bakhtiyarpur</a:t>
-            </a:r>
-            <a:r>
-              <a:rPr dirty="0"/>
-              <a:t> flagged at CRITICAL risk for Paracetamol?</a:t>
+              <a:t>Why is PHC Bakhtiyarpur flagged at CRITICAL risk for Paracetamol?</a:t>
             </a:r>
           </a:p>
         </p:txBody>
@@ -12950,7 +12837,7 @@
         </p:nvSpPr>
         <p:spPr>
           <a:xfrm>
-            <a:off x="6613855" y="3337560"/>
+            <a:off x="6613855" y="3474720"/>
             <a:ext cx="4572000" cy="2286000"/>
           </a:xfrm>
           <a:prstGeom prst="roundRect">
@@ -12980,7 +12867,7 @@
           </a:fontRef>
         </p:style>
         <p:txBody>
-          <a:bodyPr wrap="square" rtlCol="0" anchor="ctr"/>
+          <a:bodyPr rtlCol="0" anchor="ctr" wrap="square"/>
           <a:lstStyle/>
           <a:p>
             <a:pPr algn="ctr">
@@ -12992,16 +12879,7 @@
               </a:defRPr>
             </a:pPr>
             <a:r>
-              <a:rPr dirty="0"/>
-              <a:t>PHC </a:t>
-            </a:r>
-            <a:r>
-              <a:rPr dirty="0" err="1"/>
-              <a:t>Bakhtiyarpur</a:t>
-            </a:r>
-            <a:r>
-              <a:rPr dirty="0"/>
-              <a:t> (PHC-BR-PAT-001) current stock is 320 packs against a predicted daily consumption of 169 packs/day (DOSA = 1.89 days). Complete stockout projected in 45 hours.</a:t>
+              <a:t>PHC Bakhtiyarpur (PHC-BR-PAT-001) current stock is 320 packs against a predicted daily consumption of 169 packs/day (DOSA = 1.89 days). Complete stockout projected in 45 hours.</a:t>
             </a:r>
           </a:p>
           <a:p>
@@ -13017,16 +12895,7 @@
               </a:defRPr>
             </a:pPr>
             <a:r>
-              <a:rPr sz="1100" dirty="0"/>
-              <a:t>🛡️ Verified Evidence: </a:t>
-            </a:r>
-            <a:r>
-              <a:rPr sz="1100" dirty="0" err="1"/>
-              <a:t>inventory_telemetry</a:t>
-            </a:r>
-            <a:r>
-              <a:rPr sz="1100" dirty="0"/>
-              <a:t> • risk_engine_v1</a:t>
+              <a:t>🛡️ Verified Evidence: inventory_telemetry • risk_engine_v1</a:t>
             </a:r>
           </a:p>
           <a:p>
@@ -13042,16 +12911,7 @@
               </a:defRPr>
             </a:pPr>
             <a:r>
-              <a:rPr dirty="0"/>
-              <a:t>Recommendation: Google OR-Tools recommends transferring 600 units from PHC </a:t>
-            </a:r>
-            <a:r>
-              <a:rPr dirty="0" err="1"/>
-              <a:t>Danapur</a:t>
-            </a:r>
-            <a:r>
-              <a:rPr dirty="0"/>
-              <a:t> (18.4 km away), which holds 3,500 surplus packs. Click 'Approve Order' to dispatch.</a:t>
+              <a:t>Recommendation: Google OR-Tools recommends transferring 600 units from PHC Danapur (18.4 km away), which holds 3,500 surplus packs. Click 'Approve Order' to dispatch.</a:t>
             </a:r>
           </a:p>
         </p:txBody>
@@ -13096,7 +12956,42 @@
           <a:lstStyle/>
           <a:p>
             <a:pPr algn="ctr"/>
-            <a:endParaRPr/>
+          </a:p>
+        </p:txBody>
+      </p:sp>
+      <p:sp>
+        <p:nvSpPr>
+          <p:cNvPr id="11" name="TextBox 10"/>
+          <p:cNvSpPr txBox="1"/>
+          <p:nvPr/>
+        </p:nvSpPr>
+        <p:spPr>
+          <a:xfrm>
+            <a:off x="731520" y="6355080"/>
+            <a:ext cx="7315200" cy="320040"/>
+          </a:xfrm>
+          <a:prstGeom prst="rect">
+            <a:avLst/>
+          </a:prstGeom>
+          <a:noFill/>
+        </p:spPr>
+        <p:txBody>
+          <a:bodyPr wrap="none">
+            <a:spAutoFit/>
+          </a:bodyPr>
+          <a:lstStyle/>
+          <a:p>
+            <a:pPr>
+              <a:defRPr sz="950">
+                <a:solidFill>
+                  <a:srgbClr val="94A3B8"/>
+                </a:solidFill>
+                <a:latin typeface="Consolas"/>
+              </a:defRPr>
+            </a:pPr>
+            <a:r>
+              <a:t>SWASTHYAGRID AI • Google Cloud GenAI Hackathon 2026 • Track 3: Smart Health &amp; Resilience</a:t>
+            </a:r>
           </a:p>
         </p:txBody>
       </p:sp>
@@ -13145,7 +13040,7 @@
 </file>
 
 <file path=ppt/slides/slide8.xml><?xml version="1.0" encoding="utf-8"?>
-<p:sld xmlns:a="http://schemas.openxmlformats.org/drawingml/2006/main" xmlns:r="http://schemas.openxmlformats.org/officeDocument/2006/relationships" xmlns:p="http://schemas.openxmlformats.org/presentationml/2006/main">
+<p:sld xmlns:a="http://schemas.openxmlformats.org/drawingml/2006/main" xmlns:p="http://schemas.openxmlformats.org/presentationml/2006/main" xmlns:r="http://schemas.openxmlformats.org/officeDocument/2006/relationships">
   <p:cSld>
     <p:spTree>
       <p:nvGrpSpPr>
@@ -13153,14 +13048,7 @@
         <p:cNvGrpSpPr/>
         <p:nvPr/>
       </p:nvGrpSpPr>
-      <p:grpSpPr>
-        <a:xfrm>
-          <a:off x="0" y="0"/>
-          <a:ext cx="0" cy="0"/>
-          <a:chOff x="0" y="0"/>
-          <a:chExt cx="0" cy="0"/>
-        </a:xfrm>
-      </p:grpSpPr>
+      <p:grpSpPr/>
       <p:sp>
         <p:nvSpPr>
           <p:cNvPr id="2" name="Rectangle 1"/>
@@ -13201,7 +13089,6 @@
           <a:lstStyle/>
           <a:p>
             <a:pPr algn="ctr"/>
-            <a:endParaRPr/>
           </a:p>
         </p:txBody>
       </p:sp>
@@ -13243,7 +13130,7 @@
           </a:fontRef>
         </p:style>
         <p:txBody>
-          <a:bodyPr wrap="square" rtlCol="0" anchor="ctr"/>
+          <a:bodyPr rtlCol="0" anchor="ctr" wrap="square"/>
           <a:lstStyle/>
           <a:p>
             <a:pPr algn="ctr">
@@ -13370,7 +13257,7 @@
           </a:fontRef>
         </p:style>
         <p:txBody>
-          <a:bodyPr wrap="square" rtlCol="0" anchor="ctr"/>
+          <a:bodyPr rtlCol="0" anchor="ctr" wrap="square"/>
           <a:lstStyle/>
           <a:p>
             <a:pPr algn="ctr">
@@ -13385,46 +13272,8 @@
               </a:defRPr>
             </a:pPr>
             <a:r>
-              <a:rPr dirty="0"/>
-              <a:t>1. THE CRISIS SHOCK (PHC </a:t>
-            </a:r>
-            <a:r>
-              <a:rPr dirty="0" err="1"/>
-              <a:t>Bakhtiyarpur</a:t>
-            </a:r>
-            <a:r>
-              <a:rPr dirty="0"/>
-              <a:t>)</a:t>
-            </a:r>
-            <a:endParaRPr lang="en-US" dirty="0"/>
-          </a:p>
-          <a:p>
-            <a:pPr algn="ctr">
-              <a:spcBef>
-                <a:spcPts val="800"/>
-              </a:spcBef>
-              <a:defRPr sz="1600" b="1">
-                <a:solidFill>
-                  <a:srgbClr val="DC2626"/>
-                </a:solidFill>
-                <a:latin typeface="Arial"/>
-              </a:defRPr>
-            </a:pPr>
-            <a:endParaRPr lang="en-IN" dirty="0"/>
-          </a:p>
-          <a:p>
-            <a:pPr algn="ctr">
-              <a:spcBef>
-                <a:spcPts val="800"/>
-              </a:spcBef>
-              <a:defRPr sz="1600" b="1">
-                <a:solidFill>
-                  <a:srgbClr val="DC2626"/>
-                </a:solidFill>
-                <a:latin typeface="Arial"/>
-              </a:defRPr>
-            </a:pPr>
-            <a:endParaRPr dirty="0"/>
+              <a:t>1. THE CRISIS SHOCK (PHC Bakhtiyarpur)</a:t>
+            </a:r>
           </a:p>
           <a:p>
             <a:pPr>
@@ -13439,7 +13288,6 @@
               </a:defRPr>
             </a:pPr>
             <a:r>
-              <a:rPr dirty="0"/>
               <a:t>• Severe Monsoon Flood in Patna triggers sudden outbreak of acute fever and diarrhea.</a:t>
             </a:r>
           </a:p>
@@ -13456,7 +13304,6 @@
               </a:defRPr>
             </a:pPr>
             <a:r>
-              <a:rPr dirty="0"/>
               <a:t>• Outpatient OPD footfall quadruples (+320%). Daily demand jumps from 169 to 710 packs/day.</a:t>
             </a:r>
           </a:p>
@@ -13473,7 +13320,6 @@
               </a:defRPr>
             </a:pPr>
             <a:r>
-              <a:rPr dirty="0"/>
               <a:t>• Days of Stock Available (DOSA) drops from 7.68 days down to 1.83 Days (CRITICAL RED).</a:t>
             </a:r>
           </a:p>
@@ -13490,7 +13336,6 @@
               </a:defRPr>
             </a:pPr>
             <a:r>
-              <a:rPr dirty="0"/>
               <a:t>• Complete Stockout Imminent: Shelves will empty in 44 hours without immediate replenishment.</a:t>
             </a:r>
           </a:p>
@@ -13507,7 +13352,6 @@
               </a:defRPr>
             </a:pPr>
             <a:r>
-              <a:rPr dirty="0"/>
               <a:t>• Traditional Response: Bureaucratic requisition paperwork takes 5 to 7 days—guaranteeing stockout.</a:t>
             </a:r>
           </a:p>
@@ -13521,7 +13365,7 @@
         </p:nvSpPr>
         <p:spPr>
           <a:xfrm>
-            <a:off x="731520" y="1904610"/>
+            <a:off x="731520" y="1920240"/>
             <a:ext cx="5120640" cy="73152"/>
           </a:xfrm>
           <a:prstGeom prst="rect">
@@ -13553,7 +13397,6 @@
           <a:lstStyle/>
           <a:p>
             <a:pPr algn="ctr"/>
-            <a:endParaRPr/>
           </a:p>
         </p:txBody>
       </p:sp>
@@ -13595,7 +13438,7 @@
           </a:fontRef>
         </p:style>
         <p:txBody>
-          <a:bodyPr wrap="square" rtlCol="0" anchor="ctr"/>
+          <a:bodyPr rtlCol="0" anchor="ctr" wrap="square"/>
           <a:lstStyle/>
           <a:p>
             <a:pPr algn="ctr">
@@ -13610,46 +13453,8 @@
               </a:defRPr>
             </a:pPr>
             <a:r>
-              <a:rPr dirty="0"/>
-              <a:t>2. SWASTHYAGRID RESOLUTION (38 </a:t>
-            </a:r>
-            <a:r>
-              <a:rPr dirty="0" err="1"/>
-              <a:t>ms</a:t>
-            </a:r>
-            <a:r>
-              <a:rPr dirty="0"/>
-              <a:t>)</a:t>
-            </a:r>
-            <a:endParaRPr lang="en-US" dirty="0"/>
-          </a:p>
-          <a:p>
-            <a:pPr algn="ctr">
-              <a:spcBef>
-                <a:spcPts val="800"/>
-              </a:spcBef>
-              <a:defRPr sz="1600" b="1">
-                <a:solidFill>
-                  <a:srgbClr val="059669"/>
-                </a:solidFill>
-                <a:latin typeface="Arial"/>
-              </a:defRPr>
-            </a:pPr>
-            <a:endParaRPr lang="en-IN" dirty="0"/>
-          </a:p>
-          <a:p>
-            <a:pPr algn="ctr">
-              <a:spcBef>
-                <a:spcPts val="800"/>
-              </a:spcBef>
-              <a:defRPr sz="1600" b="1">
-                <a:solidFill>
-                  <a:srgbClr val="059669"/>
-                </a:solidFill>
-                <a:latin typeface="Arial"/>
-              </a:defRPr>
-            </a:pPr>
-            <a:endParaRPr dirty="0"/>
+              <a:t>2. SWASTHYAGRID RESOLUTION (38 ms)</a:t>
+            </a:r>
           </a:p>
           <a:p>
             <a:pPr>
@@ -13664,7 +13469,6 @@
               </a:defRPr>
             </a:pPr>
             <a:r>
-              <a:rPr dirty="0"/>
               <a:t>• Autonomous Detection: Risk Engine automatically raises CRITICAL alert 72 hours early.</a:t>
             </a:r>
           </a:p>
@@ -13681,7 +13485,6 @@
               </a:defRPr>
             </a:pPr>
             <a:r>
-              <a:rPr dirty="0"/>
               <a:t>• Google OR-Tools MILP Solver: Computes optimal multi-facility transfer matrix in 38 milliseconds.</a:t>
             </a:r>
           </a:p>
@@ -13698,16 +13501,7 @@
               </a:defRPr>
             </a:pPr>
             <a:r>
-              <a:rPr dirty="0"/>
-              <a:t>• Optimal Donor Paired: PHC </a:t>
-            </a:r>
-            <a:r>
-              <a:rPr dirty="0" err="1"/>
-              <a:t>Danapur</a:t>
-            </a:r>
-            <a:r>
-              <a:rPr dirty="0"/>
-              <a:t> (18.4 km away via NH31) has 3,500 packs of surplus inventory.</a:t>
+              <a:t>• Optimal Donor Paired: PHC Danapur (18.4 km away via NH31) has 3,500 packs of surplus inventory.</a:t>
             </a:r>
           </a:p>
           <a:p>
@@ -13723,16 +13517,7 @@
               </a:defRPr>
             </a:pPr>
             <a:r>
-              <a:rPr dirty="0"/>
-              <a:t>• Safety Invariant Respected: </a:t>
-            </a:r>
-            <a:r>
-              <a:rPr dirty="0" err="1"/>
-              <a:t>Danapur</a:t>
-            </a:r>
-            <a:r>
-              <a:rPr dirty="0"/>
-              <a:t> retains 2,900 packs (&gt; 7-day reserve buffer maintained).</a:t>
+              <a:t>• Safety Invariant Respected: Danapur retains 2,900 packs (&gt; 7-day reserve buffer maintained).</a:t>
             </a:r>
           </a:p>
           <a:p>
@@ -13748,16 +13533,7 @@
               </a:defRPr>
             </a:pPr>
             <a:r>
-              <a:rPr dirty="0"/>
-              <a:t>• Outcome: 600 packs dispatched immediately. </a:t>
-            </a:r>
-            <a:r>
-              <a:rPr dirty="0" err="1"/>
-              <a:t>Bakhtiyarpur</a:t>
-            </a:r>
-            <a:r>
-              <a:rPr dirty="0"/>
-              <a:t> DOSA restored to 8.21 Days (Zero Deficit!).</a:t>
+              <a:t>• Outcome: 600 packs dispatched immediately. Bakhtiyarpur DOSA restored to 8.21 Days (Zero Deficit!).</a:t>
             </a:r>
           </a:p>
         </p:txBody>
@@ -13770,7 +13546,7 @@
         </p:nvSpPr>
         <p:spPr>
           <a:xfrm>
-            <a:off x="6339535" y="1904610"/>
+            <a:off x="6339535" y="1920240"/>
             <a:ext cx="5120640" cy="73152"/>
           </a:xfrm>
           <a:prstGeom prst="rect">
@@ -13802,7 +13578,6 @@
           <a:lstStyle/>
           <a:p>
             <a:pPr algn="ctr"/>
-            <a:endParaRPr/>
           </a:p>
         </p:txBody>
       </p:sp>
@@ -13846,7 +13621,42 @@
           <a:lstStyle/>
           <a:p>
             <a:pPr algn="ctr"/>
-            <a:endParaRPr/>
+          </a:p>
+        </p:txBody>
+      </p:sp>
+      <p:sp>
+        <p:nvSpPr>
+          <p:cNvPr id="11" name="TextBox 10"/>
+          <p:cNvSpPr txBox="1"/>
+          <p:nvPr/>
+        </p:nvSpPr>
+        <p:spPr>
+          <a:xfrm>
+            <a:off x="731520" y="6355080"/>
+            <a:ext cx="7315200" cy="320040"/>
+          </a:xfrm>
+          <a:prstGeom prst="rect">
+            <a:avLst/>
+          </a:prstGeom>
+          <a:noFill/>
+        </p:spPr>
+        <p:txBody>
+          <a:bodyPr wrap="none">
+            <a:spAutoFit/>
+          </a:bodyPr>
+          <a:lstStyle/>
+          <a:p>
+            <a:pPr>
+              <a:defRPr sz="950">
+                <a:solidFill>
+                  <a:srgbClr val="94A3B8"/>
+                </a:solidFill>
+                <a:latin typeface="Consolas"/>
+              </a:defRPr>
+            </a:pPr>
+            <a:r>
+              <a:t>SWASTHYAGRID AI • Google Cloud GenAI Hackathon 2026 • Track 3: Smart Health &amp; Resilience</a:t>
+            </a:r>
           </a:p>
         </p:txBody>
       </p:sp>
@@ -13895,7 +13705,7 @@
 </file>
 
 <file path=ppt/slides/slide9.xml><?xml version="1.0" encoding="utf-8"?>
-<p:sld xmlns:a="http://schemas.openxmlformats.org/drawingml/2006/main" xmlns:r="http://schemas.openxmlformats.org/officeDocument/2006/relationships" xmlns:p="http://schemas.openxmlformats.org/presentationml/2006/main">
+<p:sld xmlns:a="http://schemas.openxmlformats.org/drawingml/2006/main" xmlns:p="http://schemas.openxmlformats.org/presentationml/2006/main" xmlns:r="http://schemas.openxmlformats.org/officeDocument/2006/relationships">
   <p:cSld>
     <p:spTree>
       <p:nvGrpSpPr>
@@ -13903,14 +13713,7 @@
         <p:cNvGrpSpPr/>
         <p:nvPr/>
       </p:nvGrpSpPr>
-      <p:grpSpPr>
-        <a:xfrm>
-          <a:off x="0" y="0"/>
-          <a:ext cx="0" cy="0"/>
-          <a:chOff x="0" y="0"/>
-          <a:chExt cx="0" cy="0"/>
-        </a:xfrm>
-      </p:grpSpPr>
+      <p:grpSpPr/>
       <p:sp>
         <p:nvSpPr>
           <p:cNvPr id="2" name="Rectangle 1"/>
@@ -13951,7 +13754,6 @@
           <a:lstStyle/>
           <a:p>
             <a:pPr algn="ctr"/>
-            <a:endParaRPr/>
           </a:p>
         </p:txBody>
       </p:sp>
@@ -13993,7 +13795,7 @@
           </a:fontRef>
         </p:style>
         <p:txBody>
-          <a:bodyPr wrap="square" rtlCol="0" anchor="ctr"/>
+          <a:bodyPr rtlCol="0" anchor="ctr" wrap="square"/>
           <a:lstStyle/>
           <a:p>
             <a:pPr algn="ctr">
@@ -14120,7 +13922,7 @@
           </a:fontRef>
         </p:style>
         <p:txBody>
-          <a:bodyPr wrap="square" rtlCol="0" anchor="ctr"/>
+          <a:bodyPr rtlCol="0" anchor="ctr" wrap="square"/>
           <a:lstStyle/>
           <a:p>
             <a:pPr algn="ctr">
@@ -14135,24 +13937,8 @@
               </a:defRPr>
             </a:pPr>
             <a:r>
-              <a:rPr dirty="0"/>
               <a:t>CLIENT &amp; GATEWAY</a:t>
             </a:r>
-            <a:endParaRPr lang="en-US" dirty="0"/>
-          </a:p>
-          <a:p>
-            <a:pPr algn="ctr">
-              <a:spcBef>
-                <a:spcPts val="1200"/>
-              </a:spcBef>
-              <a:defRPr sz="1500" b="1">
-                <a:solidFill>
-                  <a:srgbClr val="2563EB"/>
-                </a:solidFill>
-                <a:latin typeface="Arial"/>
-              </a:defRPr>
-            </a:pPr>
-            <a:endParaRPr dirty="0"/>
           </a:p>
           <a:p>
             <a:pPr>
@@ -14167,7 +13953,6 @@
               </a:defRPr>
             </a:pPr>
             <a:r>
-              <a:rPr dirty="0"/>
               <a:t>•  React 19 + TypeScript + Leaflet GIS</a:t>
             </a:r>
           </a:p>
@@ -14184,16 +13969,7 @@
               </a:defRPr>
             </a:pPr>
             <a:r>
-              <a:rPr dirty="0"/>
-              <a:t>•  </a:t>
-            </a:r>
-            <a:r>
-              <a:rPr dirty="0" err="1"/>
-              <a:t>FastAPI</a:t>
-            </a:r>
-            <a:r>
-              <a:rPr dirty="0"/>
-              <a:t> Gateway on Google Cloud Run</a:t>
+              <a:t>•  FastAPI Gateway on Google Cloud Run</a:t>
             </a:r>
           </a:p>
           <a:p>
@@ -14209,7 +13985,6 @@
               </a:defRPr>
             </a:pPr>
             <a:r>
-              <a:rPr dirty="0"/>
               <a:t>•  Role-Based Access Control (RBAC)</a:t>
             </a:r>
           </a:p>
@@ -14226,7 +14001,6 @@
               </a:defRPr>
             </a:pPr>
             <a:r>
-              <a:rPr dirty="0"/>
               <a:t>•  Stateless, auto-scaling container</a:t>
             </a:r>
           </a:p>
@@ -14240,7 +14014,7 @@
         </p:nvSpPr>
         <p:spPr>
           <a:xfrm>
-            <a:off x="731520" y="1904610"/>
+            <a:off x="731520" y="1920240"/>
             <a:ext cx="3383280" cy="73152"/>
           </a:xfrm>
           <a:prstGeom prst="rect">
@@ -14272,7 +14046,6 @@
           <a:lstStyle/>
           <a:p>
             <a:pPr algn="ctr"/>
-            <a:endParaRPr/>
           </a:p>
         </p:txBody>
       </p:sp>
@@ -14314,7 +14087,7 @@
           </a:fontRef>
         </p:style>
         <p:txBody>
-          <a:bodyPr wrap="square" rtlCol="0" anchor="ctr"/>
+          <a:bodyPr rtlCol="0" anchor="ctr" wrap="square"/>
           <a:lstStyle/>
           <a:p>
             <a:pPr algn="ctr">
@@ -14329,24 +14102,8 @@
               </a:defRPr>
             </a:pPr>
             <a:r>
-              <a:rPr dirty="0"/>
               <a:t>AI &amp; OPTIMIZATION</a:t>
             </a:r>
-            <a:endParaRPr lang="en-US" dirty="0"/>
-          </a:p>
-          <a:p>
-            <a:pPr algn="ctr">
-              <a:spcBef>
-                <a:spcPts val="1200"/>
-              </a:spcBef>
-              <a:defRPr sz="1500" b="1">
-                <a:solidFill>
-                  <a:srgbClr val="7C3AED"/>
-                </a:solidFill>
-                <a:latin typeface="Arial"/>
-              </a:defRPr>
-            </a:pPr>
-            <a:endParaRPr dirty="0"/>
           </a:p>
           <a:p>
             <a:pPr>
@@ -14361,7 +14118,6 @@
               </a:defRPr>
             </a:pPr>
             <a:r>
-              <a:rPr dirty="0"/>
               <a:t>•  Vertex AI / Gemini 2.5 Flash Copilot</a:t>
             </a:r>
           </a:p>
@@ -14378,7 +14134,6 @@
               </a:defRPr>
             </a:pPr>
             <a:r>
-              <a:rPr dirty="0"/>
               <a:t>•  Google OR-Tools (MILP Rebalancing)</a:t>
             </a:r>
           </a:p>
@@ -14395,16 +14150,7 @@
               </a:defRPr>
             </a:pPr>
             <a:r>
-              <a:rPr dirty="0"/>
-              <a:t>•  Ridge / </a:t>
-            </a:r>
-            <a:r>
-              <a:rPr dirty="0" err="1"/>
-              <a:t>LightGBM</a:t>
-            </a:r>
-            <a:r>
-              <a:rPr dirty="0"/>
-              <a:t> Predictive Regressors</a:t>
+              <a:t>•  Ridge / LightGBM Predictive Regressors</a:t>
             </a:r>
           </a:p>
           <a:p>
@@ -14420,7 +14166,6 @@
               </a:defRPr>
             </a:pPr>
             <a:r>
-              <a:rPr dirty="0"/>
               <a:t>•  Quantile p10/p50/p90 intervals</a:t>
             </a:r>
           </a:p>
@@ -14434,7 +14179,7 @@
         </p:nvSpPr>
         <p:spPr>
           <a:xfrm>
-            <a:off x="4389120" y="1904610"/>
+            <a:off x="4389120" y="1920240"/>
             <a:ext cx="3383280" cy="73152"/>
           </a:xfrm>
           <a:prstGeom prst="rect">
@@ -14466,7 +14211,6 @@
           <a:lstStyle/>
           <a:p>
             <a:pPr algn="ctr"/>
-            <a:endParaRPr/>
           </a:p>
         </p:txBody>
       </p:sp>
@@ -14508,7 +14252,7 @@
           </a:fontRef>
         </p:style>
         <p:txBody>
-          <a:bodyPr wrap="square" rtlCol="0" anchor="ctr"/>
+          <a:bodyPr rtlCol="0" anchor="ctr" wrap="square"/>
           <a:lstStyle/>
           <a:p>
             <a:pPr algn="ctr">
@@ -14523,24 +14267,8 @@
               </a:defRPr>
             </a:pPr>
             <a:r>
-              <a:rPr dirty="0"/>
               <a:t>DATA WAREHOUSE &amp; PROVENANCE</a:t>
             </a:r>
-            <a:endParaRPr lang="en-US" dirty="0"/>
-          </a:p>
-          <a:p>
-            <a:pPr algn="ctr">
-              <a:spcBef>
-                <a:spcPts val="1200"/>
-              </a:spcBef>
-              <a:defRPr sz="1500" b="1">
-                <a:solidFill>
-                  <a:srgbClr val="059669"/>
-                </a:solidFill>
-                <a:latin typeface="Arial"/>
-              </a:defRPr>
-            </a:pPr>
-            <a:endParaRPr dirty="0"/>
           </a:p>
           <a:p>
             <a:pPr>
@@ -14555,24 +14283,7 @@
               </a:defRPr>
             </a:pPr>
             <a:r>
-              <a:rPr dirty="0"/>
-              <a:t>•  Google </a:t>
-            </a:r>
-            <a:r>
-              <a:rPr dirty="0" err="1"/>
-              <a:t>BigQuery</a:t>
-            </a:r>
-            <a:r>
-              <a:rPr dirty="0"/>
-              <a:t> (</a:t>
-            </a:r>
-            <a:r>
-              <a:rPr dirty="0" err="1"/>
-              <a:t>arcadeaiagent.swasthyagrid</a:t>
-            </a:r>
-            <a:r>
-              <a:rPr dirty="0"/>
-              <a:t>)</a:t>
+              <a:t>•  Google BigQuery (arcadeaiagent.swasthyagrid)</a:t>
             </a:r>
           </a:p>
           <a:p>
@@ -14588,16 +14299,7 @@
               </a:defRPr>
             </a:pPr>
             <a:r>
-              <a:rPr dirty="0"/>
-              <a:t>•  </a:t>
-            </a:r>
-            <a:r>
-              <a:rPr dirty="0" err="1"/>
-              <a:t>MoHFW</a:t>
-            </a:r>
-            <a:r>
-              <a:rPr dirty="0"/>
-              <a:t> Rural Health Statistics (RHS 2022)</a:t>
+              <a:t>•  MoHFW Rural Health Statistics (RHS 2022)</a:t>
             </a:r>
           </a:p>
           <a:p>
@@ -14613,7 +14315,6 @@
               </a:defRPr>
             </a:pPr>
             <a:r>
-              <a:rPr dirty="0"/>
               <a:t>•  Health Management Info System (HMIS)</a:t>
             </a:r>
           </a:p>
@@ -14630,7 +14331,6 @@
               </a:defRPr>
             </a:pPr>
             <a:r>
-              <a:rPr dirty="0"/>
               <a:t>•  National List of Essential Medicines (NLEM)</a:t>
             </a:r>
           </a:p>
@@ -14644,7 +14344,7 @@
         </p:nvSpPr>
         <p:spPr>
           <a:xfrm>
-            <a:off x="8046720" y="1904610"/>
+            <a:off x="8046720" y="1920240"/>
             <a:ext cx="3383280" cy="73152"/>
           </a:xfrm>
           <a:prstGeom prst="rect">
@@ -14676,7 +14376,6 @@
           <a:lstStyle/>
           <a:p>
             <a:pPr algn="ctr"/>
-            <a:endParaRPr/>
           </a:p>
         </p:txBody>
       </p:sp>
@@ -14720,7 +14419,42 @@
           <a:lstStyle/>
           <a:p>
             <a:pPr algn="ctr"/>
-            <a:endParaRPr/>
+          </a:p>
+        </p:txBody>
+      </p:sp>
+      <p:sp>
+        <p:nvSpPr>
+          <p:cNvPr id="13" name="TextBox 12"/>
+          <p:cNvSpPr txBox="1"/>
+          <p:nvPr/>
+        </p:nvSpPr>
+        <p:spPr>
+          <a:xfrm>
+            <a:off x="731520" y="6355080"/>
+            <a:ext cx="7315200" cy="320040"/>
+          </a:xfrm>
+          <a:prstGeom prst="rect">
+            <a:avLst/>
+          </a:prstGeom>
+          <a:noFill/>
+        </p:spPr>
+        <p:txBody>
+          <a:bodyPr wrap="none">
+            <a:spAutoFit/>
+          </a:bodyPr>
+          <a:lstStyle/>
+          <a:p>
+            <a:pPr>
+              <a:defRPr sz="950">
+                <a:solidFill>
+                  <a:srgbClr val="94A3B8"/>
+                </a:solidFill>
+                <a:latin typeface="Consolas"/>
+              </a:defRPr>
+            </a:pPr>
+            <a:r>
+              <a:t>SWASTHYAGRID AI • Google Cloud GenAI Hackathon 2026 • Track 3: Smart Health &amp; Resilience</a:t>
+            </a:r>
           </a:p>
         </p:txBody>
       </p:sp>
@@ -15099,44 +14833,44 @@
         <a:sysClr val="window" lastClr="FFFFFF"/>
       </a:lt1>
       <a:dk2>
-        <a:srgbClr val="0E2841"/>
+        <a:srgbClr val="1F497D"/>
       </a:dk2>
       <a:lt2>
-        <a:srgbClr val="E8E8E8"/>
+        <a:srgbClr val="EEECE1"/>
       </a:lt2>
       <a:accent1>
-        <a:srgbClr val="156082"/>
+        <a:srgbClr val="4F81BD"/>
       </a:accent1>
       <a:accent2>
-        <a:srgbClr val="E97132"/>
+        <a:srgbClr val="C0504D"/>
       </a:accent2>
       <a:accent3>
-        <a:srgbClr val="196B24"/>
+        <a:srgbClr val="9BBB59"/>
       </a:accent3>
       <a:accent4>
-        <a:srgbClr val="0F9ED5"/>
+        <a:srgbClr val="8064A2"/>
       </a:accent4>
       <a:accent5>
-        <a:srgbClr val="A02B93"/>
+        <a:srgbClr val="4BACC6"/>
       </a:accent5>
       <a:accent6>
-        <a:srgbClr val="4EA72E"/>
+        <a:srgbClr val="F79646"/>
       </a:accent6>
       <a:hlink>
-        <a:srgbClr val="467886"/>
+        <a:srgbClr val="0000FF"/>
       </a:hlink>
       <a:folHlink>
-        <a:srgbClr val="96607D"/>
+        <a:srgbClr val="800080"/>
       </a:folHlink>
     </a:clrScheme>
     <a:fontScheme name="Office">
       <a:majorFont>
-        <a:latin typeface="Aptos Display" panose="02110004020202020204"/>
+        <a:latin typeface="Calibri"/>
         <a:ea typeface=""/>
         <a:cs typeface=""/>
-        <a:font script="Jpan" typeface="游ゴシック Light"/>
+        <a:font script="Jpan" typeface="ＭＳ Ｐゴシック"/>
         <a:font script="Hang" typeface="맑은 고딕"/>
-        <a:font script="Hans" typeface="等线 Light"/>
+        <a:font script="Hans" typeface="宋体"/>
         <a:font script="Hant" typeface="新細明體"/>
         <a:font script="Arab" typeface="Times New Roman"/>
         <a:font script="Hebr" typeface="Times New Roman"/>
@@ -15164,31 +14898,14 @@
         <a:font script="Viet" typeface="Times New Roman"/>
         <a:font script="Uigh" typeface="Microsoft Uighur"/>
         <a:font script="Geor" typeface="Sylfaen"/>
-        <a:font script="Armn" typeface="Arial"/>
-        <a:font script="Bugi" typeface="Leelawadee UI"/>
-        <a:font script="Bopo" typeface="Microsoft JhengHei"/>
-        <a:font script="Java" typeface="Javanese Text"/>
-        <a:font script="Lisu" typeface="Segoe UI"/>
-        <a:font script="Mymr" typeface="Myanmar Text"/>
-        <a:font script="Nkoo" typeface="Ebrima"/>
-        <a:font script="Olck" typeface="Nirmala UI"/>
-        <a:font script="Osma" typeface="Ebrima"/>
-        <a:font script="Phag" typeface="Phagspa"/>
-        <a:font script="Syrn" typeface="Estrangelo Edessa"/>
-        <a:font script="Syrj" typeface="Estrangelo Edessa"/>
-        <a:font script="Syre" typeface="Estrangelo Edessa"/>
-        <a:font script="Sora" typeface="Nirmala UI"/>
-        <a:font script="Tale" typeface="Microsoft Tai Le"/>
-        <a:font script="Talu" typeface="Microsoft New Tai Lue"/>
-        <a:font script="Tfng" typeface="Ebrima"/>
       </a:majorFont>
       <a:minorFont>
-        <a:latin typeface="Aptos" panose="02110004020202020204"/>
+        <a:latin typeface="Calibri"/>
         <a:ea typeface=""/>
         <a:cs typeface=""/>
-        <a:font script="Jpan" typeface="游ゴシック"/>
+        <a:font script="Jpan" typeface="ＭＳ Ｐゴシック"/>
         <a:font script="Hang" typeface="맑은 고딕"/>
-        <a:font script="Hans" typeface="等线"/>
+        <a:font script="Hans" typeface="宋体"/>
         <a:font script="Hant" typeface="新細明體"/>
         <a:font script="Arab" typeface="Arial"/>
         <a:font script="Hebr" typeface="Arial"/>
@@ -15216,23 +14933,6 @@
         <a:font script="Viet" typeface="Arial"/>
         <a:font script="Uigh" typeface="Microsoft Uighur"/>
         <a:font script="Geor" typeface="Sylfaen"/>
-        <a:font script="Armn" typeface="Arial"/>
-        <a:font script="Bugi" typeface="Leelawadee UI"/>
-        <a:font script="Bopo" typeface="Microsoft JhengHei"/>
-        <a:font script="Java" typeface="Javanese Text"/>
-        <a:font script="Lisu" typeface="Segoe UI"/>
-        <a:font script="Mymr" typeface="Myanmar Text"/>
-        <a:font script="Nkoo" typeface="Ebrima"/>
-        <a:font script="Olck" typeface="Nirmala UI"/>
-        <a:font script="Osma" typeface="Ebrima"/>
-        <a:font script="Phag" typeface="Phagspa"/>
-        <a:font script="Syrn" typeface="Estrangelo Edessa"/>
-        <a:font script="Syrj" typeface="Estrangelo Edessa"/>
-        <a:font script="Syre" typeface="Estrangelo Edessa"/>
-        <a:font script="Sora" typeface="Nirmala UI"/>
-        <a:font script="Tale" typeface="Microsoft Tai Le"/>
-        <a:font script="Talu" typeface="Microsoft New Tai Lue"/>
-        <a:font script="Tfng" typeface="Ebrima"/>
       </a:minorFont>
     </a:fontScheme>
     <a:fmtScheme name="Office">
@@ -15244,136 +14944,180 @@
           <a:gsLst>
             <a:gs pos="0">
               <a:schemeClr val="phClr">
-                <a:lumMod val="110000"/>
-                <a:satMod val="105000"/>
-                <a:tint val="67000"/>
+                <a:tint val="50000"/>
+                <a:satMod val="300000"/>
               </a:schemeClr>
             </a:gs>
-            <a:gs pos="50000">
+            <a:gs pos="35000">
               <a:schemeClr val="phClr">
-                <a:lumMod val="105000"/>
-                <a:satMod val="103000"/>
-                <a:tint val="73000"/>
+                <a:tint val="37000"/>
+                <a:satMod val="300000"/>
               </a:schemeClr>
             </a:gs>
             <a:gs pos="100000">
               <a:schemeClr val="phClr">
-                <a:lumMod val="105000"/>
-                <a:satMod val="109000"/>
-                <a:tint val="81000"/>
+                <a:tint val="15000"/>
+                <a:satMod val="350000"/>
               </a:schemeClr>
             </a:gs>
           </a:gsLst>
-          <a:lin ang="5400000" scaled="0"/>
+          <a:lin ang="16200000" scaled="1"/>
         </a:gradFill>
         <a:gradFill rotWithShape="1">
           <a:gsLst>
             <a:gs pos="0">
               <a:schemeClr val="phClr">
-                <a:satMod val="103000"/>
-                <a:lumMod val="102000"/>
-                <a:tint val="94000"/>
-              </a:schemeClr>
-            </a:gs>
-            <a:gs pos="50000">
-              <a:schemeClr val="phClr">
-                <a:satMod val="110000"/>
-                <a:lumMod val="100000"/>
+                <a:tint val="100000"/>
                 <a:shade val="100000"/>
+                <a:satMod val="130000"/>
               </a:schemeClr>
             </a:gs>
             <a:gs pos="100000">
               <a:schemeClr val="phClr">
-                <a:lumMod val="99000"/>
-                <a:satMod val="120000"/>
-                <a:shade val="78000"/>
+                <a:tint val="50000"/>
+                <a:shade val="100000"/>
+                <a:satMod val="350000"/>
               </a:schemeClr>
             </a:gs>
           </a:gsLst>
-          <a:lin ang="5400000" scaled="0"/>
+          <a:lin ang="16200000" scaled="0"/>
         </a:gradFill>
       </a:fillStyleLst>
       <a:lnStyleLst>
-        <a:ln w="12700" cap="flat" cmpd="sng" algn="ctr">
+        <a:ln w="9525" cap="flat" cmpd="sng" algn="ctr">
           <a:solidFill>
-            <a:schemeClr val="phClr"/>
+            <a:schemeClr val="phClr">
+              <a:shade val="95000"/>
+              <a:satMod val="105000"/>
+            </a:schemeClr>
           </a:solidFill>
           <a:prstDash val="solid"/>
-          <a:miter lim="800000"/>
-        </a:ln>
-        <a:ln w="19050" cap="flat" cmpd="sng" algn="ctr">
-          <a:solidFill>
-            <a:schemeClr val="phClr"/>
-          </a:solidFill>
-          <a:prstDash val="solid"/>
-          <a:miter lim="800000"/>
         </a:ln>
         <a:ln w="25400" cap="flat" cmpd="sng" algn="ctr">
           <a:solidFill>
             <a:schemeClr val="phClr"/>
           </a:solidFill>
           <a:prstDash val="solid"/>
-          <a:miter lim="800000"/>
+        </a:ln>
+        <a:ln w="38100" cap="flat" cmpd="sng" algn="ctr">
+          <a:solidFill>
+            <a:schemeClr val="phClr"/>
+          </a:solidFill>
+          <a:prstDash val="solid"/>
         </a:ln>
       </a:lnStyleLst>
       <a:effectStyleLst>
         <a:effectStyle>
-          <a:effectLst/>
-        </a:effectStyle>
-        <a:effectStyle>
-          <a:effectLst/>
+          <a:effectLst>
+            <a:outerShdw blurRad="40000" dist="20000" dir="5400000" rotWithShape="0">
+              <a:srgbClr val="000000">
+                <a:alpha val="38000"/>
+              </a:srgbClr>
+            </a:outerShdw>
+          </a:effectLst>
         </a:effectStyle>
         <a:effectStyle>
           <a:effectLst>
-            <a:outerShdw blurRad="57150" dist="19050" dir="5400000" algn="ctr" rotWithShape="0">
+            <a:outerShdw blurRad="40000" dist="23000" dir="5400000" rotWithShape="0">
               <a:srgbClr val="000000">
-                <a:alpha val="63000"/>
+                <a:alpha val="35000"/>
               </a:srgbClr>
             </a:outerShdw>
           </a:effectLst>
+        </a:effectStyle>
+        <a:effectStyle>
+          <a:effectLst>
+            <a:outerShdw blurRad="40000" dist="23000" dir="5400000" rotWithShape="0">
+              <a:srgbClr val="000000">
+                <a:alpha val="35000"/>
+              </a:srgbClr>
+            </a:outerShdw>
+          </a:effectLst>
+          <a:scene3d>
+            <a:camera prst="orthographicFront">
+              <a:rot lat="0" lon="0" rev="0"/>
+            </a:camera>
+            <a:lightRig rig="threePt" dir="t">
+              <a:rot lat="0" lon="0" rev="1200000"/>
+            </a:lightRig>
+          </a:scene3d>
+          <a:sp3d>
+            <a:bevelT w="63500" h="25400"/>
+          </a:sp3d>
         </a:effectStyle>
       </a:effectStyleLst>
       <a:bgFillStyleLst>
         <a:solidFill>
           <a:schemeClr val="phClr"/>
         </a:solidFill>
-        <a:solidFill>
-          <a:schemeClr val="phClr">
-            <a:tint val="95000"/>
-            <a:satMod val="170000"/>
-          </a:schemeClr>
-        </a:solidFill>
         <a:gradFill rotWithShape="1">
           <a:gsLst>
             <a:gs pos="0">
               <a:schemeClr val="phClr">
-                <a:tint val="93000"/>
-                <a:satMod val="150000"/>
-                <a:shade val="98000"/>
-                <a:lumMod val="102000"/>
+                <a:tint val="40000"/>
+                <a:satMod val="350000"/>
               </a:schemeClr>
             </a:gs>
-            <a:gs pos="50000">
+            <a:gs pos="40000">
               <a:schemeClr val="phClr">
-                <a:tint val="98000"/>
-                <a:satMod val="130000"/>
-                <a:shade val="90000"/>
-                <a:lumMod val="103000"/>
+                <a:tint val="45000"/>
+                <a:shade val="99000"/>
+                <a:satMod val="350000"/>
               </a:schemeClr>
             </a:gs>
             <a:gs pos="100000">
               <a:schemeClr val="phClr">
-                <a:shade val="63000"/>
-                <a:satMod val="120000"/>
+                <a:shade val="20000"/>
+                <a:satMod val="255000"/>
               </a:schemeClr>
             </a:gs>
           </a:gsLst>
-          <a:lin ang="5400000" scaled="0"/>
+          <a:path path="circle">
+            <a:fillToRect l="50000" t="-80000" r="50000" b="180000"/>
+          </a:path>
+        </a:gradFill>
+        <a:gradFill rotWithShape="1">
+          <a:gsLst>
+            <a:gs pos="0">
+              <a:schemeClr val="phClr">
+                <a:tint val="80000"/>
+                <a:satMod val="300000"/>
+              </a:schemeClr>
+            </a:gs>
+            <a:gs pos="100000">
+              <a:schemeClr val="phClr">
+                <a:shade val="30000"/>
+                <a:satMod val="200000"/>
+              </a:schemeClr>
+            </a:gs>
+          </a:gsLst>
+          <a:path path="circle">
+            <a:fillToRect l="50000" t="50000" r="50000" b="50000"/>
+          </a:path>
         </a:gradFill>
       </a:bgFillStyleLst>
     </a:fmtScheme>
   </a:themeElements>
   <a:objectDefaults>
+    <a:spDef>
+      <a:spPr/>
+      <a:bodyPr/>
+      <a:lstStyle/>
+      <a:style>
+        <a:lnRef idx="1">
+          <a:schemeClr val="accent1"/>
+        </a:lnRef>
+        <a:fillRef idx="3">
+          <a:schemeClr val="accent1"/>
+        </a:fillRef>
+        <a:effectRef idx="2">
+          <a:schemeClr val="accent1"/>
+        </a:effectRef>
+        <a:fontRef idx="minor">
+          <a:schemeClr val="lt1"/>
+        </a:fontRef>
+      </a:style>
+    </a:spDef>
     <a:lnDef>
       <a:spPr/>
       <a:bodyPr/>
@@ -15395,10 +15139,5 @@
     </a:lnDef>
   </a:objectDefaults>
   <a:extraClrSchemeLst/>
-  <a:extLst>
-    <a:ext uri="{05A4C25C-085E-4340-85A3-A5531E510DB2}">
-      <thm15:themeFamily xmlns:thm15="http://schemas.microsoft.com/office/thememl/2012/main" name="Office Theme" id="{2E142A2C-CD16-42D6-873A-C26D2A0506FA}" vid="{1BDDFF52-6CD6-40A5-AB3C-68EB2F1E4D0A}"/>
-    </a:ext>
-  </a:extLst>
 </a:theme>
 </file>